--- a/laporan/ppt/presentasi-uts-pcd-kelompok-9-biru.pptx
+++ b/laporan/ppt/presentasi-uts-pcd-kelompok-9-biru.pptx
@@ -2,23 +2,23 @@
 <file path=ppt/presentation.xml><?xml version="1.0" encoding="utf-8"?>
 <p:presentation xmlns:p="http://schemas.openxmlformats.org/presentationml/2006/main">
   <p:sldMasterIdLst>
-    <p:sldMasterId xmlns:r="http://schemas.openxmlformats.org/officeDocument/2006/relationships" id="2147483648" r:id="R262fc95338dd47c9"/>
+    <p:sldMasterId xmlns:r="http://schemas.openxmlformats.org/officeDocument/2006/relationships" id="2147483648" r:id="Rca20214c9a654dec"/>
   </p:sldMasterIdLst>
   <p:notesMasterIdLst>
-    <p:notesMasterId xmlns:r="http://schemas.openxmlformats.org/officeDocument/2006/relationships" r:id="R75b6ad49fb34456e"/>
+    <p:notesMasterId xmlns:r="http://schemas.openxmlformats.org/officeDocument/2006/relationships" r:id="R9185b75f11524757"/>
   </p:notesMasterIdLst>
   <p:sldIdLst>
-    <p:sldId xmlns:r="http://schemas.openxmlformats.org/officeDocument/2006/relationships" id="256" r:id="R5747e79761ad4b0c"/>
-    <p:sldId xmlns:r="http://schemas.openxmlformats.org/officeDocument/2006/relationships" id="257" r:id="R81bce5adcfce4c9f"/>
-    <p:sldId xmlns:r="http://schemas.openxmlformats.org/officeDocument/2006/relationships" id="258" r:id="Rf4e83d4257094cc4"/>
-    <p:sldId xmlns:r="http://schemas.openxmlformats.org/officeDocument/2006/relationships" id="259" r:id="R0ece215413864675"/>
-    <p:sldId xmlns:r="http://schemas.openxmlformats.org/officeDocument/2006/relationships" id="260" r:id="R4393e141f33c4879"/>
-    <p:sldId xmlns:r="http://schemas.openxmlformats.org/officeDocument/2006/relationships" id="261" r:id="Rac5663df992d4291"/>
-    <p:sldId xmlns:r="http://schemas.openxmlformats.org/officeDocument/2006/relationships" id="262" r:id="R8c3afded51164c76"/>
-    <p:sldId xmlns:r="http://schemas.openxmlformats.org/officeDocument/2006/relationships" id="263" r:id="R7e007032277743ce"/>
-    <p:sldId xmlns:r="http://schemas.openxmlformats.org/officeDocument/2006/relationships" id="264" r:id="R5ec1185ae4084318"/>
-    <p:sldId xmlns:r="http://schemas.openxmlformats.org/officeDocument/2006/relationships" id="265" r:id="R7788be9f19904ebd"/>
-    <p:sldId xmlns:r="http://schemas.openxmlformats.org/officeDocument/2006/relationships" id="266" r:id="Rfd22a1a863e74e55"/>
+    <p:sldId xmlns:r="http://schemas.openxmlformats.org/officeDocument/2006/relationships" id="256" r:id="Rfb61f57bd95743b2"/>
+    <p:sldId xmlns:r="http://schemas.openxmlformats.org/officeDocument/2006/relationships" id="257" r:id="Rebf7966107b94d77"/>
+    <p:sldId xmlns:r="http://schemas.openxmlformats.org/officeDocument/2006/relationships" id="258" r:id="R3e1414bac90540e5"/>
+    <p:sldId xmlns:r="http://schemas.openxmlformats.org/officeDocument/2006/relationships" id="259" r:id="R96fac98164c74100"/>
+    <p:sldId xmlns:r="http://schemas.openxmlformats.org/officeDocument/2006/relationships" id="260" r:id="R33ed08eab75d4e0e"/>
+    <p:sldId xmlns:r="http://schemas.openxmlformats.org/officeDocument/2006/relationships" id="261" r:id="Rbabfabe66caa4c86"/>
+    <p:sldId xmlns:r="http://schemas.openxmlformats.org/officeDocument/2006/relationships" id="262" r:id="Ra0b5bd3fe97342bb"/>
+    <p:sldId xmlns:r="http://schemas.openxmlformats.org/officeDocument/2006/relationships" id="263" r:id="R908b72c42aa842cf"/>
+    <p:sldId xmlns:r="http://schemas.openxmlformats.org/officeDocument/2006/relationships" id="264" r:id="R051b63d107a94432"/>
+    <p:sldId xmlns:r="http://schemas.openxmlformats.org/officeDocument/2006/relationships" id="265" r:id="Ra7b6e40e1c274c00"/>
+    <p:sldId xmlns:r="http://schemas.openxmlformats.org/officeDocument/2006/relationships" id="266" r:id="R4ebeff29d9d84361"/>
   </p:sldIdLst>
   <p:sldSz cx="12192000" cy="6858000"/>
   <p:notesSz cx="6858000" cy="9144000"/>
@@ -462,7 +462,7 @@
           </a:p>
           <a:p xmlns:a="http://schemas.openxmlformats.org/drawingml/2006/main">
             <a:r>
-              <a:t>Perkenalkan Kelompok 9: Bambang Herlambang, NRP 5803024019, dan Dustin Pranata Wangsawidjaja, NRP 5803024021. Sampaikan bahwa presentasi kelompok disusun untuk tiga soal UTS INF301. Soal 1 membahas selisih LoG, soal 2 merupakan bagian anggota kelompok yang akan mengisi slide 5–7, dan soal 3 menghitung koin berdasarkan ukuran. Bagian soal 2 masih kosong pada berkas ini.</a:t>
+              <a:t>Perkenalkan Kelompok 9: Bambang Herlambang, NRP 5803024019, dan Dustin Pranata Wangsawidjaja, NRP 5803024021. Sampaikan bahwa presentasi kelompok disusun untuk tiga soal UTS INF301. Soal 1 membahas selisih LoG, soal 2 membahas segmentasi karakter oleh Dustin pada slide 5–7, dan soal 3 menghitung koin berdasarkan ukuran. Pembagian tugas: Bambang mengerjakan nomor 1 dan 3; Dustin nomor 2.</a:t>
             </a:r>
           </a:p>
           <a:p xmlns:a="http://schemas.openxmlformats.org/drawingml/2006/main">
@@ -642,7 +642,7 @@
           </a:p>
           <a:p xmlns:a="http://schemas.openxmlformats.org/drawingml/2006/main">
             <a:r>
-              <a:t>Gunakan 45 detik untuk mengakhiri paparan. Ringkas lisan hasil soal 1: dua respons LoG dengan sigma sesuai soal dan selisih bertanda, disertai keterbatasan sampling. Ringkas soal 3: segmentasi dan regionprops menghasilkan seratus koin dalam empat kelompok, masing-masing 25. Ringkasan soal 2 disesuaikan setelah anggota kelompok mengisi slide kosong. Ucapkan terima kasih. Mulai tanya jawab tepat pada menit 18:00 dan alokasikan dua menit. Saat ditanya akurasi atau ukuran fisik, batasi jawaban sesuai data yang diuji dan kebutuhan kalibrasi. Akhiri pada menit 20:00.</a:t>
+              <a:t>Gunakan 45 detik untuk mengakhiri paparan. Ringkas lisan hasil soal 1: dua respons LoG dengan sigma sesuai soal dan selisih bertanda, disertai keterbatasan sampling. Ringkas soal 3: segmentasi dan regionprops menghasilkan seratus koin dalam empat kelompok, masing-masing 25. Soal 2 menghasilkan 18 gambar karakter individual dari citra yang disertakan. Ucapkan terima kasih. Mulai tanya jawab tepat pada menit 18:00 dan alokasikan dua menit. Saat ditanya akurasi atau ukuran fisik, batasi jawaban sesuai data yang diuji dan kebutuhan kalibrasi. Akhiri pada menit 20:00.</a:t>
             </a:r>
           </a:p>
           <a:p xmlns:a="http://schemas.openxmlformats.org/drawingml/2006/main">
@@ -1002,7 +1002,7 @@
           </a:p>
           <a:p xmlns:a="http://schemas.openxmlformats.org/drawingml/2006/main">
             <a:r>
-              <a:t>Alokasi waktu soal 2, slide pertama. Slide sengaja kosong sesuai permintaan pengguna. Waktu dicadangkan untuk materi anggota kelompok dan belum berisi hasil atau klaim implementasi.</a:t>
+              <a:t>Bagian ini dikerjakan Dustin. Tunjuk citra teks: ZEUS, TWINPEAK, dan ACOSTA memiliki total acuan 18 karakter. Tujuannya memisahkan tiap karakter menjadi berkas gambar, bukan OCR. Program memakai grayscale, ambang Otsu, lalu membalik mask apabila foreground lebih dari setengah citra. Karakter diasumsikan terang, terpisah, dan latarnya seragam. Hasil citra ini sesuai 4+8+6 karakter. Sumber: soal2/main.py, soal2/README.md, soal2/teks.png; dokumen soal UTS INF301 yang diberikan.</a:t>
             </a:r>
           </a:p>
         </p:txBody>
@@ -1082,7 +1082,7 @@
           </a:p>
           <a:p xmlns:a="http://schemas.openxmlformats.org/drawingml/2006/main">
             <a:r>
-              <a:t>Alokasi waktu soal 2, slide kedua. Slide sengaja kosong sesuai permintaan pengguna. Waktu dicadangkan untuk materi anggota kelompok.</a:t>
+              <a:t>Jelaskan hapus objek kurang dari 10 piksel, label dengan konektivitas 8, lalu regionprops. Bbox menyaring border: tinggi dan lebar region masing-masing harus kurang dari setengah dimensi citra. Region.image hanya memuat mask objek itu, sehingga karakter tetangga di dalam bbox tidak ikut tersalin. Centroid dipakai RANSAC untuk mengelompokkan baris dengan ambang jarak 0,045 kali dimensi terbesar, dua sampel, dan maksimal 2000 percobaan. Baris diurutkan atas ke bawah; karakter kiri ke kanan. Potongan diberi margin hitam tiga piksel. Sumber: soal2/main.py; https://scikit-image.org/docs/stable/api/skimage.measure.html#skimage.measure.regionprops.</a:t>
             </a:r>
           </a:p>
         </p:txBody>
@@ -1162,7 +1162,7 @@
           </a:p>
           <a:p xmlns:a="http://schemas.openxmlformats.org/drawingml/2006/main">
             <a:r>
-              <a:t>Alokasi waktu soal 2, slide ketiga. Slide sengaja kosong sesuai permintaan pengguna. Waktu dicadangkan untuk materi anggota kelompok.</a:t>
+              <a:t>Tunjuk bbox di kiri dan 18 PNG individual di kanan. Setiap potongan tetap mengikuti orientasi asli dan berupa mask biner. Pemeriksaan ulang menunjukkan 18 gambar, masing-masing satu komponen 8 tetangga. Pada 20 pemanggilan pengurutan data yang sama diperoleh urutan yang sama, tetapi kode tidak memasang seed sehingga hasil tersebut bukan jaminan determinisme umum. Batas metode: karakter bersentuhan bergabung, bagian huruf terpisah dapat menjadi beberapa objek, dan pengurutan mengasumsikan baris hampir lurus serta tidak vertikal. Ukuran filter border juga bergantung pada citra. Sumber: soal2/hasil_karakter/ dan soal2/main.py.</a:t>
             </a:r>
           </a:p>
         </p:txBody>
@@ -3785,12 +3785,12 @@
   </p:cSld>
   <p:clrMap bg1="lt1" tx1="dk1" bg2="lt2" tx2="dk2" accent1="accent1" accent2="accent2" accent3="accent3" accent4="accent4" accent5="accent5" accent6="accent6" hlink="hlink" folHlink="folHlink"/>
   <p:sldLayoutIdLst>
-    <p:sldLayoutId xmlns:r="http://schemas.openxmlformats.org/officeDocument/2006/relationships" id="2147483649" r:id="R1035a6e5f5e94ca3"/>
-    <p:sldLayoutId xmlns:r="http://schemas.openxmlformats.org/officeDocument/2006/relationships" id="2147483650" r:id="R943fee9a80e84f78"/>
-    <p:sldLayoutId xmlns:r="http://schemas.openxmlformats.org/officeDocument/2006/relationships" id="2147483651" r:id="R556a6b854dd44b5a"/>
-    <p:sldLayoutId xmlns:r="http://schemas.openxmlformats.org/officeDocument/2006/relationships" id="2147483652" r:id="R5dd93d3d7fe949de"/>
-    <p:sldLayoutId xmlns:r="http://schemas.openxmlformats.org/officeDocument/2006/relationships" id="2147483653" r:id="R7d4eac309ef94e1b"/>
-    <p:sldLayoutId xmlns:r="http://schemas.openxmlformats.org/officeDocument/2006/relationships" id="2147483654" r:id="Rde2ff034b3ac4336"/>
+    <p:sldLayoutId xmlns:r="http://schemas.openxmlformats.org/officeDocument/2006/relationships" id="2147483649" r:id="Rc4c1c157791a4782"/>
+    <p:sldLayoutId xmlns:r="http://schemas.openxmlformats.org/officeDocument/2006/relationships" id="2147483650" r:id="R9e23888226294aaa"/>
+    <p:sldLayoutId xmlns:r="http://schemas.openxmlformats.org/officeDocument/2006/relationships" id="2147483651" r:id="Ra0b35e9332a7413e"/>
+    <p:sldLayoutId xmlns:r="http://schemas.openxmlformats.org/officeDocument/2006/relationships" id="2147483652" r:id="R34768b8153f14f43"/>
+    <p:sldLayoutId xmlns:r="http://schemas.openxmlformats.org/officeDocument/2006/relationships" id="2147483653" r:id="R2c4e292d105d4137"/>
+    <p:sldLayoutId xmlns:r="http://schemas.openxmlformats.org/officeDocument/2006/relationships" id="2147483654" r:id="Rfea5ddb1a0f6470f"/>
   </p:sldLayoutIdLst>
   <p:txStyles>
     <p:titleStyle>
@@ -4351,7 +4351,7 @@
           <p:nvPr/>
         </p:nvPicPr>
         <p:blipFill>
-          <a:blip xmlns:r="http://schemas.openxmlformats.org/officeDocument/2006/relationships" xmlns:a="http://schemas.openxmlformats.org/drawingml/2006/main" r:embed="R20d6ffaac5ac4fb7"/>
+          <a:blip xmlns:r="http://schemas.openxmlformats.org/officeDocument/2006/relationships" xmlns:a="http://schemas.openxmlformats.org/drawingml/2006/main" r:embed="R2ecc2c49ea8c4c25"/>
           <a:srcRect xmlns:a="http://schemas.openxmlformats.org/drawingml/2006/main" l="0" t="27" r="0" b="27"/>
           <a:stretch xmlns:a="http://schemas.openxmlformats.org/drawingml/2006/main">
             <a:fillRect l="0" t="0" r="0" b="0"/>
@@ -4521,7 +4521,7 @@
                 <a:ea typeface="Arial"/>
                 <a:cs typeface="Arial"/>
               </a:rPr>
-              <a:t>01 / 11</a:t>
+              <a:t/>
             </a:r>
           </a:p>
         </p:txBody>
@@ -5157,7 +5157,7 @@
                 <a:ea typeface="Arial"/>
                 <a:cs typeface="Arial"/>
               </a:rPr>
-              <a:t>Soal nomor 1, 2, dan 3</a:t>
+              <a:t/>
             </a:r>
           </a:p>
         </p:txBody>
@@ -5654,7 +5654,7 @@
           <p:nvPr/>
         </p:nvPicPr>
         <p:blipFill>
-          <a:blip xmlns:r="http://schemas.openxmlformats.org/officeDocument/2006/relationships" xmlns:a="http://schemas.openxmlformats.org/drawingml/2006/main" r:embed="R9d0ed3b47eb44871"/>
+          <a:blip xmlns:r="http://schemas.openxmlformats.org/officeDocument/2006/relationships" xmlns:a="http://schemas.openxmlformats.org/drawingml/2006/main" r:embed="Rbc97e1ddd95648f2"/>
           <a:stretch xmlns:a="http://schemas.openxmlformats.org/drawingml/2006/main"/>
         </p:blipFill>
         <p:spPr>
@@ -5883,7 +5883,7 @@
           </a:bodyPr>
           <a:lstStyle xmlns:a="http://schemas.openxmlformats.org/drawingml/2006/main">
             <a:defPPr algn="ctr">
-              <a:defRPr sz="1800">
+              <a:defRPr sz="1650">
                 <a:solidFill>
                   <a:srgbClr val="BCD0EB"/>
                 </a:solidFill>
@@ -5893,7 +5893,7 @@
               </a:defRPr>
             </a:defPPr>
             <a:lvl1pPr algn="ctr">
-              <a:defRPr sz="1800">
+              <a:defRPr sz="1650">
                 <a:solidFill>
                   <a:srgbClr val="BCD0EB"/>
                 </a:solidFill>
@@ -5903,7 +5903,7 @@
               </a:defRPr>
             </a:lvl1pPr>
             <a:lvl2pPr algn="ctr">
-              <a:defRPr sz="1800">
+              <a:defRPr sz="1650">
                 <a:solidFill>
                   <a:srgbClr val="BCD0EB"/>
                 </a:solidFill>
@@ -5913,7 +5913,7 @@
               </a:defRPr>
             </a:lvl2pPr>
             <a:lvl3pPr algn="ctr">
-              <a:defRPr sz="1800">
+              <a:defRPr sz="1650">
                 <a:solidFill>
                   <a:srgbClr val="BCD0EB"/>
                 </a:solidFill>
@@ -5923,7 +5923,7 @@
               </a:defRPr>
             </a:lvl3pPr>
             <a:lvl4pPr algn="ctr">
-              <a:defRPr sz="1800">
+              <a:defRPr sz="1650">
                 <a:solidFill>
                   <a:srgbClr val="BCD0EB"/>
                 </a:solidFill>
@@ -5933,7 +5933,7 @@
               </a:defRPr>
             </a:lvl4pPr>
             <a:lvl5pPr algn="ctr">
-              <a:defRPr sz="1800">
+              <a:defRPr sz="1650">
                 <a:solidFill>
                   <a:srgbClr val="BCD0EB"/>
                 </a:solidFill>
@@ -5943,7 +5943,7 @@
               </a:defRPr>
             </a:lvl5pPr>
             <a:lvl6pPr algn="ctr">
-              <a:defRPr sz="1800">
+              <a:defRPr sz="1650">
                 <a:solidFill>
                   <a:srgbClr val="BCD0EB"/>
                 </a:solidFill>
@@ -5953,7 +5953,7 @@
               </a:defRPr>
             </a:lvl6pPr>
             <a:lvl7pPr algn="ctr">
-              <a:defRPr sz="1800">
+              <a:defRPr sz="1650">
                 <a:solidFill>
                   <a:srgbClr val="BCD0EB"/>
                 </a:solidFill>
@@ -5963,7 +5963,7 @@
               </a:defRPr>
             </a:lvl7pPr>
             <a:lvl8pPr algn="ctr">
-              <a:defRPr sz="1800">
+              <a:defRPr sz="1650">
                 <a:solidFill>
                   <a:srgbClr val="BCD0EB"/>
                 </a:solidFill>
@@ -5973,7 +5973,7 @@
               </a:defRPr>
             </a:lvl8pPr>
             <a:lvl9pPr algn="ctr">
-              <a:defRPr sz="1800">
+              <a:defRPr sz="1650">
                 <a:solidFill>
                   <a:srgbClr val="BCD0EB"/>
                 </a:solidFill>
@@ -5985,7 +5985,7 @@
           </a:lstStyle>
           <a:p xmlns:a="http://schemas.openxmlformats.org/drawingml/2006/main">
             <a:pPr algn="ctr">
-              <a:defRPr sz="1800">
+              <a:defRPr sz="1650">
                 <a:solidFill>
                   <a:srgbClr val="BCD0EB"/>
                 </a:solidFill>
@@ -5995,7 +5995,7 @@
               </a:defRPr>
             </a:pPr>
             <a:r>
-              <a:rPr sz="1800">
+              <a:rPr sz="1650">
                 <a:solidFill>
                   <a:srgbClr val="BCD0EB"/>
                 </a:solidFill>
@@ -6003,7 +6003,7 @@
                 <a:ea typeface="Arial"/>
                 <a:cs typeface="Arial"/>
               </a:rPr>
-              <a:t>5803024019</a:t>
+              <a:t>5803024019 (Soal 1 dan 3)</a:t>
             </a:r>
           </a:p>
         </p:txBody>
@@ -6042,7 +6042,7 @@
           </a:bodyPr>
           <a:lstStyle xmlns:a="http://schemas.openxmlformats.org/drawingml/2006/main">
             <a:defPPr algn="ctr">
-              <a:defRPr sz="1800">
+              <a:defRPr sz="1650">
                 <a:solidFill>
                   <a:srgbClr val="BCD0EB"/>
                 </a:solidFill>
@@ -6052,7 +6052,7 @@
               </a:defRPr>
             </a:defPPr>
             <a:lvl1pPr algn="ctr">
-              <a:defRPr sz="1800">
+              <a:defRPr sz="1650">
                 <a:solidFill>
                   <a:srgbClr val="BCD0EB"/>
                 </a:solidFill>
@@ -6062,7 +6062,7 @@
               </a:defRPr>
             </a:lvl1pPr>
             <a:lvl2pPr algn="ctr">
-              <a:defRPr sz="1800">
+              <a:defRPr sz="1650">
                 <a:solidFill>
                   <a:srgbClr val="BCD0EB"/>
                 </a:solidFill>
@@ -6072,7 +6072,7 @@
               </a:defRPr>
             </a:lvl2pPr>
             <a:lvl3pPr algn="ctr">
-              <a:defRPr sz="1800">
+              <a:defRPr sz="1650">
                 <a:solidFill>
                   <a:srgbClr val="BCD0EB"/>
                 </a:solidFill>
@@ -6082,7 +6082,7 @@
               </a:defRPr>
             </a:lvl3pPr>
             <a:lvl4pPr algn="ctr">
-              <a:defRPr sz="1800">
+              <a:defRPr sz="1650">
                 <a:solidFill>
                   <a:srgbClr val="BCD0EB"/>
                 </a:solidFill>
@@ -6092,7 +6092,7 @@
               </a:defRPr>
             </a:lvl4pPr>
             <a:lvl5pPr algn="ctr">
-              <a:defRPr sz="1800">
+              <a:defRPr sz="1650">
                 <a:solidFill>
                   <a:srgbClr val="BCD0EB"/>
                 </a:solidFill>
@@ -6102,7 +6102,7 @@
               </a:defRPr>
             </a:lvl5pPr>
             <a:lvl6pPr algn="ctr">
-              <a:defRPr sz="1800">
+              <a:defRPr sz="1650">
                 <a:solidFill>
                   <a:srgbClr val="BCD0EB"/>
                 </a:solidFill>
@@ -6112,7 +6112,7 @@
               </a:defRPr>
             </a:lvl6pPr>
             <a:lvl7pPr algn="ctr">
-              <a:defRPr sz="1800">
+              <a:defRPr sz="1650">
                 <a:solidFill>
                   <a:srgbClr val="BCD0EB"/>
                 </a:solidFill>
@@ -6122,7 +6122,7 @@
               </a:defRPr>
             </a:lvl7pPr>
             <a:lvl8pPr algn="ctr">
-              <a:defRPr sz="1800">
+              <a:defRPr sz="1650">
                 <a:solidFill>
                   <a:srgbClr val="BCD0EB"/>
                 </a:solidFill>
@@ -6132,7 +6132,7 @@
               </a:defRPr>
             </a:lvl8pPr>
             <a:lvl9pPr algn="ctr">
-              <a:defRPr sz="1800">
+              <a:defRPr sz="1650">
                 <a:solidFill>
                   <a:srgbClr val="BCD0EB"/>
                 </a:solidFill>
@@ -6144,7 +6144,7 @@
           </a:lstStyle>
           <a:p xmlns:a="http://schemas.openxmlformats.org/drawingml/2006/main">
             <a:pPr algn="ctr">
-              <a:defRPr sz="1800">
+              <a:defRPr sz="1650">
                 <a:solidFill>
                   <a:srgbClr val="BCD0EB"/>
                 </a:solidFill>
@@ -6154,7 +6154,7 @@
               </a:defRPr>
             </a:pPr>
             <a:r>
-              <a:rPr sz="1800">
+              <a:rPr sz="1650">
                 <a:solidFill>
                   <a:srgbClr val="BCD0EB"/>
                 </a:solidFill>
@@ -6162,7 +6162,7 @@
                 <a:ea typeface="Arial"/>
                 <a:cs typeface="Arial"/>
               </a:rPr>
-              <a:t>5803024021</a:t>
+              <a:t>5803024021 (Soal 2)</a:t>
             </a:r>
           </a:p>
         </p:txBody>
@@ -6211,7 +6211,7 @@
           <p:nvPr/>
         </p:nvPicPr>
         <p:blipFill>
-          <a:blip xmlns:r="http://schemas.openxmlformats.org/officeDocument/2006/relationships" xmlns:a="http://schemas.openxmlformats.org/drawingml/2006/main" r:embed="Reb3cb7a2231045f3"/>
+          <a:blip xmlns:r="http://schemas.openxmlformats.org/officeDocument/2006/relationships" xmlns:a="http://schemas.openxmlformats.org/drawingml/2006/main" r:embed="R4261f189de984be6"/>
           <a:srcRect xmlns:a="http://schemas.openxmlformats.org/drawingml/2006/main" l="0" t="27" r="0" b="27"/>
           <a:stretch xmlns:a="http://schemas.openxmlformats.org/drawingml/2006/main">
             <a:fillRect l="0" t="0" r="0" b="0"/>
@@ -6540,7 +6540,7 @@
                 <a:ea typeface="Arial"/>
                 <a:cs typeface="Arial"/>
               </a:rPr>
-              <a:t>10 / 11</a:t>
+              <a:t>09 / 09</a:t>
             </a:r>
           </a:p>
         </p:txBody>
@@ -6560,7 +6560,7 @@
           <p:nvPr/>
         </p:nvPicPr>
         <p:blipFill>
-          <a:blip xmlns:r="http://schemas.openxmlformats.org/officeDocument/2006/relationships" xmlns:a="http://schemas.openxmlformats.org/drawingml/2006/main" r:embed="R93eb488f9b2f4bec"/>
+          <a:blip xmlns:r="http://schemas.openxmlformats.org/officeDocument/2006/relationships" xmlns:a="http://schemas.openxmlformats.org/drawingml/2006/main" r:embed="R06f1367862bb4004"/>
           <a:stretch xmlns:a="http://schemas.openxmlformats.org/drawingml/2006/main"/>
         </p:blipFill>
         <p:spPr>
@@ -7600,7 +7600,7 @@
           <p:nvPr/>
         </p:nvPicPr>
         <p:blipFill>
-          <a:blip xmlns:r="http://schemas.openxmlformats.org/officeDocument/2006/relationships" xmlns:a="http://schemas.openxmlformats.org/drawingml/2006/main" r:embed="R01f3d34ea32141c7"/>
+          <a:blip xmlns:r="http://schemas.openxmlformats.org/officeDocument/2006/relationships" xmlns:a="http://schemas.openxmlformats.org/drawingml/2006/main" r:embed="Rce267f8e417049ae"/>
           <a:srcRect xmlns:a="http://schemas.openxmlformats.org/drawingml/2006/main" l="0" t="27" r="0" b="27"/>
           <a:stretch xmlns:a="http://schemas.openxmlformats.org/drawingml/2006/main">
             <a:fillRect l="0" t="0" r="0" b="0"/>
@@ -7770,7 +7770,7 @@
                 <a:ea typeface="Arial"/>
                 <a:cs typeface="Arial"/>
               </a:rPr>
-              <a:t>11 / 11</a:t>
+              <a:t/>
             </a:r>
           </a:p>
         </p:txBody>
@@ -8088,7 +8088,7 @@
                 <a:ea typeface="Arial"/>
                 <a:cs typeface="Arial"/>
               </a:rPr>
-              <a:t>Diskusi dan tanya jawab</a:t>
+              <a:t/>
             </a:r>
           </a:p>
         </p:txBody>
@@ -8296,7 +8296,7 @@
           <p:nvPr/>
         </p:nvPicPr>
         <p:blipFill>
-          <a:blip xmlns:r="http://schemas.openxmlformats.org/officeDocument/2006/relationships" xmlns:a="http://schemas.openxmlformats.org/drawingml/2006/main" r:embed="R678563a73f6c4709"/>
+          <a:blip xmlns:r="http://schemas.openxmlformats.org/officeDocument/2006/relationships" xmlns:a="http://schemas.openxmlformats.org/drawingml/2006/main" r:embed="R8a9eaf8c0ed74071"/>
           <a:srcRect xmlns:a="http://schemas.openxmlformats.org/drawingml/2006/main" l="0" t="27" r="0" b="27"/>
           <a:stretch xmlns:a="http://schemas.openxmlformats.org/drawingml/2006/main">
             <a:fillRect l="0" t="0" r="0" b="0"/>
@@ -8625,7 +8625,7 @@
                 <a:ea typeface="Arial"/>
                 <a:cs typeface="Arial"/>
               </a:rPr>
-              <a:t>02 / 11</a:t>
+              <a:t>01 / 09</a:t>
             </a:r>
           </a:p>
         </p:txBody>
@@ -8645,7 +8645,7 @@
           <p:nvPr/>
         </p:nvPicPr>
         <p:blipFill>
-          <a:blip xmlns:r="http://schemas.openxmlformats.org/officeDocument/2006/relationships" xmlns:a="http://schemas.openxmlformats.org/drawingml/2006/main" r:embed="R989236f53b8e446b"/>
+          <a:blip xmlns:r="http://schemas.openxmlformats.org/officeDocument/2006/relationships" xmlns:a="http://schemas.openxmlformats.org/drawingml/2006/main" r:embed="R9363851ad9574950"/>
           <a:stretch xmlns:a="http://schemas.openxmlformats.org/drawingml/2006/main"/>
         </p:blipFill>
         <p:spPr>
@@ -9504,7 +9504,7 @@
           <p:nvPr/>
         </p:nvPicPr>
         <p:blipFill>
-          <a:blip xmlns:r="http://schemas.openxmlformats.org/officeDocument/2006/relationships" xmlns:a="http://schemas.openxmlformats.org/drawingml/2006/main" r:embed="R5da9665c236e4227"/>
+          <a:blip xmlns:r="http://schemas.openxmlformats.org/officeDocument/2006/relationships" xmlns:a="http://schemas.openxmlformats.org/drawingml/2006/main" r:embed="Rd7bebb561a4f4089"/>
           <a:srcRect xmlns:a="http://schemas.openxmlformats.org/drawingml/2006/main" l="0" t="27" r="0" b="27"/>
           <a:stretch xmlns:a="http://schemas.openxmlformats.org/drawingml/2006/main">
             <a:fillRect l="0" t="0" r="0" b="0"/>
@@ -9833,7 +9833,7 @@
                 <a:ea typeface="Arial"/>
                 <a:cs typeface="Arial"/>
               </a:rPr>
-              <a:t>03 / 11</a:t>
+              <a:t>02 / 09</a:t>
             </a:r>
           </a:p>
         </p:txBody>
@@ -10012,7 +10012,7 @@
           <p:nvPr/>
         </p:nvPicPr>
         <p:blipFill>
-          <a:blip xmlns:r="http://schemas.openxmlformats.org/officeDocument/2006/relationships" xmlns:a="http://schemas.openxmlformats.org/drawingml/2006/main" r:embed="R241beeaf6b974102"/>
+          <a:blip xmlns:r="http://schemas.openxmlformats.org/officeDocument/2006/relationships" xmlns:a="http://schemas.openxmlformats.org/drawingml/2006/main" r:embed="Rbd57c4aa049f46aa"/>
           <a:stretch xmlns:a="http://schemas.openxmlformats.org/drawingml/2006/main"/>
         </p:blipFill>
         <p:spPr>
@@ -10199,7 +10199,7 @@
           <p:nvPr/>
         </p:nvPicPr>
         <p:blipFill>
-          <a:blip xmlns:r="http://schemas.openxmlformats.org/officeDocument/2006/relationships" xmlns:a="http://schemas.openxmlformats.org/drawingml/2006/main" r:embed="R98031f97e0e94b35"/>
+          <a:blip xmlns:r="http://schemas.openxmlformats.org/officeDocument/2006/relationships" xmlns:a="http://schemas.openxmlformats.org/drawingml/2006/main" r:embed="Rb5de5933d6f04649"/>
           <a:stretch xmlns:a="http://schemas.openxmlformats.org/drawingml/2006/main"/>
         </p:blipFill>
         <p:spPr>
@@ -10386,7 +10386,7 @@
           <p:nvPr/>
         </p:nvPicPr>
         <p:blipFill>
-          <a:blip xmlns:r="http://schemas.openxmlformats.org/officeDocument/2006/relationships" xmlns:a="http://schemas.openxmlformats.org/drawingml/2006/main" r:embed="Rdbed417bb6f34b15"/>
+          <a:blip xmlns:r="http://schemas.openxmlformats.org/officeDocument/2006/relationships" xmlns:a="http://schemas.openxmlformats.org/drawingml/2006/main" r:embed="R0a4a48d86612449a"/>
           <a:stretch xmlns:a="http://schemas.openxmlformats.org/drawingml/2006/main"/>
         </p:blipFill>
         <p:spPr>
@@ -11125,7 +11125,7 @@
           <p:nvPr/>
         </p:nvPicPr>
         <p:blipFill>
-          <a:blip xmlns:r="http://schemas.openxmlformats.org/officeDocument/2006/relationships" xmlns:a="http://schemas.openxmlformats.org/drawingml/2006/main" r:embed="Rdf609fe0aa164323"/>
+          <a:blip xmlns:r="http://schemas.openxmlformats.org/officeDocument/2006/relationships" xmlns:a="http://schemas.openxmlformats.org/drawingml/2006/main" r:embed="Ra6ecc9a035cc4cf0"/>
           <a:srcRect xmlns:a="http://schemas.openxmlformats.org/drawingml/2006/main" l="0" t="27" r="0" b="27"/>
           <a:stretch xmlns:a="http://schemas.openxmlformats.org/drawingml/2006/main">
             <a:fillRect l="0" t="0" r="0" b="0"/>
@@ -11454,7 +11454,7 @@
                 <a:ea typeface="Arial"/>
                 <a:cs typeface="Arial"/>
               </a:rPr>
-              <a:t>04 / 11</a:t>
+              <a:t>03 / 09</a:t>
             </a:r>
           </a:p>
         </p:txBody>
@@ -12627,7 +12627,7 @@
           <p:nvPr/>
         </p:nvPicPr>
         <p:blipFill>
-          <a:blip xmlns:r="http://schemas.openxmlformats.org/officeDocument/2006/relationships" xmlns:a="http://schemas.openxmlformats.org/drawingml/2006/main" r:embed="R203f1626fee14f71"/>
+          <a:blip xmlns:r="http://schemas.openxmlformats.org/officeDocument/2006/relationships" xmlns:a="http://schemas.openxmlformats.org/drawingml/2006/main" r:embed="R19d7784da8924c71"/>
           <a:srcRect xmlns:a="http://schemas.openxmlformats.org/drawingml/2006/main" l="0" t="27" r="0" b="27"/>
           <a:stretch xmlns:a="http://schemas.openxmlformats.org/drawingml/2006/main">
             <a:fillRect l="0" t="0" r="0" b="0"/>
@@ -12643,6 +12643,1061 @@
           </a:prstGeom>
         </p:spPr>
       </p:pic>
+      <p:sp>
+        <p:nvSpPr>
+          <p:cNvPr id="3" name="judul-slide">
+            <a:extLst xmlns:a="http://schemas.openxmlformats.org/drawingml/2006/main">
+              <a:ext uri="{FF2B5EF4-FFF2-40B4-BE49-F238E27FC236}">
+                <a16:creationId xmlns:a16="http://schemas.microsoft.com/office/drawing/2014/main" id="{8C531EE8-1661-4434-B613-17A909A8CD1D}"/>
+              </a:ext>
+            </a:extLst>
+          </p:cNvPr>
+          <p:cNvSpPr>
+            <a:spLocks xmlns:a="http://schemas.openxmlformats.org/drawingml/2006/main" noGrp="1"/>
+          </p:cNvSpPr>
+          <p:nvPr/>
+        </p:nvSpPr>
+        <p:spPr>
+          <a:xfrm xmlns:a="http://schemas.openxmlformats.org/drawingml/2006/main">
+            <a:off x="609600" y="428625"/>
+            <a:ext cx="10972800" cy="952500"/>
+          </a:xfrm>
+          <a:prstGeom xmlns:a="http://schemas.openxmlformats.org/drawingml/2006/main" prst="rect">
+            <a:avLst/>
+          </a:prstGeom>
+          <a:noFill xmlns:a="http://schemas.openxmlformats.org/drawingml/2006/main"/>
+          <a:ln xmlns:a="http://schemas.openxmlformats.org/drawingml/2006/main" w="0">
+            <a:noFill/>
+            <a:prstDash val="solid"/>
+          </a:ln>
+        </p:spPr>
+        <p:txBody>
+          <a:bodyPr xmlns:a="http://schemas.openxmlformats.org/drawingml/2006/main" wrap="square" lIns="0" tIns="0" rIns="0" bIns="0" anchor="t">
+            <a:noAutofit/>
+          </a:bodyPr>
+          <a:lstStyle xmlns:a="http://schemas.openxmlformats.org/drawingml/2006/main">
+            <a:defPPr algn="l">
+              <a:defRPr sz="3300" b="1">
+                <a:solidFill>
+                  <a:srgbClr val="F4F8FF"/>
+                </a:solidFill>
+                <a:latin typeface="Arial"/>
+                <a:ea typeface="Arial"/>
+                <a:cs typeface="Arial"/>
+              </a:defRPr>
+            </a:defPPr>
+            <a:lvl1pPr algn="l">
+              <a:defRPr sz="3300" b="1">
+                <a:solidFill>
+                  <a:srgbClr val="F4F8FF"/>
+                </a:solidFill>
+                <a:latin typeface="Arial"/>
+                <a:ea typeface="Arial"/>
+                <a:cs typeface="Arial"/>
+              </a:defRPr>
+            </a:lvl1pPr>
+            <a:lvl2pPr algn="l">
+              <a:defRPr sz="3300" b="1">
+                <a:solidFill>
+                  <a:srgbClr val="F4F8FF"/>
+                </a:solidFill>
+                <a:latin typeface="Arial"/>
+                <a:ea typeface="Arial"/>
+                <a:cs typeface="Arial"/>
+              </a:defRPr>
+            </a:lvl2pPr>
+            <a:lvl3pPr algn="l">
+              <a:defRPr sz="3300" b="1">
+                <a:solidFill>
+                  <a:srgbClr val="F4F8FF"/>
+                </a:solidFill>
+                <a:latin typeface="Arial"/>
+                <a:ea typeface="Arial"/>
+                <a:cs typeface="Arial"/>
+              </a:defRPr>
+            </a:lvl3pPr>
+            <a:lvl4pPr algn="l">
+              <a:defRPr sz="3300" b="1">
+                <a:solidFill>
+                  <a:srgbClr val="F4F8FF"/>
+                </a:solidFill>
+                <a:latin typeface="Arial"/>
+                <a:ea typeface="Arial"/>
+                <a:cs typeface="Arial"/>
+              </a:defRPr>
+            </a:lvl4pPr>
+            <a:lvl5pPr algn="l">
+              <a:defRPr sz="3300" b="1">
+                <a:solidFill>
+                  <a:srgbClr val="F4F8FF"/>
+                </a:solidFill>
+                <a:latin typeface="Arial"/>
+                <a:ea typeface="Arial"/>
+                <a:cs typeface="Arial"/>
+              </a:defRPr>
+            </a:lvl5pPr>
+            <a:lvl6pPr algn="l">
+              <a:defRPr sz="3300" b="1">
+                <a:solidFill>
+                  <a:srgbClr val="F4F8FF"/>
+                </a:solidFill>
+                <a:latin typeface="Arial"/>
+                <a:ea typeface="Arial"/>
+                <a:cs typeface="Arial"/>
+              </a:defRPr>
+            </a:lvl6pPr>
+            <a:lvl7pPr algn="l">
+              <a:defRPr sz="3300" b="1">
+                <a:solidFill>
+                  <a:srgbClr val="F4F8FF"/>
+                </a:solidFill>
+                <a:latin typeface="Arial"/>
+                <a:ea typeface="Arial"/>
+                <a:cs typeface="Arial"/>
+              </a:defRPr>
+            </a:lvl7pPr>
+            <a:lvl8pPr algn="l">
+              <a:defRPr sz="3300" b="1">
+                <a:solidFill>
+                  <a:srgbClr val="F4F8FF"/>
+                </a:solidFill>
+                <a:latin typeface="Arial"/>
+                <a:ea typeface="Arial"/>
+                <a:cs typeface="Arial"/>
+              </a:defRPr>
+            </a:lvl8pPr>
+            <a:lvl9pPr algn="l">
+              <a:defRPr sz="3300" b="1">
+                <a:solidFill>
+                  <a:srgbClr val="F4F8FF"/>
+                </a:solidFill>
+                <a:latin typeface="Arial"/>
+                <a:ea typeface="Arial"/>
+                <a:cs typeface="Arial"/>
+              </a:defRPr>
+            </a:lvl9pPr>
+          </a:lstStyle>
+          <a:p xmlns:a="http://schemas.openxmlformats.org/drawingml/2006/main">
+            <a:pPr algn="l">
+              <a:defRPr sz="3300" b="1">
+                <a:solidFill>
+                  <a:srgbClr val="F4F8FF"/>
+                </a:solidFill>
+                <a:latin typeface="Arial"/>
+                <a:ea typeface="Arial"/>
+                <a:cs typeface="Arial"/>
+              </a:defRPr>
+            </a:pPr>
+            <a:r>
+              <a:rPr sz="3300" b="1">
+                <a:solidFill>
+                  <a:srgbClr val="F4F8FF"/>
+                </a:solidFill>
+                <a:latin typeface="Arial"/>
+                <a:ea typeface="Arial"/>
+                <a:cs typeface="Arial"/>
+              </a:rPr>
+              <a:t>Soal 2: pemisahan karakter</a:t>
+            </a:r>
+          </a:p>
+        </p:txBody>
+      </p:sp>
+      <p:sp>
+        <p:nvSpPr>
+          <p:cNvPr id="4" name="nomor-slide">
+            <a:extLst xmlns:a="http://schemas.openxmlformats.org/drawingml/2006/main">
+              <a:ext uri="{FF2B5EF4-FFF2-40B4-BE49-F238E27FC236}">
+                <a16:creationId xmlns:a16="http://schemas.microsoft.com/office/drawing/2014/main" id="{63060B97-0CB0-4BAD-A5D3-EDA07A4EC82D}"/>
+              </a:ext>
+            </a:extLst>
+          </p:cNvPr>
+          <p:cNvSpPr>
+            <a:spLocks xmlns:a="http://schemas.openxmlformats.org/drawingml/2006/main" noGrp="1"/>
+          </p:cNvSpPr>
+          <p:nvPr/>
+        </p:nvSpPr>
+        <p:spPr>
+          <a:xfrm xmlns:a="http://schemas.openxmlformats.org/drawingml/2006/main">
+            <a:off x="10553700" y="6429375"/>
+            <a:ext cx="1028700" cy="266700"/>
+          </a:xfrm>
+          <a:prstGeom xmlns:a="http://schemas.openxmlformats.org/drawingml/2006/main" prst="rect">
+            <a:avLst/>
+          </a:prstGeom>
+          <a:noFill xmlns:a="http://schemas.openxmlformats.org/drawingml/2006/main"/>
+          <a:ln xmlns:a="http://schemas.openxmlformats.org/drawingml/2006/main" w="0">
+            <a:noFill/>
+            <a:prstDash val="solid"/>
+          </a:ln>
+        </p:spPr>
+        <p:txBody>
+          <a:bodyPr xmlns:a="http://schemas.openxmlformats.org/drawingml/2006/main" wrap="square" lIns="0" tIns="0" rIns="0" bIns="0" anchor="t">
+            <a:noAutofit/>
+          </a:bodyPr>
+          <a:lstStyle xmlns:a="http://schemas.openxmlformats.org/drawingml/2006/main">
+            <a:defPPr algn="r">
+              <a:defRPr sz="1650">
+                <a:solidFill>
+                  <a:srgbClr val="BCD0EB"/>
+                </a:solidFill>
+                <a:latin typeface="Arial"/>
+                <a:ea typeface="Arial"/>
+                <a:cs typeface="Arial"/>
+              </a:defRPr>
+            </a:defPPr>
+            <a:lvl1pPr algn="r">
+              <a:defRPr sz="1650">
+                <a:solidFill>
+                  <a:srgbClr val="BCD0EB"/>
+                </a:solidFill>
+                <a:latin typeface="Arial"/>
+                <a:ea typeface="Arial"/>
+                <a:cs typeface="Arial"/>
+              </a:defRPr>
+            </a:lvl1pPr>
+            <a:lvl2pPr algn="r">
+              <a:defRPr sz="1650">
+                <a:solidFill>
+                  <a:srgbClr val="BCD0EB"/>
+                </a:solidFill>
+                <a:latin typeface="Arial"/>
+                <a:ea typeface="Arial"/>
+                <a:cs typeface="Arial"/>
+              </a:defRPr>
+            </a:lvl2pPr>
+            <a:lvl3pPr algn="r">
+              <a:defRPr sz="1650">
+                <a:solidFill>
+                  <a:srgbClr val="BCD0EB"/>
+                </a:solidFill>
+                <a:latin typeface="Arial"/>
+                <a:ea typeface="Arial"/>
+                <a:cs typeface="Arial"/>
+              </a:defRPr>
+            </a:lvl3pPr>
+            <a:lvl4pPr algn="r">
+              <a:defRPr sz="1650">
+                <a:solidFill>
+                  <a:srgbClr val="BCD0EB"/>
+                </a:solidFill>
+                <a:latin typeface="Arial"/>
+                <a:ea typeface="Arial"/>
+                <a:cs typeface="Arial"/>
+              </a:defRPr>
+            </a:lvl4pPr>
+            <a:lvl5pPr algn="r">
+              <a:defRPr sz="1650">
+                <a:solidFill>
+                  <a:srgbClr val="BCD0EB"/>
+                </a:solidFill>
+                <a:latin typeface="Arial"/>
+                <a:ea typeface="Arial"/>
+                <a:cs typeface="Arial"/>
+              </a:defRPr>
+            </a:lvl5pPr>
+            <a:lvl6pPr algn="r">
+              <a:defRPr sz="1650">
+                <a:solidFill>
+                  <a:srgbClr val="BCD0EB"/>
+                </a:solidFill>
+                <a:latin typeface="Arial"/>
+                <a:ea typeface="Arial"/>
+                <a:cs typeface="Arial"/>
+              </a:defRPr>
+            </a:lvl6pPr>
+            <a:lvl7pPr algn="r">
+              <a:defRPr sz="1650">
+                <a:solidFill>
+                  <a:srgbClr val="BCD0EB"/>
+                </a:solidFill>
+                <a:latin typeface="Arial"/>
+                <a:ea typeface="Arial"/>
+                <a:cs typeface="Arial"/>
+              </a:defRPr>
+            </a:lvl7pPr>
+            <a:lvl8pPr algn="r">
+              <a:defRPr sz="1650">
+                <a:solidFill>
+                  <a:srgbClr val="BCD0EB"/>
+                </a:solidFill>
+                <a:latin typeface="Arial"/>
+                <a:ea typeface="Arial"/>
+                <a:cs typeface="Arial"/>
+              </a:defRPr>
+            </a:lvl8pPr>
+            <a:lvl9pPr algn="r">
+              <a:defRPr sz="1650">
+                <a:solidFill>
+                  <a:srgbClr val="BCD0EB"/>
+                </a:solidFill>
+                <a:latin typeface="Arial"/>
+                <a:ea typeface="Arial"/>
+                <a:cs typeface="Arial"/>
+              </a:defRPr>
+            </a:lvl9pPr>
+          </a:lstStyle>
+          <a:p xmlns:a="http://schemas.openxmlformats.org/drawingml/2006/main">
+            <a:pPr algn="r">
+              <a:defRPr sz="1650">
+                <a:solidFill>
+                  <a:srgbClr val="BCD0EB"/>
+                </a:solidFill>
+                <a:latin typeface="Arial"/>
+                <a:ea typeface="Arial"/>
+                <a:cs typeface="Arial"/>
+              </a:defRPr>
+            </a:pPr>
+            <a:r>
+              <a:rPr sz="1650">
+                <a:solidFill>
+                  <a:srgbClr val="BCD0EB"/>
+                </a:solidFill>
+                <a:latin typeface="Arial"/>
+                <a:ea typeface="Arial"/>
+                <a:cs typeface="Arial"/>
+              </a:rPr>
+              <a:t>04 / 09</a:t>
+            </a:r>
+          </a:p>
+        </p:txBody>
+      </p:sp>
+      <p:pic>
+        <p:nvPicPr>
+          <p:cNvPr id="5" name="">
+            <a:extLst xmlns:a="http://schemas.openxmlformats.org/drawingml/2006/main">
+              <a:ext uri="{FF2B5EF4-FFF2-40B4-BE49-F238E27FC236}">
+                <a16:creationId xmlns:a16="http://schemas.microsoft.com/office/drawing/2014/main" id="{318E8071-CCD2-4427-9DF9-91C0EECCF8D4}"/>
+              </a:ext>
+            </a:extLst>
+          </p:cNvPr>
+          <p:cNvPicPr>
+            <a:picLocks xmlns:a="http://schemas.openxmlformats.org/drawingml/2006/main" noChangeAspect="1"/>
+          </p:cNvPicPr>
+          <p:nvPr/>
+        </p:nvPicPr>
+        <p:blipFill>
+          <a:blip xmlns:r="http://schemas.openxmlformats.org/officeDocument/2006/relationships" xmlns:a="http://schemas.openxmlformats.org/drawingml/2006/main" r:embed="Re7be422261694aa2"/>
+          <a:stretch xmlns:a="http://schemas.openxmlformats.org/drawingml/2006/main"/>
+        </p:blipFill>
+        <p:spPr>
+          <a:xfrm xmlns:a="http://schemas.openxmlformats.org/drawingml/2006/main">
+            <a:off x="609600" y="1736857"/>
+            <a:ext cx="4476750" cy="3955787"/>
+          </a:xfrm>
+          <a:prstGeom xmlns:a="http://schemas.openxmlformats.org/drawingml/2006/main" prst="rect">
+            <a:avLst/>
+          </a:prstGeom>
+        </p:spPr>
+      </p:pic>
+      <p:sp>
+        <p:nvSpPr>
+          <p:cNvPr id="6" name="jumlah-karakter">
+            <a:extLst xmlns:a="http://schemas.openxmlformats.org/drawingml/2006/main">
+              <a:ext uri="{FF2B5EF4-FFF2-40B4-BE49-F238E27FC236}">
+                <a16:creationId xmlns:a16="http://schemas.microsoft.com/office/drawing/2014/main" id="{824D93CB-F15D-4B57-A6F4-2C1BF200147C}"/>
+              </a:ext>
+            </a:extLst>
+          </p:cNvPr>
+          <p:cNvSpPr>
+            <a:spLocks xmlns:a="http://schemas.openxmlformats.org/drawingml/2006/main" noGrp="1"/>
+          </p:cNvSpPr>
+          <p:nvPr/>
+        </p:nvSpPr>
+        <p:spPr>
+          <a:xfrm xmlns:a="http://schemas.openxmlformats.org/drawingml/2006/main">
+            <a:off x="5838825" y="1657350"/>
+            <a:ext cx="5715000" cy="904875"/>
+          </a:xfrm>
+          <a:prstGeom xmlns:a="http://schemas.openxmlformats.org/drawingml/2006/main" prst="rect">
+            <a:avLst/>
+          </a:prstGeom>
+          <a:noFill xmlns:a="http://schemas.openxmlformats.org/drawingml/2006/main"/>
+          <a:ln xmlns:a="http://schemas.openxmlformats.org/drawingml/2006/main" w="0">
+            <a:noFill/>
+            <a:prstDash val="solid"/>
+          </a:ln>
+        </p:spPr>
+        <p:txBody>
+          <a:bodyPr xmlns:a="http://schemas.openxmlformats.org/drawingml/2006/main" wrap="square" lIns="0" tIns="0" rIns="0" bIns="0" anchor="t">
+            <a:noAutofit/>
+          </a:bodyPr>
+          <a:lstStyle xmlns:a="http://schemas.openxmlformats.org/drawingml/2006/main">
+            <a:defPPr algn="l">
+              <a:defRPr sz="4800" b="1">
+                <a:solidFill>
+                  <a:srgbClr val="5DDFFF"/>
+                </a:solidFill>
+                <a:latin typeface="Arial"/>
+                <a:ea typeface="Arial"/>
+                <a:cs typeface="Arial"/>
+              </a:defRPr>
+            </a:defPPr>
+            <a:lvl1pPr algn="l">
+              <a:defRPr sz="4800" b="1">
+                <a:solidFill>
+                  <a:srgbClr val="5DDFFF"/>
+                </a:solidFill>
+                <a:latin typeface="Arial"/>
+                <a:ea typeface="Arial"/>
+                <a:cs typeface="Arial"/>
+              </a:defRPr>
+            </a:lvl1pPr>
+            <a:lvl2pPr algn="l">
+              <a:defRPr sz="4800" b="1">
+                <a:solidFill>
+                  <a:srgbClr val="5DDFFF"/>
+                </a:solidFill>
+                <a:latin typeface="Arial"/>
+                <a:ea typeface="Arial"/>
+                <a:cs typeface="Arial"/>
+              </a:defRPr>
+            </a:lvl2pPr>
+            <a:lvl3pPr algn="l">
+              <a:defRPr sz="4800" b="1">
+                <a:solidFill>
+                  <a:srgbClr val="5DDFFF"/>
+                </a:solidFill>
+                <a:latin typeface="Arial"/>
+                <a:ea typeface="Arial"/>
+                <a:cs typeface="Arial"/>
+              </a:defRPr>
+            </a:lvl3pPr>
+            <a:lvl4pPr algn="l">
+              <a:defRPr sz="4800" b="1">
+                <a:solidFill>
+                  <a:srgbClr val="5DDFFF"/>
+                </a:solidFill>
+                <a:latin typeface="Arial"/>
+                <a:ea typeface="Arial"/>
+                <a:cs typeface="Arial"/>
+              </a:defRPr>
+            </a:lvl4pPr>
+            <a:lvl5pPr algn="l">
+              <a:defRPr sz="4800" b="1">
+                <a:solidFill>
+                  <a:srgbClr val="5DDFFF"/>
+                </a:solidFill>
+                <a:latin typeface="Arial"/>
+                <a:ea typeface="Arial"/>
+                <a:cs typeface="Arial"/>
+              </a:defRPr>
+            </a:lvl5pPr>
+            <a:lvl6pPr algn="l">
+              <a:defRPr sz="4800" b="1">
+                <a:solidFill>
+                  <a:srgbClr val="5DDFFF"/>
+                </a:solidFill>
+                <a:latin typeface="Arial"/>
+                <a:ea typeface="Arial"/>
+                <a:cs typeface="Arial"/>
+              </a:defRPr>
+            </a:lvl6pPr>
+            <a:lvl7pPr algn="l">
+              <a:defRPr sz="4800" b="1">
+                <a:solidFill>
+                  <a:srgbClr val="5DDFFF"/>
+                </a:solidFill>
+                <a:latin typeface="Arial"/>
+                <a:ea typeface="Arial"/>
+                <a:cs typeface="Arial"/>
+              </a:defRPr>
+            </a:lvl7pPr>
+            <a:lvl8pPr algn="l">
+              <a:defRPr sz="4800" b="1">
+                <a:solidFill>
+                  <a:srgbClr val="5DDFFF"/>
+                </a:solidFill>
+                <a:latin typeface="Arial"/>
+                <a:ea typeface="Arial"/>
+                <a:cs typeface="Arial"/>
+              </a:defRPr>
+            </a:lvl8pPr>
+            <a:lvl9pPr algn="l">
+              <a:defRPr sz="4800" b="1">
+                <a:solidFill>
+                  <a:srgbClr val="5DDFFF"/>
+                </a:solidFill>
+                <a:latin typeface="Arial"/>
+                <a:ea typeface="Arial"/>
+                <a:cs typeface="Arial"/>
+              </a:defRPr>
+            </a:lvl9pPr>
+          </a:lstStyle>
+          <a:p xmlns:a="http://schemas.openxmlformats.org/drawingml/2006/main">
+            <a:pPr algn="l">
+              <a:defRPr sz="4800" b="1">
+                <a:solidFill>
+                  <a:srgbClr val="5DDFFF"/>
+                </a:solidFill>
+                <a:latin typeface="Arial"/>
+                <a:ea typeface="Arial"/>
+                <a:cs typeface="Arial"/>
+              </a:defRPr>
+            </a:pPr>
+            <a:r>
+              <a:rPr sz="4800" b="1">
+                <a:solidFill>
+                  <a:srgbClr val="5DDFFF"/>
+                </a:solidFill>
+                <a:latin typeface="Arial"/>
+                <a:ea typeface="Arial"/>
+                <a:cs typeface="Arial"/>
+              </a:rPr>
+              <a:t>18 karakter</a:t>
+            </a:r>
+          </a:p>
+        </p:txBody>
+      </p:sp>
+      <p:graphicFrame>
+        <p:nvGraphicFramePr>
+          <p:cNvPr id="7" name="">
+            <a:extLst xmlns:a="http://schemas.openxmlformats.org/drawingml/2006/main">
+              <a:ext uri="{FF2B5EF4-FFF2-40B4-BE49-F238E27FC236}">
+                <a16:creationId xmlns:a16="http://schemas.microsoft.com/office/drawing/2014/main" id="{92845F25-A6E1-4664-95C0-2A2DA8E074A3}"/>
+              </a:ext>
+            </a:extLst>
+          </p:cNvPr>
+          <p:cNvGraphicFramePr/>
+          <p:nvPr/>
+        </p:nvGraphicFramePr>
+        <p:xfrm>
+          <a:off xmlns:a="http://schemas.openxmlformats.org/drawingml/2006/main" x="5838825" y="2905125"/>
+          <a:ext xmlns:a="http://schemas.openxmlformats.org/drawingml/2006/main" cx="5743575" cy="2000250"/>
+        </p:xfrm>
+        <a:graphic xmlns:a="http://schemas.openxmlformats.org/drawingml/2006/main">
+          <a:graphicData uri="http://schemas.openxmlformats.org/drawingml/2006/table">
+            <a:tbl>
+              <a:tblPr/>
+              <a:tblGrid>
+                <a:gridCol w="3714750"/>
+                <a:gridCol w="2028825"/>
+              </a:tblGrid>
+              <a:tr h="500063">
+                <a:tc>
+                  <a:txBody>
+                    <a:bodyPr lIns="76200" tIns="76200" rIns="76200" bIns="76200"/>
+                    <a:lstStyle/>
+                    <a:p>
+                      <a:pPr algn="l"/>
+                      <a:r>
+                        <a:rPr sz="2175" b="1">
+                          <a:solidFill>
+                            <a:srgbClr val="F4F8FF"/>
+                          </a:solidFill>
+                          <a:latin typeface="Arial"/>
+                          <a:ea typeface="Arial"/>
+                          <a:cs typeface="Arial"/>
+                        </a:rPr>
+                        <a:t>Teks acuan</a:t>
+                      </a:r>
+                    </a:p>
+                  </a:txBody>
+                  <a:tcPr marL="91440" marR="91440" marT="45720" marB="45720" anchor="ctr">
+                    <a:lnL w="9525">
+                      <a:solidFill>
+                        <a:srgbClr val="355271"/>
+                      </a:solidFill>
+                      <a:prstDash val="solid"/>
+                    </a:lnL>
+                    <a:lnR w="9525">
+                      <a:solidFill>
+                        <a:srgbClr val="355271"/>
+                      </a:solidFill>
+                      <a:prstDash val="solid"/>
+                    </a:lnR>
+                    <a:lnT w="9525">
+                      <a:solidFill>
+                        <a:srgbClr val="355271"/>
+                      </a:solidFill>
+                      <a:prstDash val="solid"/>
+                    </a:lnT>
+                    <a:lnB w="9525">
+                      <a:solidFill>
+                        <a:srgbClr val="355271"/>
+                      </a:solidFill>
+                      <a:prstDash val="solid"/>
+                    </a:lnB>
+                    <a:solidFill>
+                      <a:srgbClr val="086C96"/>
+                    </a:solidFill>
+                  </a:tcPr>
+                </a:tc>
+                <a:tc>
+                  <a:txBody>
+                    <a:bodyPr lIns="76200" tIns="76200" rIns="76200" bIns="76200"/>
+                    <a:lstStyle/>
+                    <a:p>
+                      <a:pPr algn="ctr"/>
+                      <a:r>
+                        <a:rPr sz="2175" b="1">
+                          <a:solidFill>
+                            <a:srgbClr val="F4F8FF"/>
+                          </a:solidFill>
+                          <a:latin typeface="Arial"/>
+                          <a:ea typeface="Arial"/>
+                          <a:cs typeface="Arial"/>
+                        </a:rPr>
+                        <a:t>Jumlah</a:t>
+                      </a:r>
+                    </a:p>
+                  </a:txBody>
+                  <a:tcPr marL="91440" marR="91440" marT="45720" marB="45720" anchor="ctr">
+                    <a:lnR w="9525">
+                      <a:solidFill>
+                        <a:srgbClr val="355271"/>
+                      </a:solidFill>
+                      <a:prstDash val="solid"/>
+                    </a:lnR>
+                    <a:lnT w="9525">
+                      <a:solidFill>
+                        <a:srgbClr val="355271"/>
+                      </a:solidFill>
+                      <a:prstDash val="solid"/>
+                    </a:lnT>
+                    <a:lnB w="9525">
+                      <a:solidFill>
+                        <a:srgbClr val="355271"/>
+                      </a:solidFill>
+                      <a:prstDash val="solid"/>
+                    </a:lnB>
+                    <a:solidFill>
+                      <a:srgbClr val="086C96"/>
+                    </a:solidFill>
+                  </a:tcPr>
+                </a:tc>
+              </a:tr>
+              <a:tr h="500063">
+                <a:tc>
+                  <a:txBody>
+                    <a:bodyPr lIns="76200" tIns="76200" rIns="76200" bIns="76200"/>
+                    <a:lstStyle/>
+                    <a:p>
+                      <a:pPr algn="l"/>
+                      <a:r>
+                        <a:rPr sz="2175" b="0">
+                          <a:solidFill>
+                            <a:srgbClr val="F4F8FF"/>
+                          </a:solidFill>
+                          <a:latin typeface="Arial"/>
+                          <a:ea typeface="Arial"/>
+                          <a:cs typeface="Arial"/>
+                        </a:rPr>
+                        <a:t>ZEUS</a:t>
+                      </a:r>
+                    </a:p>
+                  </a:txBody>
+                  <a:tcPr marL="91440" marR="91440" marT="45720" marB="45720" anchor="ctr">
+                    <a:lnL w="9525">
+                      <a:solidFill>
+                        <a:srgbClr val="355271"/>
+                      </a:solidFill>
+                      <a:prstDash val="solid"/>
+                    </a:lnL>
+                    <a:lnR w="9525">
+                      <a:solidFill>
+                        <a:srgbClr val="355271"/>
+                      </a:solidFill>
+                      <a:prstDash val="solid"/>
+                    </a:lnR>
+                    <a:lnB w="9525">
+                      <a:solidFill>
+                        <a:srgbClr val="355271"/>
+                      </a:solidFill>
+                      <a:prstDash val="solid"/>
+                    </a:lnB>
+                    <a:solidFill>
+                      <a:srgbClr val="102A4B"/>
+                    </a:solidFill>
+                  </a:tcPr>
+                </a:tc>
+                <a:tc>
+                  <a:txBody>
+                    <a:bodyPr lIns="76200" tIns="76200" rIns="76200" bIns="76200"/>
+                    <a:lstStyle/>
+                    <a:p>
+                      <a:pPr algn="ctr"/>
+                      <a:r>
+                        <a:rPr sz="2175" b="0">
+                          <a:solidFill>
+                            <a:srgbClr val="F4F8FF"/>
+                          </a:solidFill>
+                          <a:latin typeface="Arial"/>
+                          <a:ea typeface="Arial"/>
+                          <a:cs typeface="Arial"/>
+                        </a:rPr>
+                        <a:t>4</a:t>
+                      </a:r>
+                    </a:p>
+                  </a:txBody>
+                  <a:tcPr marL="91440" marR="91440" marT="45720" marB="45720" anchor="ctr">
+                    <a:lnR w="9525">
+                      <a:solidFill>
+                        <a:srgbClr val="355271"/>
+                      </a:solidFill>
+                      <a:prstDash val="solid"/>
+                    </a:lnR>
+                    <a:lnB w="9525">
+                      <a:solidFill>
+                        <a:srgbClr val="355271"/>
+                      </a:solidFill>
+                      <a:prstDash val="solid"/>
+                    </a:lnB>
+                    <a:solidFill>
+                      <a:srgbClr val="102A4B"/>
+                    </a:solidFill>
+                  </a:tcPr>
+                </a:tc>
+              </a:tr>
+              <a:tr h="500063">
+                <a:tc>
+                  <a:txBody>
+                    <a:bodyPr lIns="76200" tIns="76200" rIns="76200" bIns="76200"/>
+                    <a:lstStyle/>
+                    <a:p>
+                      <a:pPr algn="l"/>
+                      <a:r>
+                        <a:rPr sz="2175" b="0">
+                          <a:solidFill>
+                            <a:srgbClr val="F4F8FF"/>
+                          </a:solidFill>
+                          <a:latin typeface="Arial"/>
+                          <a:ea typeface="Arial"/>
+                          <a:cs typeface="Arial"/>
+                        </a:rPr>
+                        <a:t>TWINPEAK</a:t>
+                      </a:r>
+                    </a:p>
+                  </a:txBody>
+                  <a:tcPr marL="91440" marR="91440" marT="45720" marB="45720" anchor="ctr">
+                    <a:lnL w="9525">
+                      <a:solidFill>
+                        <a:srgbClr val="355271"/>
+                      </a:solidFill>
+                      <a:prstDash val="solid"/>
+                    </a:lnL>
+                    <a:lnR w="9525">
+                      <a:solidFill>
+                        <a:srgbClr val="355271"/>
+                      </a:solidFill>
+                      <a:prstDash val="solid"/>
+                    </a:lnR>
+                    <a:lnB w="9525">
+                      <a:solidFill>
+                        <a:srgbClr val="355271"/>
+                      </a:solidFill>
+                      <a:prstDash val="solid"/>
+                    </a:lnB>
+                    <a:solidFill>
+                      <a:srgbClr val="153453"/>
+                    </a:solidFill>
+                  </a:tcPr>
+                </a:tc>
+                <a:tc>
+                  <a:txBody>
+                    <a:bodyPr lIns="76200" tIns="76200" rIns="76200" bIns="76200"/>
+                    <a:lstStyle/>
+                    <a:p>
+                      <a:pPr algn="ctr"/>
+                      <a:r>
+                        <a:rPr sz="2175" b="0">
+                          <a:solidFill>
+                            <a:srgbClr val="F4F8FF"/>
+                          </a:solidFill>
+                          <a:latin typeface="Arial"/>
+                          <a:ea typeface="Arial"/>
+                          <a:cs typeface="Arial"/>
+                        </a:rPr>
+                        <a:t>8</a:t>
+                      </a:r>
+                    </a:p>
+                  </a:txBody>
+                  <a:tcPr marL="91440" marR="91440" marT="45720" marB="45720" anchor="ctr">
+                    <a:lnR w="9525">
+                      <a:solidFill>
+                        <a:srgbClr val="355271"/>
+                      </a:solidFill>
+                      <a:prstDash val="solid"/>
+                    </a:lnR>
+                    <a:lnB w="9525">
+                      <a:solidFill>
+                        <a:srgbClr val="355271"/>
+                      </a:solidFill>
+                      <a:prstDash val="solid"/>
+                    </a:lnB>
+                    <a:solidFill>
+                      <a:srgbClr val="153453"/>
+                    </a:solidFill>
+                  </a:tcPr>
+                </a:tc>
+              </a:tr>
+              <a:tr h="500063">
+                <a:tc>
+                  <a:txBody>
+                    <a:bodyPr lIns="76200" tIns="76200" rIns="76200" bIns="76200"/>
+                    <a:lstStyle/>
+                    <a:p>
+                      <a:pPr algn="l"/>
+                      <a:r>
+                        <a:rPr sz="2175" b="0">
+                          <a:solidFill>
+                            <a:srgbClr val="F4F8FF"/>
+                          </a:solidFill>
+                          <a:latin typeface="Arial"/>
+                          <a:ea typeface="Arial"/>
+                          <a:cs typeface="Arial"/>
+                        </a:rPr>
+                        <a:t>ACOSTA</a:t>
+                      </a:r>
+                    </a:p>
+                  </a:txBody>
+                  <a:tcPr marL="91440" marR="91440" marT="45720" marB="45720" anchor="ctr">
+                    <a:lnL w="9525">
+                      <a:solidFill>
+                        <a:srgbClr val="355271"/>
+                      </a:solidFill>
+                      <a:prstDash val="solid"/>
+                    </a:lnL>
+                    <a:lnR w="9525">
+                      <a:solidFill>
+                        <a:srgbClr val="355271"/>
+                      </a:solidFill>
+                      <a:prstDash val="solid"/>
+                    </a:lnR>
+                    <a:lnB w="9525">
+                      <a:solidFill>
+                        <a:srgbClr val="355271"/>
+                      </a:solidFill>
+                      <a:prstDash val="solid"/>
+                    </a:lnB>
+                    <a:solidFill>
+                      <a:srgbClr val="102A4B"/>
+                    </a:solidFill>
+                  </a:tcPr>
+                </a:tc>
+                <a:tc>
+                  <a:txBody>
+                    <a:bodyPr lIns="76200" tIns="76200" rIns="76200" bIns="76200"/>
+                    <a:lstStyle/>
+                    <a:p>
+                      <a:pPr algn="ctr"/>
+                      <a:r>
+                        <a:rPr sz="2175" b="0">
+                          <a:solidFill>
+                            <a:srgbClr val="F4F8FF"/>
+                          </a:solidFill>
+                          <a:latin typeface="Arial"/>
+                          <a:ea typeface="Arial"/>
+                          <a:cs typeface="Arial"/>
+                        </a:rPr>
+                        <a:t>6</a:t>
+                      </a:r>
+                    </a:p>
+                  </a:txBody>
+                  <a:tcPr marL="91440" marR="91440" marT="45720" marB="45720" anchor="ctr">
+                    <a:lnR w="9525">
+                      <a:solidFill>
+                        <a:srgbClr val="355271"/>
+                      </a:solidFill>
+                      <a:prstDash val="solid"/>
+                    </a:lnR>
+                    <a:lnB w="9525">
+                      <a:solidFill>
+                        <a:srgbClr val="355271"/>
+                      </a:solidFill>
+                      <a:prstDash val="solid"/>
+                    </a:lnB>
+                    <a:solidFill>
+                      <a:srgbClr val="102A4B"/>
+                    </a:solidFill>
+                  </a:tcPr>
+                </a:tc>
+              </a:tr>
+            </a:tbl>
+          </a:graphicData>
+        </a:graphic>
+      </p:graphicFrame>
+      <p:sp>
+        <p:nvSpPr>
+          <p:cNvPr id="8" name="tujuan">
+            <a:extLst xmlns:a="http://schemas.openxmlformats.org/drawingml/2006/main">
+              <a:ext uri="{FF2B5EF4-FFF2-40B4-BE49-F238E27FC236}">
+                <a16:creationId xmlns:a16="http://schemas.microsoft.com/office/drawing/2014/main" id="{B6BE22B8-E3C7-4A02-98DF-E69C17D76D1D}"/>
+              </a:ext>
+            </a:extLst>
+          </p:cNvPr>
+          <p:cNvSpPr>
+            <a:spLocks xmlns:a="http://schemas.openxmlformats.org/drawingml/2006/main" noGrp="1"/>
+          </p:cNvSpPr>
+          <p:nvPr/>
+        </p:nvSpPr>
+        <p:spPr>
+          <a:xfrm xmlns:a="http://schemas.openxmlformats.org/drawingml/2006/main">
+            <a:off x="5838825" y="5286375"/>
+            <a:ext cx="5743575" cy="952500"/>
+          </a:xfrm>
+          <a:prstGeom xmlns:a="http://schemas.openxmlformats.org/drawingml/2006/main" prst="rect">
+            <a:avLst/>
+          </a:prstGeom>
+          <a:noFill xmlns:a="http://schemas.openxmlformats.org/drawingml/2006/main"/>
+          <a:ln xmlns:a="http://schemas.openxmlformats.org/drawingml/2006/main" w="0">
+            <a:noFill/>
+            <a:prstDash val="solid"/>
+          </a:ln>
+        </p:spPr>
+        <p:txBody>
+          <a:bodyPr xmlns:a="http://schemas.openxmlformats.org/drawingml/2006/main" wrap="square" lIns="0" tIns="0" rIns="0" bIns="0" anchor="t">
+            <a:noAutofit/>
+          </a:bodyPr>
+          <a:lstStyle xmlns:a="http://schemas.openxmlformats.org/drawingml/2006/main">
+            <a:defPPr algn="l">
+              <a:defRPr sz="2100">
+                <a:solidFill>
+                  <a:srgbClr val="F4F8FF"/>
+                </a:solidFill>
+                <a:latin typeface="Arial"/>
+                <a:ea typeface="Arial"/>
+                <a:cs typeface="Arial"/>
+              </a:defRPr>
+            </a:defPPr>
+            <a:lvl1pPr algn="l">
+              <a:defRPr sz="2100">
+                <a:solidFill>
+                  <a:srgbClr val="F4F8FF"/>
+                </a:solidFill>
+                <a:latin typeface="Arial"/>
+                <a:ea typeface="Arial"/>
+                <a:cs typeface="Arial"/>
+              </a:defRPr>
+            </a:lvl1pPr>
+            <a:lvl2pPr algn="l">
+              <a:defRPr sz="2100">
+                <a:solidFill>
+                  <a:srgbClr val="F4F8FF"/>
+                </a:solidFill>
+                <a:latin typeface="Arial"/>
+                <a:ea typeface="Arial"/>
+                <a:cs typeface="Arial"/>
+              </a:defRPr>
+            </a:lvl2pPr>
+            <a:lvl3pPr algn="l">
+              <a:defRPr sz="2100">
+                <a:solidFill>
+                  <a:srgbClr val="F4F8FF"/>
+                </a:solidFill>
+                <a:latin typeface="Arial"/>
+                <a:ea typeface="Arial"/>
+                <a:cs typeface="Arial"/>
+              </a:defRPr>
+            </a:lvl3pPr>
+            <a:lvl4pPr algn="l">
+              <a:defRPr sz="2100">
+                <a:solidFill>
+                  <a:srgbClr val="F4F8FF"/>
+                </a:solidFill>
+                <a:latin typeface="Arial"/>
+                <a:ea typeface="Arial"/>
+                <a:cs typeface="Arial"/>
+              </a:defRPr>
+            </a:lvl4pPr>
+            <a:lvl5pPr algn="l">
+              <a:defRPr sz="2100">
+                <a:solidFill>
+                  <a:srgbClr val="F4F8FF"/>
+                </a:solidFill>
+                <a:latin typeface="Arial"/>
+                <a:ea typeface="Arial"/>
+                <a:cs typeface="Arial"/>
+              </a:defRPr>
+            </a:lvl5pPr>
+            <a:lvl6pPr algn="l">
+              <a:defRPr sz="2100">
+                <a:solidFill>
+                  <a:srgbClr val="F4F8FF"/>
+                </a:solidFill>
+                <a:latin typeface="Arial"/>
+                <a:ea typeface="Arial"/>
+                <a:cs typeface="Arial"/>
+              </a:defRPr>
+            </a:lvl6pPr>
+            <a:lvl7pPr algn="l">
+              <a:defRPr sz="2100">
+                <a:solidFill>
+                  <a:srgbClr val="F4F8FF"/>
+                </a:solidFill>
+                <a:latin typeface="Arial"/>
+                <a:ea typeface="Arial"/>
+                <a:cs typeface="Arial"/>
+              </a:defRPr>
+            </a:lvl7pPr>
+            <a:lvl8pPr algn="l">
+              <a:defRPr sz="2100">
+                <a:solidFill>
+                  <a:srgbClr val="F4F8FF"/>
+                </a:solidFill>
+                <a:latin typeface="Arial"/>
+                <a:ea typeface="Arial"/>
+                <a:cs typeface="Arial"/>
+              </a:defRPr>
+            </a:lvl8pPr>
+            <a:lvl9pPr algn="l">
+              <a:defRPr sz="2100">
+                <a:solidFill>
+                  <a:srgbClr val="F4F8FF"/>
+                </a:solidFill>
+                <a:latin typeface="Arial"/>
+                <a:ea typeface="Arial"/>
+                <a:cs typeface="Arial"/>
+              </a:defRPr>
+            </a:lvl9pPr>
+          </a:lstStyle>
+          <a:p xmlns:a="http://schemas.openxmlformats.org/drawingml/2006/main">
+            <a:pPr algn="l">
+              <a:defRPr sz="2100">
+                <a:solidFill>
+                  <a:srgbClr val="F4F8FF"/>
+                </a:solidFill>
+                <a:latin typeface="Arial"/>
+                <a:ea typeface="Arial"/>
+                <a:cs typeface="Arial"/>
+              </a:defRPr>
+            </a:pPr>
+            <a:r>
+              <a:rPr sz="2100">
+                <a:solidFill>
+                  <a:srgbClr val="F4F8FF"/>
+                </a:solidFill>
+                <a:latin typeface="Arial"/>
+                <a:ea typeface="Arial"/>
+                <a:cs typeface="Arial"/>
+              </a:rPr>
+              <a:t>Satu karakter menjadi satu gambar.</a:t>
+            </a:r>
+          </a:p>
+          <a:p xmlns:a="http://schemas.openxmlformats.org/drawingml/2006/main">
+            <a:pPr algn="l">
+              <a:defRPr sz="2100">
+                <a:solidFill>
+                  <a:srgbClr val="F4F8FF"/>
+                </a:solidFill>
+                <a:latin typeface="Arial"/>
+                <a:ea typeface="Arial"/>
+                <a:cs typeface="Arial"/>
+              </a:defRPr>
+            </a:pPr>
+            <a:r>
+              <a:rPr sz="2100">
+                <a:solidFill>
+                  <a:srgbClr val="F4F8FF"/>
+                </a:solidFill>
+                <a:latin typeface="Arial"/>
+                <a:ea typeface="Arial"/>
+                <a:cs typeface="Arial"/>
+              </a:rPr>
+              <a:t>Karakter terang, terpisah, pada latar gelap.</a:t>
+            </a:r>
+          </a:p>
+        </p:txBody>
+      </p:sp>
     </p:spTree>
     <p:extLst>
       <p:ext uri="{BB962C8B-B14F-4D97-AF65-F5344CB8AC3E}">
@@ -12687,7 +13742,7 @@
           <p:nvPr/>
         </p:nvPicPr>
         <p:blipFill>
-          <a:blip xmlns:r="http://schemas.openxmlformats.org/officeDocument/2006/relationships" xmlns:a="http://schemas.openxmlformats.org/drawingml/2006/main" r:embed="Ra38e51a5ac71468d"/>
+          <a:blip xmlns:r="http://schemas.openxmlformats.org/officeDocument/2006/relationships" xmlns:a="http://schemas.openxmlformats.org/drawingml/2006/main" r:embed="Ra60eedf3311f4b84"/>
           <a:srcRect xmlns:a="http://schemas.openxmlformats.org/drawingml/2006/main" l="0" t="27" r="0" b="27"/>
           <a:stretch xmlns:a="http://schemas.openxmlformats.org/drawingml/2006/main">
             <a:fillRect l="0" t="0" r="0" b="0"/>
@@ -12703,6 +13758,1112 @@
           </a:prstGeom>
         </p:spPr>
       </p:pic>
+      <p:sp>
+        <p:nvSpPr>
+          <p:cNvPr id="3" name="judul-slide">
+            <a:extLst xmlns:a="http://schemas.openxmlformats.org/drawingml/2006/main">
+              <a:ext uri="{FF2B5EF4-FFF2-40B4-BE49-F238E27FC236}">
+                <a16:creationId xmlns:a16="http://schemas.microsoft.com/office/drawing/2014/main" id="{6722AB39-F93C-4B3C-B272-0E8E50D9B316}"/>
+              </a:ext>
+            </a:extLst>
+          </p:cNvPr>
+          <p:cNvSpPr>
+            <a:spLocks xmlns:a="http://schemas.openxmlformats.org/drawingml/2006/main" noGrp="1"/>
+          </p:cNvSpPr>
+          <p:nvPr/>
+        </p:nvSpPr>
+        <p:spPr>
+          <a:xfrm xmlns:a="http://schemas.openxmlformats.org/drawingml/2006/main">
+            <a:off x="609600" y="428625"/>
+            <a:ext cx="10972800" cy="952500"/>
+          </a:xfrm>
+          <a:prstGeom xmlns:a="http://schemas.openxmlformats.org/drawingml/2006/main" prst="rect">
+            <a:avLst/>
+          </a:prstGeom>
+          <a:noFill xmlns:a="http://schemas.openxmlformats.org/drawingml/2006/main"/>
+          <a:ln xmlns:a="http://schemas.openxmlformats.org/drawingml/2006/main" w="0">
+            <a:noFill/>
+            <a:prstDash val="solid"/>
+          </a:ln>
+        </p:spPr>
+        <p:txBody>
+          <a:bodyPr xmlns:a="http://schemas.openxmlformats.org/drawingml/2006/main" wrap="square" lIns="0" tIns="0" rIns="0" bIns="0" anchor="t">
+            <a:noAutofit/>
+          </a:bodyPr>
+          <a:lstStyle xmlns:a="http://schemas.openxmlformats.org/drawingml/2006/main">
+            <a:defPPr algn="l">
+              <a:defRPr sz="3300" b="1">
+                <a:solidFill>
+                  <a:srgbClr val="F4F8FF"/>
+                </a:solidFill>
+                <a:latin typeface="Arial"/>
+                <a:ea typeface="Arial"/>
+                <a:cs typeface="Arial"/>
+              </a:defRPr>
+            </a:defPPr>
+            <a:lvl1pPr algn="l">
+              <a:defRPr sz="3300" b="1">
+                <a:solidFill>
+                  <a:srgbClr val="F4F8FF"/>
+                </a:solidFill>
+                <a:latin typeface="Arial"/>
+                <a:ea typeface="Arial"/>
+                <a:cs typeface="Arial"/>
+              </a:defRPr>
+            </a:lvl1pPr>
+            <a:lvl2pPr algn="l">
+              <a:defRPr sz="3300" b="1">
+                <a:solidFill>
+                  <a:srgbClr val="F4F8FF"/>
+                </a:solidFill>
+                <a:latin typeface="Arial"/>
+                <a:ea typeface="Arial"/>
+                <a:cs typeface="Arial"/>
+              </a:defRPr>
+            </a:lvl2pPr>
+            <a:lvl3pPr algn="l">
+              <a:defRPr sz="3300" b="1">
+                <a:solidFill>
+                  <a:srgbClr val="F4F8FF"/>
+                </a:solidFill>
+                <a:latin typeface="Arial"/>
+                <a:ea typeface="Arial"/>
+                <a:cs typeface="Arial"/>
+              </a:defRPr>
+            </a:lvl3pPr>
+            <a:lvl4pPr algn="l">
+              <a:defRPr sz="3300" b="1">
+                <a:solidFill>
+                  <a:srgbClr val="F4F8FF"/>
+                </a:solidFill>
+                <a:latin typeface="Arial"/>
+                <a:ea typeface="Arial"/>
+                <a:cs typeface="Arial"/>
+              </a:defRPr>
+            </a:lvl4pPr>
+            <a:lvl5pPr algn="l">
+              <a:defRPr sz="3300" b="1">
+                <a:solidFill>
+                  <a:srgbClr val="F4F8FF"/>
+                </a:solidFill>
+                <a:latin typeface="Arial"/>
+                <a:ea typeface="Arial"/>
+                <a:cs typeface="Arial"/>
+              </a:defRPr>
+            </a:lvl5pPr>
+            <a:lvl6pPr algn="l">
+              <a:defRPr sz="3300" b="1">
+                <a:solidFill>
+                  <a:srgbClr val="F4F8FF"/>
+                </a:solidFill>
+                <a:latin typeface="Arial"/>
+                <a:ea typeface="Arial"/>
+                <a:cs typeface="Arial"/>
+              </a:defRPr>
+            </a:lvl6pPr>
+            <a:lvl7pPr algn="l">
+              <a:defRPr sz="3300" b="1">
+                <a:solidFill>
+                  <a:srgbClr val="F4F8FF"/>
+                </a:solidFill>
+                <a:latin typeface="Arial"/>
+                <a:ea typeface="Arial"/>
+                <a:cs typeface="Arial"/>
+              </a:defRPr>
+            </a:lvl7pPr>
+            <a:lvl8pPr algn="l">
+              <a:defRPr sz="3300" b="1">
+                <a:solidFill>
+                  <a:srgbClr val="F4F8FF"/>
+                </a:solidFill>
+                <a:latin typeface="Arial"/>
+                <a:ea typeface="Arial"/>
+                <a:cs typeface="Arial"/>
+              </a:defRPr>
+            </a:lvl8pPr>
+            <a:lvl9pPr algn="l">
+              <a:defRPr sz="3300" b="1">
+                <a:solidFill>
+                  <a:srgbClr val="F4F8FF"/>
+                </a:solidFill>
+                <a:latin typeface="Arial"/>
+                <a:ea typeface="Arial"/>
+                <a:cs typeface="Arial"/>
+              </a:defRPr>
+            </a:lvl9pPr>
+          </a:lstStyle>
+          <a:p xmlns:a="http://schemas.openxmlformats.org/drawingml/2006/main">
+            <a:pPr algn="l">
+              <a:defRPr sz="3300" b="1">
+                <a:solidFill>
+                  <a:srgbClr val="F4F8FF"/>
+                </a:solidFill>
+                <a:latin typeface="Arial"/>
+                <a:ea typeface="Arial"/>
+                <a:cs typeface="Arial"/>
+              </a:defRPr>
+            </a:pPr>
+            <a:r>
+              <a:rPr sz="3300" b="1">
+                <a:solidFill>
+                  <a:srgbClr val="F4F8FF"/>
+                </a:solidFill>
+                <a:latin typeface="Arial"/>
+                <a:ea typeface="Arial"/>
+                <a:cs typeface="Arial"/>
+              </a:rPr>
+              <a:t>Soal 2: metode regionprops</a:t>
+            </a:r>
+          </a:p>
+        </p:txBody>
+      </p:sp>
+      <p:sp>
+        <p:nvSpPr>
+          <p:cNvPr id="4" name="nomor-slide">
+            <a:extLst xmlns:a="http://schemas.openxmlformats.org/drawingml/2006/main">
+              <a:ext uri="{FF2B5EF4-FFF2-40B4-BE49-F238E27FC236}">
+                <a16:creationId xmlns:a16="http://schemas.microsoft.com/office/drawing/2014/main" id="{A080EF8F-62D9-4648-B471-3BF80937C07C}"/>
+              </a:ext>
+            </a:extLst>
+          </p:cNvPr>
+          <p:cNvSpPr>
+            <a:spLocks xmlns:a="http://schemas.openxmlformats.org/drawingml/2006/main" noGrp="1"/>
+          </p:cNvSpPr>
+          <p:nvPr/>
+        </p:nvSpPr>
+        <p:spPr>
+          <a:xfrm xmlns:a="http://schemas.openxmlformats.org/drawingml/2006/main">
+            <a:off x="10553700" y="6429375"/>
+            <a:ext cx="1028700" cy="266700"/>
+          </a:xfrm>
+          <a:prstGeom xmlns:a="http://schemas.openxmlformats.org/drawingml/2006/main" prst="rect">
+            <a:avLst/>
+          </a:prstGeom>
+          <a:noFill xmlns:a="http://schemas.openxmlformats.org/drawingml/2006/main"/>
+          <a:ln xmlns:a="http://schemas.openxmlformats.org/drawingml/2006/main" w="0">
+            <a:noFill/>
+            <a:prstDash val="solid"/>
+          </a:ln>
+        </p:spPr>
+        <p:txBody>
+          <a:bodyPr xmlns:a="http://schemas.openxmlformats.org/drawingml/2006/main" wrap="square" lIns="0" tIns="0" rIns="0" bIns="0" anchor="t">
+            <a:noAutofit/>
+          </a:bodyPr>
+          <a:lstStyle xmlns:a="http://schemas.openxmlformats.org/drawingml/2006/main">
+            <a:defPPr algn="r">
+              <a:defRPr sz="1650">
+                <a:solidFill>
+                  <a:srgbClr val="BCD0EB"/>
+                </a:solidFill>
+                <a:latin typeface="Arial"/>
+                <a:ea typeface="Arial"/>
+                <a:cs typeface="Arial"/>
+              </a:defRPr>
+            </a:defPPr>
+            <a:lvl1pPr algn="r">
+              <a:defRPr sz="1650">
+                <a:solidFill>
+                  <a:srgbClr val="BCD0EB"/>
+                </a:solidFill>
+                <a:latin typeface="Arial"/>
+                <a:ea typeface="Arial"/>
+                <a:cs typeface="Arial"/>
+              </a:defRPr>
+            </a:lvl1pPr>
+            <a:lvl2pPr algn="r">
+              <a:defRPr sz="1650">
+                <a:solidFill>
+                  <a:srgbClr val="BCD0EB"/>
+                </a:solidFill>
+                <a:latin typeface="Arial"/>
+                <a:ea typeface="Arial"/>
+                <a:cs typeface="Arial"/>
+              </a:defRPr>
+            </a:lvl2pPr>
+            <a:lvl3pPr algn="r">
+              <a:defRPr sz="1650">
+                <a:solidFill>
+                  <a:srgbClr val="BCD0EB"/>
+                </a:solidFill>
+                <a:latin typeface="Arial"/>
+                <a:ea typeface="Arial"/>
+                <a:cs typeface="Arial"/>
+              </a:defRPr>
+            </a:lvl3pPr>
+            <a:lvl4pPr algn="r">
+              <a:defRPr sz="1650">
+                <a:solidFill>
+                  <a:srgbClr val="BCD0EB"/>
+                </a:solidFill>
+                <a:latin typeface="Arial"/>
+                <a:ea typeface="Arial"/>
+                <a:cs typeface="Arial"/>
+              </a:defRPr>
+            </a:lvl4pPr>
+            <a:lvl5pPr algn="r">
+              <a:defRPr sz="1650">
+                <a:solidFill>
+                  <a:srgbClr val="BCD0EB"/>
+                </a:solidFill>
+                <a:latin typeface="Arial"/>
+                <a:ea typeface="Arial"/>
+                <a:cs typeface="Arial"/>
+              </a:defRPr>
+            </a:lvl5pPr>
+            <a:lvl6pPr algn="r">
+              <a:defRPr sz="1650">
+                <a:solidFill>
+                  <a:srgbClr val="BCD0EB"/>
+                </a:solidFill>
+                <a:latin typeface="Arial"/>
+                <a:ea typeface="Arial"/>
+                <a:cs typeface="Arial"/>
+              </a:defRPr>
+            </a:lvl6pPr>
+            <a:lvl7pPr algn="r">
+              <a:defRPr sz="1650">
+                <a:solidFill>
+                  <a:srgbClr val="BCD0EB"/>
+                </a:solidFill>
+                <a:latin typeface="Arial"/>
+                <a:ea typeface="Arial"/>
+                <a:cs typeface="Arial"/>
+              </a:defRPr>
+            </a:lvl7pPr>
+            <a:lvl8pPr algn="r">
+              <a:defRPr sz="1650">
+                <a:solidFill>
+                  <a:srgbClr val="BCD0EB"/>
+                </a:solidFill>
+                <a:latin typeface="Arial"/>
+                <a:ea typeface="Arial"/>
+                <a:cs typeface="Arial"/>
+              </a:defRPr>
+            </a:lvl8pPr>
+            <a:lvl9pPr algn="r">
+              <a:defRPr sz="1650">
+                <a:solidFill>
+                  <a:srgbClr val="BCD0EB"/>
+                </a:solidFill>
+                <a:latin typeface="Arial"/>
+                <a:ea typeface="Arial"/>
+                <a:cs typeface="Arial"/>
+              </a:defRPr>
+            </a:lvl9pPr>
+          </a:lstStyle>
+          <a:p xmlns:a="http://schemas.openxmlformats.org/drawingml/2006/main">
+            <a:pPr algn="r">
+              <a:defRPr sz="1650">
+                <a:solidFill>
+                  <a:srgbClr val="BCD0EB"/>
+                </a:solidFill>
+                <a:latin typeface="Arial"/>
+                <a:ea typeface="Arial"/>
+                <a:cs typeface="Arial"/>
+              </a:defRPr>
+            </a:pPr>
+            <a:r>
+              <a:rPr sz="1650">
+                <a:solidFill>
+                  <a:srgbClr val="BCD0EB"/>
+                </a:solidFill>
+                <a:latin typeface="Arial"/>
+                <a:ea typeface="Arial"/>
+                <a:cs typeface="Arial"/>
+              </a:rPr>
+              <a:t>05 / 09</a:t>
+            </a:r>
+          </a:p>
+        </p:txBody>
+      </p:sp>
+      <p:graphicFrame>
+        <p:nvGraphicFramePr>
+          <p:cNvPr id="5" name="">
+            <a:extLst xmlns:a="http://schemas.openxmlformats.org/drawingml/2006/main">
+              <a:ext uri="{FF2B5EF4-FFF2-40B4-BE49-F238E27FC236}">
+                <a16:creationId xmlns:a16="http://schemas.microsoft.com/office/drawing/2014/main" id="{5CF3EEA8-2B12-49E9-AD8E-981B1551ADDB}"/>
+              </a:ext>
+            </a:extLst>
+          </p:cNvPr>
+          <p:cNvGraphicFramePr/>
+          <p:nvPr/>
+        </p:nvGraphicFramePr>
+        <p:xfrm>
+          <a:off xmlns:a="http://schemas.openxmlformats.org/drawingml/2006/main" x="609600" y="1752600"/>
+          <a:ext xmlns:a="http://schemas.openxmlformats.org/drawingml/2006/main" cx="5810250" cy="2552700"/>
+        </p:xfrm>
+        <a:graphic xmlns:a="http://schemas.openxmlformats.org/drawingml/2006/main">
+          <a:graphicData uri="http://schemas.openxmlformats.org/drawingml/2006/table">
+            <a:tbl>
+              <a:tblPr/>
+              <a:tblGrid>
+                <a:gridCol w="1809750"/>
+                <a:gridCol w="4000500"/>
+              </a:tblGrid>
+              <a:tr h="638175">
+                <a:tc>
+                  <a:txBody>
+                    <a:bodyPr lIns="76200" tIns="76200" rIns="76200" bIns="76200"/>
+                    <a:lstStyle/>
+                    <a:p>
+                      <a:pPr algn="l"/>
+                      <a:r>
+                        <a:rPr sz="2100" b="1">
+                          <a:solidFill>
+                            <a:srgbClr val="F4F8FF"/>
+                          </a:solidFill>
+                          <a:latin typeface="Arial"/>
+                          <a:ea typeface="Arial"/>
+                          <a:cs typeface="Arial"/>
+                        </a:rPr>
+                        <a:t>Atribut</a:t>
+                      </a:r>
+                    </a:p>
+                  </a:txBody>
+                  <a:tcPr marL="91440" marR="91440" marT="45720" marB="45720" anchor="ctr">
+                    <a:lnL w="9525">
+                      <a:solidFill>
+                        <a:srgbClr val="355271"/>
+                      </a:solidFill>
+                      <a:prstDash val="solid"/>
+                    </a:lnL>
+                    <a:lnR w="9525">
+                      <a:solidFill>
+                        <a:srgbClr val="355271"/>
+                      </a:solidFill>
+                      <a:prstDash val="solid"/>
+                    </a:lnR>
+                    <a:lnT w="9525">
+                      <a:solidFill>
+                        <a:srgbClr val="355271"/>
+                      </a:solidFill>
+                      <a:prstDash val="solid"/>
+                    </a:lnT>
+                    <a:lnB w="9525">
+                      <a:solidFill>
+                        <a:srgbClr val="355271"/>
+                      </a:solidFill>
+                      <a:prstDash val="solid"/>
+                    </a:lnB>
+                    <a:solidFill>
+                      <a:srgbClr val="086C96"/>
+                    </a:solidFill>
+                  </a:tcPr>
+                </a:tc>
+                <a:tc>
+                  <a:txBody>
+                    <a:bodyPr lIns="76200" tIns="76200" rIns="76200" bIns="76200"/>
+                    <a:lstStyle/>
+                    <a:p>
+                      <a:pPr algn="ctr"/>
+                      <a:r>
+                        <a:rPr sz="2100" b="1">
+                          <a:solidFill>
+                            <a:srgbClr val="F4F8FF"/>
+                          </a:solidFill>
+                          <a:latin typeface="Arial"/>
+                          <a:ea typeface="Arial"/>
+                          <a:cs typeface="Arial"/>
+                        </a:rPr>
+                        <a:t>Peran</a:t>
+                      </a:r>
+                    </a:p>
+                  </a:txBody>
+                  <a:tcPr marL="91440" marR="91440" marT="45720" marB="45720" anchor="ctr">
+                    <a:lnR w="9525">
+                      <a:solidFill>
+                        <a:srgbClr val="355271"/>
+                      </a:solidFill>
+                      <a:prstDash val="solid"/>
+                    </a:lnR>
+                    <a:lnT w="9525">
+                      <a:solidFill>
+                        <a:srgbClr val="355271"/>
+                      </a:solidFill>
+                      <a:prstDash val="solid"/>
+                    </a:lnT>
+                    <a:lnB w="9525">
+                      <a:solidFill>
+                        <a:srgbClr val="355271"/>
+                      </a:solidFill>
+                      <a:prstDash val="solid"/>
+                    </a:lnB>
+                    <a:solidFill>
+                      <a:srgbClr val="086C96"/>
+                    </a:solidFill>
+                  </a:tcPr>
+                </a:tc>
+              </a:tr>
+              <a:tr h="638175">
+                <a:tc>
+                  <a:txBody>
+                    <a:bodyPr lIns="76200" tIns="76200" rIns="76200" bIns="76200"/>
+                    <a:lstStyle/>
+                    <a:p>
+                      <a:pPr algn="l"/>
+                      <a:r>
+                        <a:rPr sz="2100" b="0">
+                          <a:solidFill>
+                            <a:srgbClr val="F4F8FF"/>
+                          </a:solidFill>
+                          <a:latin typeface="Arial"/>
+                          <a:ea typeface="Arial"/>
+                          <a:cs typeface="Arial"/>
+                        </a:rPr>
+                        <a:t>bbox</a:t>
+                      </a:r>
+                    </a:p>
+                  </a:txBody>
+                  <a:tcPr marL="91440" marR="91440" marT="45720" marB="45720" anchor="ctr">
+                    <a:lnL w="9525">
+                      <a:solidFill>
+                        <a:srgbClr val="355271"/>
+                      </a:solidFill>
+                      <a:prstDash val="solid"/>
+                    </a:lnL>
+                    <a:lnR w="9525">
+                      <a:solidFill>
+                        <a:srgbClr val="355271"/>
+                      </a:solidFill>
+                      <a:prstDash val="solid"/>
+                    </a:lnR>
+                    <a:lnB w="9525">
+                      <a:solidFill>
+                        <a:srgbClr val="355271"/>
+                      </a:solidFill>
+                      <a:prstDash val="solid"/>
+                    </a:lnB>
+                    <a:solidFill>
+                      <a:srgbClr val="102A4B"/>
+                    </a:solidFill>
+                  </a:tcPr>
+                </a:tc>
+                <a:tc>
+                  <a:txBody>
+                    <a:bodyPr lIns="76200" tIns="76200" rIns="76200" bIns="76200"/>
+                    <a:lstStyle/>
+                    <a:p>
+                      <a:pPr algn="ctr"/>
+                      <a:r>
+                        <a:rPr sz="2100" b="0">
+                          <a:solidFill>
+                            <a:srgbClr val="F4F8FF"/>
+                          </a:solidFill>
+                          <a:latin typeface="Arial"/>
+                          <a:ea typeface="Arial"/>
+                          <a:cs typeface="Arial"/>
+                        </a:rPr>
+                        <a:t>Batas dan filter border</a:t>
+                      </a:r>
+                    </a:p>
+                  </a:txBody>
+                  <a:tcPr marL="91440" marR="91440" marT="45720" marB="45720" anchor="ctr">
+                    <a:lnR w="9525">
+                      <a:solidFill>
+                        <a:srgbClr val="355271"/>
+                      </a:solidFill>
+                      <a:prstDash val="solid"/>
+                    </a:lnR>
+                    <a:lnB w="9525">
+                      <a:solidFill>
+                        <a:srgbClr val="355271"/>
+                      </a:solidFill>
+                      <a:prstDash val="solid"/>
+                    </a:lnB>
+                    <a:solidFill>
+                      <a:srgbClr val="102A4B"/>
+                    </a:solidFill>
+                  </a:tcPr>
+                </a:tc>
+              </a:tr>
+              <a:tr h="638175">
+                <a:tc>
+                  <a:txBody>
+                    <a:bodyPr lIns="76200" tIns="76200" rIns="76200" bIns="76200"/>
+                    <a:lstStyle/>
+                    <a:p>
+                      <a:pPr algn="l"/>
+                      <a:r>
+                        <a:rPr sz="2100" b="0">
+                          <a:solidFill>
+                            <a:srgbClr val="F4F8FF"/>
+                          </a:solidFill>
+                          <a:latin typeface="Arial"/>
+                          <a:ea typeface="Arial"/>
+                          <a:cs typeface="Arial"/>
+                        </a:rPr>
+                        <a:t>image</a:t>
+                      </a:r>
+                    </a:p>
+                  </a:txBody>
+                  <a:tcPr marL="91440" marR="91440" marT="45720" marB="45720" anchor="ctr">
+                    <a:lnL w="9525">
+                      <a:solidFill>
+                        <a:srgbClr val="355271"/>
+                      </a:solidFill>
+                      <a:prstDash val="solid"/>
+                    </a:lnL>
+                    <a:lnR w="9525">
+                      <a:solidFill>
+                        <a:srgbClr val="355271"/>
+                      </a:solidFill>
+                      <a:prstDash val="solid"/>
+                    </a:lnR>
+                    <a:lnB w="9525">
+                      <a:solidFill>
+                        <a:srgbClr val="355271"/>
+                      </a:solidFill>
+                      <a:prstDash val="solid"/>
+                    </a:lnB>
+                    <a:solidFill>
+                      <a:srgbClr val="153453"/>
+                    </a:solidFill>
+                  </a:tcPr>
+                </a:tc>
+                <a:tc>
+                  <a:txBody>
+                    <a:bodyPr lIns="76200" tIns="76200" rIns="76200" bIns="76200"/>
+                    <a:lstStyle/>
+                    <a:p>
+                      <a:pPr algn="ctr"/>
+                      <a:r>
+                        <a:rPr sz="2100" b="0">
+                          <a:solidFill>
+                            <a:srgbClr val="F4F8FF"/>
+                          </a:solidFill>
+                          <a:latin typeface="Arial"/>
+                          <a:ea typeface="Arial"/>
+                          <a:cs typeface="Arial"/>
+                        </a:rPr>
+                        <a:t>Mask karakter individual</a:t>
+                      </a:r>
+                    </a:p>
+                  </a:txBody>
+                  <a:tcPr marL="91440" marR="91440" marT="45720" marB="45720" anchor="ctr">
+                    <a:lnR w="9525">
+                      <a:solidFill>
+                        <a:srgbClr val="355271"/>
+                      </a:solidFill>
+                      <a:prstDash val="solid"/>
+                    </a:lnR>
+                    <a:lnB w="9525">
+                      <a:solidFill>
+                        <a:srgbClr val="355271"/>
+                      </a:solidFill>
+                      <a:prstDash val="solid"/>
+                    </a:lnB>
+                    <a:solidFill>
+                      <a:srgbClr val="153453"/>
+                    </a:solidFill>
+                  </a:tcPr>
+                </a:tc>
+              </a:tr>
+              <a:tr h="638175">
+                <a:tc>
+                  <a:txBody>
+                    <a:bodyPr lIns="76200" tIns="76200" rIns="76200" bIns="76200"/>
+                    <a:lstStyle/>
+                    <a:p>
+                      <a:pPr algn="l"/>
+                      <a:r>
+                        <a:rPr sz="2100" b="0">
+                          <a:solidFill>
+                            <a:srgbClr val="F4F8FF"/>
+                          </a:solidFill>
+                          <a:latin typeface="Arial"/>
+                          <a:ea typeface="Arial"/>
+                          <a:cs typeface="Arial"/>
+                        </a:rPr>
+                        <a:t>centroid</a:t>
+                      </a:r>
+                    </a:p>
+                  </a:txBody>
+                  <a:tcPr marL="91440" marR="91440" marT="45720" marB="45720" anchor="ctr">
+                    <a:lnL w="9525">
+                      <a:solidFill>
+                        <a:srgbClr val="355271"/>
+                      </a:solidFill>
+                      <a:prstDash val="solid"/>
+                    </a:lnL>
+                    <a:lnR w="9525">
+                      <a:solidFill>
+                        <a:srgbClr val="355271"/>
+                      </a:solidFill>
+                      <a:prstDash val="solid"/>
+                    </a:lnR>
+                    <a:lnB w="9525">
+                      <a:solidFill>
+                        <a:srgbClr val="355271"/>
+                      </a:solidFill>
+                      <a:prstDash val="solid"/>
+                    </a:lnB>
+                    <a:solidFill>
+                      <a:srgbClr val="102A4B"/>
+                    </a:solidFill>
+                  </a:tcPr>
+                </a:tc>
+                <a:tc>
+                  <a:txBody>
+                    <a:bodyPr lIns="76200" tIns="76200" rIns="76200" bIns="76200"/>
+                    <a:lstStyle/>
+                    <a:p>
+                      <a:pPr algn="ctr"/>
+                      <a:r>
+                        <a:rPr sz="2100" b="0">
+                          <a:solidFill>
+                            <a:srgbClr val="F4F8FF"/>
+                          </a:solidFill>
+                          <a:latin typeface="Arial"/>
+                          <a:ea typeface="Arial"/>
+                          <a:cs typeface="Arial"/>
+                        </a:rPr>
+                        <a:t>Pengurutan baris</a:t>
+                      </a:r>
+                    </a:p>
+                  </a:txBody>
+                  <a:tcPr marL="91440" marR="91440" marT="45720" marB="45720" anchor="ctr">
+                    <a:lnR w="9525">
+                      <a:solidFill>
+                        <a:srgbClr val="355271"/>
+                      </a:solidFill>
+                      <a:prstDash val="solid"/>
+                    </a:lnR>
+                    <a:lnB w="9525">
+                      <a:solidFill>
+                        <a:srgbClr val="355271"/>
+                      </a:solidFill>
+                      <a:prstDash val="solid"/>
+                    </a:lnB>
+                    <a:solidFill>
+                      <a:srgbClr val="102A4B"/>
+                    </a:solidFill>
+                  </a:tcPr>
+                </a:tc>
+              </a:tr>
+            </a:tbl>
+          </a:graphicData>
+        </a:graphic>
+      </p:graphicFrame>
+      <p:sp>
+        <p:nvSpPr>
+          <p:cNvPr id="6" name="alur">
+            <a:extLst xmlns:a="http://schemas.openxmlformats.org/drawingml/2006/main">
+              <a:ext uri="{FF2B5EF4-FFF2-40B4-BE49-F238E27FC236}">
+                <a16:creationId xmlns:a16="http://schemas.microsoft.com/office/drawing/2014/main" id="{04BB6C20-1F48-487B-BD42-61641DCD930B}"/>
+              </a:ext>
+            </a:extLst>
+          </p:cNvPr>
+          <p:cNvSpPr>
+            <a:spLocks xmlns:a="http://schemas.openxmlformats.org/drawingml/2006/main" noGrp="1"/>
+          </p:cNvSpPr>
+          <p:nvPr/>
+        </p:nvSpPr>
+        <p:spPr>
+          <a:xfrm xmlns:a="http://schemas.openxmlformats.org/drawingml/2006/main">
+            <a:off x="6953250" y="1790700"/>
+            <a:ext cx="4629150" cy="2524125"/>
+          </a:xfrm>
+          <a:prstGeom xmlns:a="http://schemas.openxmlformats.org/drawingml/2006/main" prst="rect">
+            <a:avLst/>
+          </a:prstGeom>
+          <a:noFill xmlns:a="http://schemas.openxmlformats.org/drawingml/2006/main"/>
+          <a:ln xmlns:a="http://schemas.openxmlformats.org/drawingml/2006/main" w="0">
+            <a:noFill/>
+            <a:prstDash val="solid"/>
+          </a:ln>
+        </p:spPr>
+        <p:txBody>
+          <a:bodyPr xmlns:a="http://schemas.openxmlformats.org/drawingml/2006/main" wrap="square" lIns="0" tIns="0" rIns="0" bIns="0" anchor="t">
+            <a:noAutofit/>
+          </a:bodyPr>
+          <a:lstStyle xmlns:a="http://schemas.openxmlformats.org/drawingml/2006/main">
+            <a:defPPr algn="l">
+              <a:defRPr sz="2175">
+                <a:solidFill>
+                  <a:srgbClr val="F4F8FF"/>
+                </a:solidFill>
+                <a:latin typeface="Arial"/>
+                <a:ea typeface="Arial"/>
+                <a:cs typeface="Arial"/>
+              </a:defRPr>
+            </a:defPPr>
+            <a:lvl1pPr algn="l">
+              <a:defRPr sz="2175">
+                <a:solidFill>
+                  <a:srgbClr val="F4F8FF"/>
+                </a:solidFill>
+                <a:latin typeface="Arial"/>
+                <a:ea typeface="Arial"/>
+                <a:cs typeface="Arial"/>
+              </a:defRPr>
+            </a:lvl1pPr>
+            <a:lvl2pPr algn="l">
+              <a:defRPr sz="2175">
+                <a:solidFill>
+                  <a:srgbClr val="F4F8FF"/>
+                </a:solidFill>
+                <a:latin typeface="Arial"/>
+                <a:ea typeface="Arial"/>
+                <a:cs typeface="Arial"/>
+              </a:defRPr>
+            </a:lvl2pPr>
+            <a:lvl3pPr algn="l">
+              <a:defRPr sz="2175">
+                <a:solidFill>
+                  <a:srgbClr val="F4F8FF"/>
+                </a:solidFill>
+                <a:latin typeface="Arial"/>
+                <a:ea typeface="Arial"/>
+                <a:cs typeface="Arial"/>
+              </a:defRPr>
+            </a:lvl3pPr>
+            <a:lvl4pPr algn="l">
+              <a:defRPr sz="2175">
+                <a:solidFill>
+                  <a:srgbClr val="F4F8FF"/>
+                </a:solidFill>
+                <a:latin typeface="Arial"/>
+                <a:ea typeface="Arial"/>
+                <a:cs typeface="Arial"/>
+              </a:defRPr>
+            </a:lvl4pPr>
+            <a:lvl5pPr algn="l">
+              <a:defRPr sz="2175">
+                <a:solidFill>
+                  <a:srgbClr val="F4F8FF"/>
+                </a:solidFill>
+                <a:latin typeface="Arial"/>
+                <a:ea typeface="Arial"/>
+                <a:cs typeface="Arial"/>
+              </a:defRPr>
+            </a:lvl5pPr>
+            <a:lvl6pPr algn="l">
+              <a:defRPr sz="2175">
+                <a:solidFill>
+                  <a:srgbClr val="F4F8FF"/>
+                </a:solidFill>
+                <a:latin typeface="Arial"/>
+                <a:ea typeface="Arial"/>
+                <a:cs typeface="Arial"/>
+              </a:defRPr>
+            </a:lvl6pPr>
+            <a:lvl7pPr algn="l">
+              <a:defRPr sz="2175">
+                <a:solidFill>
+                  <a:srgbClr val="F4F8FF"/>
+                </a:solidFill>
+                <a:latin typeface="Arial"/>
+                <a:ea typeface="Arial"/>
+                <a:cs typeface="Arial"/>
+              </a:defRPr>
+            </a:lvl7pPr>
+            <a:lvl8pPr algn="l">
+              <a:defRPr sz="2175">
+                <a:solidFill>
+                  <a:srgbClr val="F4F8FF"/>
+                </a:solidFill>
+                <a:latin typeface="Arial"/>
+                <a:ea typeface="Arial"/>
+                <a:cs typeface="Arial"/>
+              </a:defRPr>
+            </a:lvl8pPr>
+            <a:lvl9pPr algn="l">
+              <a:defRPr sz="2175">
+                <a:solidFill>
+                  <a:srgbClr val="F4F8FF"/>
+                </a:solidFill>
+                <a:latin typeface="Arial"/>
+                <a:ea typeface="Arial"/>
+                <a:cs typeface="Arial"/>
+              </a:defRPr>
+            </a:lvl9pPr>
+          </a:lstStyle>
+          <a:p xmlns:a="http://schemas.openxmlformats.org/drawingml/2006/main">
+            <a:pPr algn="l">
+              <a:defRPr sz="2175">
+                <a:solidFill>
+                  <a:srgbClr val="F4F8FF"/>
+                </a:solidFill>
+                <a:latin typeface="Arial"/>
+                <a:ea typeface="Arial"/>
+                <a:cs typeface="Arial"/>
+              </a:defRPr>
+            </a:pPr>
+            <a:r>
+              <a:rPr sz="2175">
+                <a:solidFill>
+                  <a:srgbClr val="F4F8FF"/>
+                </a:solidFill>
+                <a:latin typeface="Arial"/>
+                <a:ea typeface="Arial"/>
+                <a:cs typeface="Arial"/>
+              </a:rPr>
+              <a:t>Otsu dan hapus objek &lt; 10 px²</a:t>
+            </a:r>
+          </a:p>
+          <a:p xmlns:a="http://schemas.openxmlformats.org/drawingml/2006/main">
+            <a:r>
+              <a:t/>
+            </a:r>
+          </a:p>
+          <a:p xmlns:a="http://schemas.openxmlformats.org/drawingml/2006/main">
+            <a:pPr algn="l">
+              <a:defRPr sz="2175">
+                <a:solidFill>
+                  <a:srgbClr val="F4F8FF"/>
+                </a:solidFill>
+                <a:latin typeface="Arial"/>
+                <a:ea typeface="Arial"/>
+                <a:cs typeface="Arial"/>
+              </a:defRPr>
+            </a:pPr>
+            <a:r>
+              <a:rPr sz="2175">
+                <a:solidFill>
+                  <a:srgbClr val="F4F8FF"/>
+                </a:solidFill>
+                <a:latin typeface="Arial"/>
+                <a:ea typeface="Arial"/>
+                <a:cs typeface="Arial"/>
+              </a:rPr>
+              <a:t>Label komponen 8 tetangga</a:t>
+            </a:r>
+          </a:p>
+          <a:p xmlns:a="http://schemas.openxmlformats.org/drawingml/2006/main">
+            <a:r>
+              <a:t/>
+            </a:r>
+          </a:p>
+          <a:p xmlns:a="http://schemas.openxmlformats.org/drawingml/2006/main">
+            <a:pPr algn="l">
+              <a:defRPr sz="2175">
+                <a:solidFill>
+                  <a:srgbClr val="F4F8FF"/>
+                </a:solidFill>
+                <a:latin typeface="Arial"/>
+                <a:ea typeface="Arial"/>
+                <a:cs typeface="Arial"/>
+              </a:defRPr>
+            </a:pPr>
+            <a:r>
+              <a:rPr sz="2175">
+                <a:solidFill>
+                  <a:srgbClr val="F4F8FF"/>
+                </a:solidFill>
+                <a:latin typeface="Arial"/>
+                <a:ea typeface="Arial"/>
+                <a:cs typeface="Arial"/>
+              </a:rPr>
+              <a:t>RANSAC mengurutkan baris</a:t>
+            </a:r>
+          </a:p>
+        </p:txBody>
+      </p:sp>
+      <p:sp>
+        <p:nvSpPr>
+          <p:cNvPr id="7" name="kode-karakter">
+            <a:extLst xmlns:a="http://schemas.openxmlformats.org/drawingml/2006/main">
+              <a:ext uri="{FF2B5EF4-FFF2-40B4-BE49-F238E27FC236}">
+                <a16:creationId xmlns:a16="http://schemas.microsoft.com/office/drawing/2014/main" id="{4770F6D7-2FC0-4177-9FC0-EA15C896E81C}"/>
+              </a:ext>
+            </a:extLst>
+          </p:cNvPr>
+          <p:cNvSpPr>
+            <a:spLocks xmlns:a="http://schemas.openxmlformats.org/drawingml/2006/main" noGrp="1"/>
+          </p:cNvSpPr>
+          <p:nvPr/>
+        </p:nvSpPr>
+        <p:spPr>
+          <a:xfrm xmlns:a="http://schemas.openxmlformats.org/drawingml/2006/main">
+            <a:off x="609600" y="4914900"/>
+            <a:ext cx="10972800" cy="1285875"/>
+          </a:xfrm>
+          <a:prstGeom xmlns:a="http://schemas.openxmlformats.org/drawingml/2006/main" prst="rect">
+            <a:avLst/>
+          </a:prstGeom>
+          <a:noFill xmlns:a="http://schemas.openxmlformats.org/drawingml/2006/main"/>
+          <a:ln xmlns:a="http://schemas.openxmlformats.org/drawingml/2006/main" w="0">
+            <a:noFill/>
+            <a:prstDash val="solid"/>
+          </a:ln>
+        </p:spPr>
+        <p:txBody>
+          <a:bodyPr xmlns:a="http://schemas.openxmlformats.org/drawingml/2006/main" wrap="square" lIns="0" tIns="0" rIns="0" bIns="0" anchor="t">
+            <a:noAutofit/>
+          </a:bodyPr>
+          <a:lstStyle xmlns:a="http://schemas.openxmlformats.org/drawingml/2006/main">
+            <a:defPPr algn="l">
+              <a:defRPr sz="1950">
+                <a:solidFill>
+                  <a:srgbClr val="BCD0EB"/>
+                </a:solidFill>
+                <a:latin typeface="Consolas"/>
+                <a:ea typeface="Consolas"/>
+                <a:cs typeface="Consolas"/>
+              </a:defRPr>
+            </a:defPPr>
+            <a:lvl1pPr algn="l">
+              <a:defRPr sz="1950">
+                <a:solidFill>
+                  <a:srgbClr val="BCD0EB"/>
+                </a:solidFill>
+                <a:latin typeface="Consolas"/>
+                <a:ea typeface="Consolas"/>
+                <a:cs typeface="Consolas"/>
+              </a:defRPr>
+            </a:lvl1pPr>
+            <a:lvl2pPr algn="l">
+              <a:defRPr sz="1950">
+                <a:solidFill>
+                  <a:srgbClr val="BCD0EB"/>
+                </a:solidFill>
+                <a:latin typeface="Consolas"/>
+                <a:ea typeface="Consolas"/>
+                <a:cs typeface="Consolas"/>
+              </a:defRPr>
+            </a:lvl2pPr>
+            <a:lvl3pPr algn="l">
+              <a:defRPr sz="1950">
+                <a:solidFill>
+                  <a:srgbClr val="BCD0EB"/>
+                </a:solidFill>
+                <a:latin typeface="Consolas"/>
+                <a:ea typeface="Consolas"/>
+                <a:cs typeface="Consolas"/>
+              </a:defRPr>
+            </a:lvl3pPr>
+            <a:lvl4pPr algn="l">
+              <a:defRPr sz="1950">
+                <a:solidFill>
+                  <a:srgbClr val="BCD0EB"/>
+                </a:solidFill>
+                <a:latin typeface="Consolas"/>
+                <a:ea typeface="Consolas"/>
+                <a:cs typeface="Consolas"/>
+              </a:defRPr>
+            </a:lvl4pPr>
+            <a:lvl5pPr algn="l">
+              <a:defRPr sz="1950">
+                <a:solidFill>
+                  <a:srgbClr val="BCD0EB"/>
+                </a:solidFill>
+                <a:latin typeface="Consolas"/>
+                <a:ea typeface="Consolas"/>
+                <a:cs typeface="Consolas"/>
+              </a:defRPr>
+            </a:lvl5pPr>
+            <a:lvl6pPr algn="l">
+              <a:defRPr sz="1950">
+                <a:solidFill>
+                  <a:srgbClr val="BCD0EB"/>
+                </a:solidFill>
+                <a:latin typeface="Consolas"/>
+                <a:ea typeface="Consolas"/>
+                <a:cs typeface="Consolas"/>
+              </a:defRPr>
+            </a:lvl6pPr>
+            <a:lvl7pPr algn="l">
+              <a:defRPr sz="1950">
+                <a:solidFill>
+                  <a:srgbClr val="BCD0EB"/>
+                </a:solidFill>
+                <a:latin typeface="Consolas"/>
+                <a:ea typeface="Consolas"/>
+                <a:cs typeface="Consolas"/>
+              </a:defRPr>
+            </a:lvl7pPr>
+            <a:lvl8pPr algn="l">
+              <a:defRPr sz="1950">
+                <a:solidFill>
+                  <a:srgbClr val="BCD0EB"/>
+                </a:solidFill>
+                <a:latin typeface="Consolas"/>
+                <a:ea typeface="Consolas"/>
+                <a:cs typeface="Consolas"/>
+              </a:defRPr>
+            </a:lvl8pPr>
+            <a:lvl9pPr algn="l">
+              <a:defRPr sz="1950">
+                <a:solidFill>
+                  <a:srgbClr val="BCD0EB"/>
+                </a:solidFill>
+                <a:latin typeface="Consolas"/>
+                <a:ea typeface="Consolas"/>
+                <a:cs typeface="Consolas"/>
+              </a:defRPr>
+            </a:lvl9pPr>
+          </a:lstStyle>
+          <a:p xmlns:a="http://schemas.openxmlformats.org/drawingml/2006/main">
+            <a:pPr algn="l">
+              <a:defRPr sz="1950">
+                <a:solidFill>
+                  <a:srgbClr val="BCD0EB"/>
+                </a:solidFill>
+                <a:latin typeface="Consolas"/>
+                <a:ea typeface="Consolas"/>
+                <a:cs typeface="Consolas"/>
+              </a:defRPr>
+            </a:pPr>
+            <a:r>
+              <a:rPr sz="1950">
+                <a:solidFill>
+                  <a:srgbClr val="BCD0EB"/>
+                </a:solidFill>
+                <a:latin typeface="Consolas"/>
+                <a:ea typeface="Consolas"/>
+                <a:cs typeface="Consolas"/>
+              </a:rPr>
+              <a:t>char = (region.image * 255).astype(np.uint8)</a:t>
+            </a:r>
+          </a:p>
+          <a:p xmlns:a="http://schemas.openxmlformats.org/drawingml/2006/main">
+            <a:pPr algn="l">
+              <a:defRPr sz="1950">
+                <a:solidFill>
+                  <a:srgbClr val="BCD0EB"/>
+                </a:solidFill>
+                <a:latin typeface="Consolas"/>
+                <a:ea typeface="Consolas"/>
+                <a:cs typeface="Consolas"/>
+              </a:defRPr>
+            </a:pPr>
+            <a:r>
+              <a:rPr sz="1950">
+                <a:solidFill>
+                  <a:srgbClr val="BCD0EB"/>
+                </a:solidFill>
+                <a:latin typeface="Consolas"/>
+                <a:ea typeface="Consolas"/>
+                <a:cs typeface="Consolas"/>
+              </a:rPr>
+              <a:t>char = np.pad(char, 3, mode="constant")</a:t>
+            </a:r>
+          </a:p>
+          <a:p xmlns:a="http://schemas.openxmlformats.org/drawingml/2006/main">
+            <a:pPr algn="l">
+              <a:defRPr sz="1950">
+                <a:solidFill>
+                  <a:srgbClr val="BCD0EB"/>
+                </a:solidFill>
+                <a:latin typeface="Consolas"/>
+                <a:ea typeface="Consolas"/>
+                <a:cs typeface="Consolas"/>
+              </a:defRPr>
+            </a:pPr>
+            <a:r>
+              <a:rPr sz="1950">
+                <a:solidFill>
+                  <a:srgbClr val="BCD0EB"/>
+                </a:solidFill>
+                <a:latin typeface="Consolas"/>
+                <a:ea typeface="Consolas"/>
+                <a:cs typeface="Consolas"/>
+              </a:rPr>
+              <a:t>io.imsave(nama_file, char, check_contrast=False)</a:t>
+            </a:r>
+          </a:p>
+        </p:txBody>
+      </p:sp>
     </p:spTree>
     <p:extLst>
       <p:ext uri="{BB962C8B-B14F-4D97-AF65-F5344CB8AC3E}">
@@ -12747,7 +14908,7 @@
           <p:nvPr/>
         </p:nvPicPr>
         <p:blipFill>
-          <a:blip xmlns:r="http://schemas.openxmlformats.org/officeDocument/2006/relationships" xmlns:a="http://schemas.openxmlformats.org/drawingml/2006/main" r:embed="R8d79415a960346db"/>
+          <a:blip xmlns:r="http://schemas.openxmlformats.org/officeDocument/2006/relationships" xmlns:a="http://schemas.openxmlformats.org/drawingml/2006/main" r:embed="Re92accd86d15456e"/>
           <a:srcRect xmlns:a="http://schemas.openxmlformats.org/drawingml/2006/main" l="0" t="27" r="0" b="27"/>
           <a:stretch xmlns:a="http://schemas.openxmlformats.org/drawingml/2006/main">
             <a:fillRect l="0" t="0" r="0" b="0"/>
@@ -12763,6 +14924,4036 @@
           </a:prstGeom>
         </p:spPr>
       </p:pic>
+      <p:sp>
+        <p:nvSpPr>
+          <p:cNvPr id="3" name="judul-slide">
+            <a:extLst xmlns:a="http://schemas.openxmlformats.org/drawingml/2006/main">
+              <a:ext uri="{FF2B5EF4-FFF2-40B4-BE49-F238E27FC236}">
+                <a16:creationId xmlns:a16="http://schemas.microsoft.com/office/drawing/2014/main" id="{F5D09320-3685-4362-8F01-A6BAD8B91A0E}"/>
+              </a:ext>
+            </a:extLst>
+          </p:cNvPr>
+          <p:cNvSpPr>
+            <a:spLocks xmlns:a="http://schemas.openxmlformats.org/drawingml/2006/main" noGrp="1"/>
+          </p:cNvSpPr>
+          <p:nvPr/>
+        </p:nvSpPr>
+        <p:spPr>
+          <a:xfrm xmlns:a="http://schemas.openxmlformats.org/drawingml/2006/main">
+            <a:off x="609600" y="428625"/>
+            <a:ext cx="10972800" cy="952500"/>
+          </a:xfrm>
+          <a:prstGeom xmlns:a="http://schemas.openxmlformats.org/drawingml/2006/main" prst="rect">
+            <a:avLst/>
+          </a:prstGeom>
+          <a:noFill xmlns:a="http://schemas.openxmlformats.org/drawingml/2006/main"/>
+          <a:ln xmlns:a="http://schemas.openxmlformats.org/drawingml/2006/main" w="0">
+            <a:noFill/>
+            <a:prstDash val="solid"/>
+          </a:ln>
+        </p:spPr>
+        <p:txBody>
+          <a:bodyPr xmlns:a="http://schemas.openxmlformats.org/drawingml/2006/main" wrap="square" lIns="0" tIns="0" rIns="0" bIns="0" anchor="t">
+            <a:noAutofit/>
+          </a:bodyPr>
+          <a:lstStyle xmlns:a="http://schemas.openxmlformats.org/drawingml/2006/main">
+            <a:defPPr algn="l">
+              <a:defRPr sz="3300" b="1">
+                <a:solidFill>
+                  <a:srgbClr val="F4F8FF"/>
+                </a:solidFill>
+                <a:latin typeface="Arial"/>
+                <a:ea typeface="Arial"/>
+                <a:cs typeface="Arial"/>
+              </a:defRPr>
+            </a:defPPr>
+            <a:lvl1pPr algn="l">
+              <a:defRPr sz="3300" b="1">
+                <a:solidFill>
+                  <a:srgbClr val="F4F8FF"/>
+                </a:solidFill>
+                <a:latin typeface="Arial"/>
+                <a:ea typeface="Arial"/>
+                <a:cs typeface="Arial"/>
+              </a:defRPr>
+            </a:lvl1pPr>
+            <a:lvl2pPr algn="l">
+              <a:defRPr sz="3300" b="1">
+                <a:solidFill>
+                  <a:srgbClr val="F4F8FF"/>
+                </a:solidFill>
+                <a:latin typeface="Arial"/>
+                <a:ea typeface="Arial"/>
+                <a:cs typeface="Arial"/>
+              </a:defRPr>
+            </a:lvl2pPr>
+            <a:lvl3pPr algn="l">
+              <a:defRPr sz="3300" b="1">
+                <a:solidFill>
+                  <a:srgbClr val="F4F8FF"/>
+                </a:solidFill>
+                <a:latin typeface="Arial"/>
+                <a:ea typeface="Arial"/>
+                <a:cs typeface="Arial"/>
+              </a:defRPr>
+            </a:lvl3pPr>
+            <a:lvl4pPr algn="l">
+              <a:defRPr sz="3300" b="1">
+                <a:solidFill>
+                  <a:srgbClr val="F4F8FF"/>
+                </a:solidFill>
+                <a:latin typeface="Arial"/>
+                <a:ea typeface="Arial"/>
+                <a:cs typeface="Arial"/>
+              </a:defRPr>
+            </a:lvl4pPr>
+            <a:lvl5pPr algn="l">
+              <a:defRPr sz="3300" b="1">
+                <a:solidFill>
+                  <a:srgbClr val="F4F8FF"/>
+                </a:solidFill>
+                <a:latin typeface="Arial"/>
+                <a:ea typeface="Arial"/>
+                <a:cs typeface="Arial"/>
+              </a:defRPr>
+            </a:lvl5pPr>
+            <a:lvl6pPr algn="l">
+              <a:defRPr sz="3300" b="1">
+                <a:solidFill>
+                  <a:srgbClr val="F4F8FF"/>
+                </a:solidFill>
+                <a:latin typeface="Arial"/>
+                <a:ea typeface="Arial"/>
+                <a:cs typeface="Arial"/>
+              </a:defRPr>
+            </a:lvl6pPr>
+            <a:lvl7pPr algn="l">
+              <a:defRPr sz="3300" b="1">
+                <a:solidFill>
+                  <a:srgbClr val="F4F8FF"/>
+                </a:solidFill>
+                <a:latin typeface="Arial"/>
+                <a:ea typeface="Arial"/>
+                <a:cs typeface="Arial"/>
+              </a:defRPr>
+            </a:lvl7pPr>
+            <a:lvl8pPr algn="l">
+              <a:defRPr sz="3300" b="1">
+                <a:solidFill>
+                  <a:srgbClr val="F4F8FF"/>
+                </a:solidFill>
+                <a:latin typeface="Arial"/>
+                <a:ea typeface="Arial"/>
+                <a:cs typeface="Arial"/>
+              </a:defRPr>
+            </a:lvl8pPr>
+            <a:lvl9pPr algn="l">
+              <a:defRPr sz="3300" b="1">
+                <a:solidFill>
+                  <a:srgbClr val="F4F8FF"/>
+                </a:solidFill>
+                <a:latin typeface="Arial"/>
+                <a:ea typeface="Arial"/>
+                <a:cs typeface="Arial"/>
+              </a:defRPr>
+            </a:lvl9pPr>
+          </a:lstStyle>
+          <a:p xmlns:a="http://schemas.openxmlformats.org/drawingml/2006/main">
+            <a:pPr algn="l">
+              <a:defRPr sz="3300" b="1">
+                <a:solidFill>
+                  <a:srgbClr val="F4F8FF"/>
+                </a:solidFill>
+                <a:latin typeface="Arial"/>
+                <a:ea typeface="Arial"/>
+                <a:cs typeface="Arial"/>
+              </a:defRPr>
+            </a:pPr>
+            <a:r>
+              <a:rPr sz="3300" b="1">
+                <a:solidFill>
+                  <a:srgbClr val="F4F8FF"/>
+                </a:solidFill>
+                <a:latin typeface="Arial"/>
+                <a:ea typeface="Arial"/>
+                <a:cs typeface="Arial"/>
+              </a:rPr>
+              <a:t>Soal 2: hasil segmentasi karakter</a:t>
+            </a:r>
+          </a:p>
+        </p:txBody>
+      </p:sp>
+      <p:sp>
+        <p:nvSpPr>
+          <p:cNvPr id="4" name="nomor-slide">
+            <a:extLst xmlns:a="http://schemas.openxmlformats.org/drawingml/2006/main">
+              <a:ext uri="{FF2B5EF4-FFF2-40B4-BE49-F238E27FC236}">
+                <a16:creationId xmlns:a16="http://schemas.microsoft.com/office/drawing/2014/main" id="{8281C3B9-7B86-4BBB-8ED0-7EFFCFF65792}"/>
+              </a:ext>
+            </a:extLst>
+          </p:cNvPr>
+          <p:cNvSpPr>
+            <a:spLocks xmlns:a="http://schemas.openxmlformats.org/drawingml/2006/main" noGrp="1"/>
+          </p:cNvSpPr>
+          <p:nvPr/>
+        </p:nvSpPr>
+        <p:spPr>
+          <a:xfrm xmlns:a="http://schemas.openxmlformats.org/drawingml/2006/main">
+            <a:off x="10553700" y="6429375"/>
+            <a:ext cx="1028700" cy="266700"/>
+          </a:xfrm>
+          <a:prstGeom xmlns:a="http://schemas.openxmlformats.org/drawingml/2006/main" prst="rect">
+            <a:avLst/>
+          </a:prstGeom>
+          <a:noFill xmlns:a="http://schemas.openxmlformats.org/drawingml/2006/main"/>
+          <a:ln xmlns:a="http://schemas.openxmlformats.org/drawingml/2006/main" w="0">
+            <a:noFill/>
+            <a:prstDash val="solid"/>
+          </a:ln>
+        </p:spPr>
+        <p:txBody>
+          <a:bodyPr xmlns:a="http://schemas.openxmlformats.org/drawingml/2006/main" wrap="square" lIns="0" tIns="0" rIns="0" bIns="0" anchor="t">
+            <a:noAutofit/>
+          </a:bodyPr>
+          <a:lstStyle xmlns:a="http://schemas.openxmlformats.org/drawingml/2006/main">
+            <a:defPPr algn="r">
+              <a:defRPr sz="1650">
+                <a:solidFill>
+                  <a:srgbClr val="BCD0EB"/>
+                </a:solidFill>
+                <a:latin typeface="Arial"/>
+                <a:ea typeface="Arial"/>
+                <a:cs typeface="Arial"/>
+              </a:defRPr>
+            </a:defPPr>
+            <a:lvl1pPr algn="r">
+              <a:defRPr sz="1650">
+                <a:solidFill>
+                  <a:srgbClr val="BCD0EB"/>
+                </a:solidFill>
+                <a:latin typeface="Arial"/>
+                <a:ea typeface="Arial"/>
+                <a:cs typeface="Arial"/>
+              </a:defRPr>
+            </a:lvl1pPr>
+            <a:lvl2pPr algn="r">
+              <a:defRPr sz="1650">
+                <a:solidFill>
+                  <a:srgbClr val="BCD0EB"/>
+                </a:solidFill>
+                <a:latin typeface="Arial"/>
+                <a:ea typeface="Arial"/>
+                <a:cs typeface="Arial"/>
+              </a:defRPr>
+            </a:lvl2pPr>
+            <a:lvl3pPr algn="r">
+              <a:defRPr sz="1650">
+                <a:solidFill>
+                  <a:srgbClr val="BCD0EB"/>
+                </a:solidFill>
+                <a:latin typeface="Arial"/>
+                <a:ea typeface="Arial"/>
+                <a:cs typeface="Arial"/>
+              </a:defRPr>
+            </a:lvl3pPr>
+            <a:lvl4pPr algn="r">
+              <a:defRPr sz="1650">
+                <a:solidFill>
+                  <a:srgbClr val="BCD0EB"/>
+                </a:solidFill>
+                <a:latin typeface="Arial"/>
+                <a:ea typeface="Arial"/>
+                <a:cs typeface="Arial"/>
+              </a:defRPr>
+            </a:lvl4pPr>
+            <a:lvl5pPr algn="r">
+              <a:defRPr sz="1650">
+                <a:solidFill>
+                  <a:srgbClr val="BCD0EB"/>
+                </a:solidFill>
+                <a:latin typeface="Arial"/>
+                <a:ea typeface="Arial"/>
+                <a:cs typeface="Arial"/>
+              </a:defRPr>
+            </a:lvl5pPr>
+            <a:lvl6pPr algn="r">
+              <a:defRPr sz="1650">
+                <a:solidFill>
+                  <a:srgbClr val="BCD0EB"/>
+                </a:solidFill>
+                <a:latin typeface="Arial"/>
+                <a:ea typeface="Arial"/>
+                <a:cs typeface="Arial"/>
+              </a:defRPr>
+            </a:lvl6pPr>
+            <a:lvl7pPr algn="r">
+              <a:defRPr sz="1650">
+                <a:solidFill>
+                  <a:srgbClr val="BCD0EB"/>
+                </a:solidFill>
+                <a:latin typeface="Arial"/>
+                <a:ea typeface="Arial"/>
+                <a:cs typeface="Arial"/>
+              </a:defRPr>
+            </a:lvl7pPr>
+            <a:lvl8pPr algn="r">
+              <a:defRPr sz="1650">
+                <a:solidFill>
+                  <a:srgbClr val="BCD0EB"/>
+                </a:solidFill>
+                <a:latin typeface="Arial"/>
+                <a:ea typeface="Arial"/>
+                <a:cs typeface="Arial"/>
+              </a:defRPr>
+            </a:lvl8pPr>
+            <a:lvl9pPr algn="r">
+              <a:defRPr sz="1650">
+                <a:solidFill>
+                  <a:srgbClr val="BCD0EB"/>
+                </a:solidFill>
+                <a:latin typeface="Arial"/>
+                <a:ea typeface="Arial"/>
+                <a:cs typeface="Arial"/>
+              </a:defRPr>
+            </a:lvl9pPr>
+          </a:lstStyle>
+          <a:p xmlns:a="http://schemas.openxmlformats.org/drawingml/2006/main">
+            <a:pPr algn="r">
+              <a:defRPr sz="1650">
+                <a:solidFill>
+                  <a:srgbClr val="BCD0EB"/>
+                </a:solidFill>
+                <a:latin typeface="Arial"/>
+                <a:ea typeface="Arial"/>
+                <a:cs typeface="Arial"/>
+              </a:defRPr>
+            </a:pPr>
+            <a:r>
+              <a:rPr sz="1650">
+                <a:solidFill>
+                  <a:srgbClr val="BCD0EB"/>
+                </a:solidFill>
+                <a:latin typeface="Arial"/>
+                <a:ea typeface="Arial"/>
+                <a:cs typeface="Arial"/>
+              </a:rPr>
+              <a:t>06 / 09</a:t>
+            </a:r>
+          </a:p>
+        </p:txBody>
+      </p:sp>
+      <p:pic>
+        <p:nvPicPr>
+          <p:cNvPr id="5" name="">
+            <a:extLst xmlns:a="http://schemas.openxmlformats.org/drawingml/2006/main">
+              <a:ext uri="{FF2B5EF4-FFF2-40B4-BE49-F238E27FC236}">
+                <a16:creationId xmlns:a16="http://schemas.microsoft.com/office/drawing/2014/main" id="{E83DC518-CB07-431B-B7D9-91971FEC7260}"/>
+              </a:ext>
+            </a:extLst>
+          </p:cNvPr>
+          <p:cNvPicPr>
+            <a:picLocks xmlns:a="http://schemas.openxmlformats.org/drawingml/2006/main" noChangeAspect="1"/>
+          </p:cNvPicPr>
+          <p:nvPr/>
+        </p:nvPicPr>
+        <p:blipFill>
+          <a:blip xmlns:r="http://schemas.openxmlformats.org/officeDocument/2006/relationships" xmlns:a="http://schemas.openxmlformats.org/drawingml/2006/main" r:embed="R7901875036ed47d5"/>
+          <a:stretch xmlns:a="http://schemas.openxmlformats.org/drawingml/2006/main"/>
+        </p:blipFill>
+        <p:spPr>
+          <a:xfrm xmlns:a="http://schemas.openxmlformats.org/drawingml/2006/main">
+            <a:off x="609600" y="1648321"/>
+            <a:ext cx="4762500" cy="4380508"/>
+          </a:xfrm>
+          <a:prstGeom xmlns:a="http://schemas.openxmlformats.org/drawingml/2006/main" prst="rect">
+            <a:avLst/>
+          </a:prstGeom>
+        </p:spPr>
+      </p:pic>
+      <p:sp>
+        <p:nvSpPr>
+          <p:cNvPr id="6" name="gambar-individual">
+            <a:extLst xmlns:a="http://schemas.openxmlformats.org/drawingml/2006/main">
+              <a:ext uri="{FF2B5EF4-FFF2-40B4-BE49-F238E27FC236}">
+                <a16:creationId xmlns:a16="http://schemas.microsoft.com/office/drawing/2014/main" id="{CA2E4ED4-14C5-466B-BBE2-8F9DBD050086}"/>
+              </a:ext>
+            </a:extLst>
+          </p:cNvPr>
+          <p:cNvSpPr>
+            <a:spLocks xmlns:a="http://schemas.openxmlformats.org/drawingml/2006/main" noGrp="1"/>
+          </p:cNvSpPr>
+          <p:nvPr/>
+        </p:nvSpPr>
+        <p:spPr>
+          <a:xfrm xmlns:a="http://schemas.openxmlformats.org/drawingml/2006/main">
+            <a:off x="6086475" y="1619250"/>
+            <a:ext cx="5495925" cy="476250"/>
+          </a:xfrm>
+          <a:prstGeom xmlns:a="http://schemas.openxmlformats.org/drawingml/2006/main" prst="rect">
+            <a:avLst/>
+          </a:prstGeom>
+          <a:noFill xmlns:a="http://schemas.openxmlformats.org/drawingml/2006/main"/>
+          <a:ln xmlns:a="http://schemas.openxmlformats.org/drawingml/2006/main" w="0">
+            <a:noFill/>
+            <a:prstDash val="solid"/>
+          </a:ln>
+        </p:spPr>
+        <p:txBody>
+          <a:bodyPr xmlns:a="http://schemas.openxmlformats.org/drawingml/2006/main" wrap="square" lIns="0" tIns="0" rIns="0" bIns="0" anchor="t">
+            <a:noAutofit/>
+          </a:bodyPr>
+          <a:lstStyle xmlns:a="http://schemas.openxmlformats.org/drawingml/2006/main">
+            <a:defPPr algn="l">
+              <a:defRPr sz="2325" b="1">
+                <a:solidFill>
+                  <a:srgbClr val="5DDFFF"/>
+                </a:solidFill>
+                <a:latin typeface="Arial"/>
+                <a:ea typeface="Arial"/>
+                <a:cs typeface="Arial"/>
+              </a:defRPr>
+            </a:defPPr>
+            <a:lvl1pPr algn="l">
+              <a:defRPr sz="2325" b="1">
+                <a:solidFill>
+                  <a:srgbClr val="5DDFFF"/>
+                </a:solidFill>
+                <a:latin typeface="Arial"/>
+                <a:ea typeface="Arial"/>
+                <a:cs typeface="Arial"/>
+              </a:defRPr>
+            </a:lvl1pPr>
+            <a:lvl2pPr algn="l">
+              <a:defRPr sz="2325" b="1">
+                <a:solidFill>
+                  <a:srgbClr val="5DDFFF"/>
+                </a:solidFill>
+                <a:latin typeface="Arial"/>
+                <a:ea typeface="Arial"/>
+                <a:cs typeface="Arial"/>
+              </a:defRPr>
+            </a:lvl2pPr>
+            <a:lvl3pPr algn="l">
+              <a:defRPr sz="2325" b="1">
+                <a:solidFill>
+                  <a:srgbClr val="5DDFFF"/>
+                </a:solidFill>
+                <a:latin typeface="Arial"/>
+                <a:ea typeface="Arial"/>
+                <a:cs typeface="Arial"/>
+              </a:defRPr>
+            </a:lvl3pPr>
+            <a:lvl4pPr algn="l">
+              <a:defRPr sz="2325" b="1">
+                <a:solidFill>
+                  <a:srgbClr val="5DDFFF"/>
+                </a:solidFill>
+                <a:latin typeface="Arial"/>
+                <a:ea typeface="Arial"/>
+                <a:cs typeface="Arial"/>
+              </a:defRPr>
+            </a:lvl4pPr>
+            <a:lvl5pPr algn="l">
+              <a:defRPr sz="2325" b="1">
+                <a:solidFill>
+                  <a:srgbClr val="5DDFFF"/>
+                </a:solidFill>
+                <a:latin typeface="Arial"/>
+                <a:ea typeface="Arial"/>
+                <a:cs typeface="Arial"/>
+              </a:defRPr>
+            </a:lvl5pPr>
+            <a:lvl6pPr algn="l">
+              <a:defRPr sz="2325" b="1">
+                <a:solidFill>
+                  <a:srgbClr val="5DDFFF"/>
+                </a:solidFill>
+                <a:latin typeface="Arial"/>
+                <a:ea typeface="Arial"/>
+                <a:cs typeface="Arial"/>
+              </a:defRPr>
+            </a:lvl6pPr>
+            <a:lvl7pPr algn="l">
+              <a:defRPr sz="2325" b="1">
+                <a:solidFill>
+                  <a:srgbClr val="5DDFFF"/>
+                </a:solidFill>
+                <a:latin typeface="Arial"/>
+                <a:ea typeface="Arial"/>
+                <a:cs typeface="Arial"/>
+              </a:defRPr>
+            </a:lvl7pPr>
+            <a:lvl8pPr algn="l">
+              <a:defRPr sz="2325" b="1">
+                <a:solidFill>
+                  <a:srgbClr val="5DDFFF"/>
+                </a:solidFill>
+                <a:latin typeface="Arial"/>
+                <a:ea typeface="Arial"/>
+                <a:cs typeface="Arial"/>
+              </a:defRPr>
+            </a:lvl8pPr>
+            <a:lvl9pPr algn="l">
+              <a:defRPr sz="2325" b="1">
+                <a:solidFill>
+                  <a:srgbClr val="5DDFFF"/>
+                </a:solidFill>
+                <a:latin typeface="Arial"/>
+                <a:ea typeface="Arial"/>
+                <a:cs typeface="Arial"/>
+              </a:defRPr>
+            </a:lvl9pPr>
+          </a:lstStyle>
+          <a:p xmlns:a="http://schemas.openxmlformats.org/drawingml/2006/main">
+            <a:pPr algn="l">
+              <a:defRPr sz="2325" b="1">
+                <a:solidFill>
+                  <a:srgbClr val="5DDFFF"/>
+                </a:solidFill>
+                <a:latin typeface="Arial"/>
+                <a:ea typeface="Arial"/>
+                <a:cs typeface="Arial"/>
+              </a:defRPr>
+            </a:pPr>
+            <a:r>
+              <a:rPr sz="2325" b="1">
+                <a:solidFill>
+                  <a:srgbClr val="5DDFFF"/>
+                </a:solidFill>
+                <a:latin typeface="Arial"/>
+                <a:ea typeface="Arial"/>
+                <a:cs typeface="Arial"/>
+              </a:rPr>
+              <a:t>Gambar individual</a:t>
+            </a:r>
+          </a:p>
+        </p:txBody>
+      </p:sp>
+      <p:pic>
+        <p:nvPicPr>
+          <p:cNvPr id="7" name="">
+            <a:extLst xmlns:a="http://schemas.openxmlformats.org/drawingml/2006/main">
+              <a:ext uri="{FF2B5EF4-FFF2-40B4-BE49-F238E27FC236}">
+                <a16:creationId xmlns:a16="http://schemas.microsoft.com/office/drawing/2014/main" id="{825E9F8D-0364-4BD5-9449-6ED66DF3BE32}"/>
+              </a:ext>
+            </a:extLst>
+          </p:cNvPr>
+          <p:cNvPicPr>
+            <a:picLocks xmlns:a="http://schemas.openxmlformats.org/drawingml/2006/main" noChangeAspect="1"/>
+          </p:cNvPicPr>
+          <p:nvPr/>
+        </p:nvPicPr>
+        <p:blipFill>
+          <a:blip xmlns:r="http://schemas.openxmlformats.org/officeDocument/2006/relationships" xmlns:a="http://schemas.openxmlformats.org/drawingml/2006/main" r:embed="R9c4658c7d5a1477b"/>
+          <a:stretch xmlns:a="http://schemas.openxmlformats.org/drawingml/2006/main"/>
+        </p:blipFill>
+        <p:spPr>
+          <a:xfrm xmlns:a="http://schemas.openxmlformats.org/drawingml/2006/main">
+            <a:off x="6100763" y="2266950"/>
+            <a:ext cx="638175" cy="638175"/>
+          </a:xfrm>
+          <a:prstGeom xmlns:a="http://schemas.openxmlformats.org/drawingml/2006/main" prst="rect">
+            <a:avLst/>
+          </a:prstGeom>
+        </p:spPr>
+      </p:pic>
+      <p:sp>
+        <p:nvSpPr>
+          <p:cNvPr id="8" name="nomor-karakter-0">
+            <a:extLst xmlns:a="http://schemas.openxmlformats.org/drawingml/2006/main">
+              <a:ext uri="{FF2B5EF4-FFF2-40B4-BE49-F238E27FC236}">
+                <a16:creationId xmlns:a16="http://schemas.microsoft.com/office/drawing/2014/main" id="{7FC28698-703D-4ECE-A1F9-7FA116D29F5F}"/>
+              </a:ext>
+            </a:extLst>
+          </p:cNvPr>
+          <p:cNvSpPr>
+            <a:spLocks xmlns:a="http://schemas.openxmlformats.org/drawingml/2006/main" noGrp="1"/>
+          </p:cNvSpPr>
+          <p:nvPr/>
+        </p:nvSpPr>
+        <p:spPr>
+          <a:xfrm xmlns:a="http://schemas.openxmlformats.org/drawingml/2006/main">
+            <a:off x="6086475" y="2952750"/>
+            <a:ext cx="666750" cy="257175"/>
+          </a:xfrm>
+          <a:prstGeom xmlns:a="http://schemas.openxmlformats.org/drawingml/2006/main" prst="rect">
+            <a:avLst/>
+          </a:prstGeom>
+          <a:noFill xmlns:a="http://schemas.openxmlformats.org/drawingml/2006/main"/>
+          <a:ln xmlns:a="http://schemas.openxmlformats.org/drawingml/2006/main" w="0">
+            <a:noFill/>
+            <a:prstDash val="solid"/>
+          </a:ln>
+        </p:spPr>
+        <p:txBody>
+          <a:bodyPr xmlns:a="http://schemas.openxmlformats.org/drawingml/2006/main" wrap="square" lIns="0" tIns="0" rIns="0" bIns="0" anchor="t">
+            <a:noAutofit/>
+          </a:bodyPr>
+          <a:lstStyle xmlns:a="http://schemas.openxmlformats.org/drawingml/2006/main">
+            <a:defPPr algn="ctr">
+              <a:defRPr sz="1575">
+                <a:solidFill>
+                  <a:srgbClr val="BCD0EB"/>
+                </a:solidFill>
+                <a:latin typeface="Arial"/>
+                <a:ea typeface="Arial"/>
+                <a:cs typeface="Arial"/>
+              </a:defRPr>
+            </a:defPPr>
+            <a:lvl1pPr algn="ctr">
+              <a:defRPr sz="1575">
+                <a:solidFill>
+                  <a:srgbClr val="BCD0EB"/>
+                </a:solidFill>
+                <a:latin typeface="Arial"/>
+                <a:ea typeface="Arial"/>
+                <a:cs typeface="Arial"/>
+              </a:defRPr>
+            </a:lvl1pPr>
+            <a:lvl2pPr algn="ctr">
+              <a:defRPr sz="1575">
+                <a:solidFill>
+                  <a:srgbClr val="BCD0EB"/>
+                </a:solidFill>
+                <a:latin typeface="Arial"/>
+                <a:ea typeface="Arial"/>
+                <a:cs typeface="Arial"/>
+              </a:defRPr>
+            </a:lvl2pPr>
+            <a:lvl3pPr algn="ctr">
+              <a:defRPr sz="1575">
+                <a:solidFill>
+                  <a:srgbClr val="BCD0EB"/>
+                </a:solidFill>
+                <a:latin typeface="Arial"/>
+                <a:ea typeface="Arial"/>
+                <a:cs typeface="Arial"/>
+              </a:defRPr>
+            </a:lvl3pPr>
+            <a:lvl4pPr algn="ctr">
+              <a:defRPr sz="1575">
+                <a:solidFill>
+                  <a:srgbClr val="BCD0EB"/>
+                </a:solidFill>
+                <a:latin typeface="Arial"/>
+                <a:ea typeface="Arial"/>
+                <a:cs typeface="Arial"/>
+              </a:defRPr>
+            </a:lvl4pPr>
+            <a:lvl5pPr algn="ctr">
+              <a:defRPr sz="1575">
+                <a:solidFill>
+                  <a:srgbClr val="BCD0EB"/>
+                </a:solidFill>
+                <a:latin typeface="Arial"/>
+                <a:ea typeface="Arial"/>
+                <a:cs typeface="Arial"/>
+              </a:defRPr>
+            </a:lvl5pPr>
+            <a:lvl6pPr algn="ctr">
+              <a:defRPr sz="1575">
+                <a:solidFill>
+                  <a:srgbClr val="BCD0EB"/>
+                </a:solidFill>
+                <a:latin typeface="Arial"/>
+                <a:ea typeface="Arial"/>
+                <a:cs typeface="Arial"/>
+              </a:defRPr>
+            </a:lvl6pPr>
+            <a:lvl7pPr algn="ctr">
+              <a:defRPr sz="1575">
+                <a:solidFill>
+                  <a:srgbClr val="BCD0EB"/>
+                </a:solidFill>
+                <a:latin typeface="Arial"/>
+                <a:ea typeface="Arial"/>
+                <a:cs typeface="Arial"/>
+              </a:defRPr>
+            </a:lvl7pPr>
+            <a:lvl8pPr algn="ctr">
+              <a:defRPr sz="1575">
+                <a:solidFill>
+                  <a:srgbClr val="BCD0EB"/>
+                </a:solidFill>
+                <a:latin typeface="Arial"/>
+                <a:ea typeface="Arial"/>
+                <a:cs typeface="Arial"/>
+              </a:defRPr>
+            </a:lvl8pPr>
+            <a:lvl9pPr algn="ctr">
+              <a:defRPr sz="1575">
+                <a:solidFill>
+                  <a:srgbClr val="BCD0EB"/>
+                </a:solidFill>
+                <a:latin typeface="Arial"/>
+                <a:ea typeface="Arial"/>
+                <a:cs typeface="Arial"/>
+              </a:defRPr>
+            </a:lvl9pPr>
+          </a:lstStyle>
+          <a:p xmlns:a="http://schemas.openxmlformats.org/drawingml/2006/main">
+            <a:pPr algn="ctr">
+              <a:defRPr sz="1575">
+                <a:solidFill>
+                  <a:srgbClr val="BCD0EB"/>
+                </a:solidFill>
+                <a:latin typeface="Arial"/>
+                <a:ea typeface="Arial"/>
+                <a:cs typeface="Arial"/>
+              </a:defRPr>
+            </a:pPr>
+            <a:r>
+              <a:rPr sz="1575">
+                <a:solidFill>
+                  <a:srgbClr val="BCD0EB"/>
+                </a:solidFill>
+                <a:latin typeface="Arial"/>
+                <a:ea typeface="Arial"/>
+                <a:cs typeface="Arial"/>
+              </a:rPr>
+              <a:t>01</a:t>
+            </a:r>
+          </a:p>
+        </p:txBody>
+      </p:sp>
+      <p:pic>
+        <p:nvPicPr>
+          <p:cNvPr id="9" name="">
+            <a:extLst xmlns:a="http://schemas.openxmlformats.org/drawingml/2006/main">
+              <a:ext uri="{FF2B5EF4-FFF2-40B4-BE49-F238E27FC236}">
+                <a16:creationId xmlns:a16="http://schemas.microsoft.com/office/drawing/2014/main" id="{40FECDC5-2AAB-408B-A38B-A62FDC389366}"/>
+              </a:ext>
+            </a:extLst>
+          </p:cNvPr>
+          <p:cNvPicPr>
+            <a:picLocks xmlns:a="http://schemas.openxmlformats.org/drawingml/2006/main" noChangeAspect="1"/>
+          </p:cNvPicPr>
+          <p:nvPr/>
+        </p:nvPicPr>
+        <p:blipFill>
+          <a:blip xmlns:r="http://schemas.openxmlformats.org/officeDocument/2006/relationships" xmlns:a="http://schemas.openxmlformats.org/drawingml/2006/main" r:embed="Rf869b0f39c844219"/>
+          <a:stretch xmlns:a="http://schemas.openxmlformats.org/drawingml/2006/main"/>
+        </p:blipFill>
+        <p:spPr>
+          <a:xfrm xmlns:a="http://schemas.openxmlformats.org/drawingml/2006/main">
+            <a:off x="7036435" y="2266950"/>
+            <a:ext cx="595630" cy="638175"/>
+          </a:xfrm>
+          <a:prstGeom xmlns:a="http://schemas.openxmlformats.org/drawingml/2006/main" prst="rect">
+            <a:avLst/>
+          </a:prstGeom>
+        </p:spPr>
+      </p:pic>
+      <p:sp>
+        <p:nvSpPr>
+          <p:cNvPr id="10" name="nomor-karakter-1">
+            <a:extLst xmlns:a="http://schemas.openxmlformats.org/drawingml/2006/main">
+              <a:ext uri="{FF2B5EF4-FFF2-40B4-BE49-F238E27FC236}">
+                <a16:creationId xmlns:a16="http://schemas.microsoft.com/office/drawing/2014/main" id="{703B46CD-1D8C-478E-AA73-678D8FDBFA3A}"/>
+              </a:ext>
+            </a:extLst>
+          </p:cNvPr>
+          <p:cNvSpPr>
+            <a:spLocks xmlns:a="http://schemas.openxmlformats.org/drawingml/2006/main" noGrp="1"/>
+          </p:cNvSpPr>
+          <p:nvPr/>
+        </p:nvSpPr>
+        <p:spPr>
+          <a:xfrm xmlns:a="http://schemas.openxmlformats.org/drawingml/2006/main">
+            <a:off x="7000875" y="2952750"/>
+            <a:ext cx="666750" cy="257175"/>
+          </a:xfrm>
+          <a:prstGeom xmlns:a="http://schemas.openxmlformats.org/drawingml/2006/main" prst="rect">
+            <a:avLst/>
+          </a:prstGeom>
+          <a:noFill xmlns:a="http://schemas.openxmlformats.org/drawingml/2006/main"/>
+          <a:ln xmlns:a="http://schemas.openxmlformats.org/drawingml/2006/main" w="0">
+            <a:noFill/>
+            <a:prstDash val="solid"/>
+          </a:ln>
+        </p:spPr>
+        <p:txBody>
+          <a:bodyPr xmlns:a="http://schemas.openxmlformats.org/drawingml/2006/main" wrap="square" lIns="0" tIns="0" rIns="0" bIns="0" anchor="t">
+            <a:noAutofit/>
+          </a:bodyPr>
+          <a:lstStyle xmlns:a="http://schemas.openxmlformats.org/drawingml/2006/main">
+            <a:defPPr algn="ctr">
+              <a:defRPr sz="1575">
+                <a:solidFill>
+                  <a:srgbClr val="BCD0EB"/>
+                </a:solidFill>
+                <a:latin typeface="Arial"/>
+                <a:ea typeface="Arial"/>
+                <a:cs typeface="Arial"/>
+              </a:defRPr>
+            </a:defPPr>
+            <a:lvl1pPr algn="ctr">
+              <a:defRPr sz="1575">
+                <a:solidFill>
+                  <a:srgbClr val="BCD0EB"/>
+                </a:solidFill>
+                <a:latin typeface="Arial"/>
+                <a:ea typeface="Arial"/>
+                <a:cs typeface="Arial"/>
+              </a:defRPr>
+            </a:lvl1pPr>
+            <a:lvl2pPr algn="ctr">
+              <a:defRPr sz="1575">
+                <a:solidFill>
+                  <a:srgbClr val="BCD0EB"/>
+                </a:solidFill>
+                <a:latin typeface="Arial"/>
+                <a:ea typeface="Arial"/>
+                <a:cs typeface="Arial"/>
+              </a:defRPr>
+            </a:lvl2pPr>
+            <a:lvl3pPr algn="ctr">
+              <a:defRPr sz="1575">
+                <a:solidFill>
+                  <a:srgbClr val="BCD0EB"/>
+                </a:solidFill>
+                <a:latin typeface="Arial"/>
+                <a:ea typeface="Arial"/>
+                <a:cs typeface="Arial"/>
+              </a:defRPr>
+            </a:lvl3pPr>
+            <a:lvl4pPr algn="ctr">
+              <a:defRPr sz="1575">
+                <a:solidFill>
+                  <a:srgbClr val="BCD0EB"/>
+                </a:solidFill>
+                <a:latin typeface="Arial"/>
+                <a:ea typeface="Arial"/>
+                <a:cs typeface="Arial"/>
+              </a:defRPr>
+            </a:lvl4pPr>
+            <a:lvl5pPr algn="ctr">
+              <a:defRPr sz="1575">
+                <a:solidFill>
+                  <a:srgbClr val="BCD0EB"/>
+                </a:solidFill>
+                <a:latin typeface="Arial"/>
+                <a:ea typeface="Arial"/>
+                <a:cs typeface="Arial"/>
+              </a:defRPr>
+            </a:lvl5pPr>
+            <a:lvl6pPr algn="ctr">
+              <a:defRPr sz="1575">
+                <a:solidFill>
+                  <a:srgbClr val="BCD0EB"/>
+                </a:solidFill>
+                <a:latin typeface="Arial"/>
+                <a:ea typeface="Arial"/>
+                <a:cs typeface="Arial"/>
+              </a:defRPr>
+            </a:lvl6pPr>
+            <a:lvl7pPr algn="ctr">
+              <a:defRPr sz="1575">
+                <a:solidFill>
+                  <a:srgbClr val="BCD0EB"/>
+                </a:solidFill>
+                <a:latin typeface="Arial"/>
+                <a:ea typeface="Arial"/>
+                <a:cs typeface="Arial"/>
+              </a:defRPr>
+            </a:lvl7pPr>
+            <a:lvl8pPr algn="ctr">
+              <a:defRPr sz="1575">
+                <a:solidFill>
+                  <a:srgbClr val="BCD0EB"/>
+                </a:solidFill>
+                <a:latin typeface="Arial"/>
+                <a:ea typeface="Arial"/>
+                <a:cs typeface="Arial"/>
+              </a:defRPr>
+            </a:lvl8pPr>
+            <a:lvl9pPr algn="ctr">
+              <a:defRPr sz="1575">
+                <a:solidFill>
+                  <a:srgbClr val="BCD0EB"/>
+                </a:solidFill>
+                <a:latin typeface="Arial"/>
+                <a:ea typeface="Arial"/>
+                <a:cs typeface="Arial"/>
+              </a:defRPr>
+            </a:lvl9pPr>
+          </a:lstStyle>
+          <a:p xmlns:a="http://schemas.openxmlformats.org/drawingml/2006/main">
+            <a:pPr algn="ctr">
+              <a:defRPr sz="1575">
+                <a:solidFill>
+                  <a:srgbClr val="BCD0EB"/>
+                </a:solidFill>
+                <a:latin typeface="Arial"/>
+                <a:ea typeface="Arial"/>
+                <a:cs typeface="Arial"/>
+              </a:defRPr>
+            </a:pPr>
+            <a:r>
+              <a:rPr sz="1575">
+                <a:solidFill>
+                  <a:srgbClr val="BCD0EB"/>
+                </a:solidFill>
+                <a:latin typeface="Arial"/>
+                <a:ea typeface="Arial"/>
+                <a:cs typeface="Arial"/>
+              </a:rPr>
+              <a:t>02</a:t>
+            </a:r>
+          </a:p>
+        </p:txBody>
+      </p:sp>
+      <p:pic>
+        <p:nvPicPr>
+          <p:cNvPr id="11" name="">
+            <a:extLst xmlns:a="http://schemas.openxmlformats.org/drawingml/2006/main">
+              <a:ext uri="{FF2B5EF4-FFF2-40B4-BE49-F238E27FC236}">
+                <a16:creationId xmlns:a16="http://schemas.microsoft.com/office/drawing/2014/main" id="{CB2FB583-6CE3-4271-8E79-5D8AB2FF179D}"/>
+              </a:ext>
+            </a:extLst>
+          </p:cNvPr>
+          <p:cNvPicPr>
+            <a:picLocks xmlns:a="http://schemas.openxmlformats.org/drawingml/2006/main" noChangeAspect="1"/>
+          </p:cNvPicPr>
+          <p:nvPr/>
+        </p:nvPicPr>
+        <p:blipFill>
+          <a:blip xmlns:r="http://schemas.openxmlformats.org/officeDocument/2006/relationships" xmlns:a="http://schemas.openxmlformats.org/drawingml/2006/main" r:embed="Re093be12681f477e"/>
+          <a:stretch xmlns:a="http://schemas.openxmlformats.org/drawingml/2006/main"/>
+        </p:blipFill>
+        <p:spPr>
+          <a:xfrm xmlns:a="http://schemas.openxmlformats.org/drawingml/2006/main">
+            <a:off x="7950835" y="2266950"/>
+            <a:ext cx="595630" cy="638175"/>
+          </a:xfrm>
+          <a:prstGeom xmlns:a="http://schemas.openxmlformats.org/drawingml/2006/main" prst="rect">
+            <a:avLst/>
+          </a:prstGeom>
+        </p:spPr>
+      </p:pic>
+      <p:sp>
+        <p:nvSpPr>
+          <p:cNvPr id="12" name="nomor-karakter-2">
+            <a:extLst xmlns:a="http://schemas.openxmlformats.org/drawingml/2006/main">
+              <a:ext uri="{FF2B5EF4-FFF2-40B4-BE49-F238E27FC236}">
+                <a16:creationId xmlns:a16="http://schemas.microsoft.com/office/drawing/2014/main" id="{C94D84C1-3AFD-4682-B627-4369C79860DE}"/>
+              </a:ext>
+            </a:extLst>
+          </p:cNvPr>
+          <p:cNvSpPr>
+            <a:spLocks xmlns:a="http://schemas.openxmlformats.org/drawingml/2006/main" noGrp="1"/>
+          </p:cNvSpPr>
+          <p:nvPr/>
+        </p:nvSpPr>
+        <p:spPr>
+          <a:xfrm xmlns:a="http://schemas.openxmlformats.org/drawingml/2006/main">
+            <a:off x="7915275" y="2952750"/>
+            <a:ext cx="666750" cy="257175"/>
+          </a:xfrm>
+          <a:prstGeom xmlns:a="http://schemas.openxmlformats.org/drawingml/2006/main" prst="rect">
+            <a:avLst/>
+          </a:prstGeom>
+          <a:noFill xmlns:a="http://schemas.openxmlformats.org/drawingml/2006/main"/>
+          <a:ln xmlns:a="http://schemas.openxmlformats.org/drawingml/2006/main" w="0">
+            <a:noFill/>
+            <a:prstDash val="solid"/>
+          </a:ln>
+        </p:spPr>
+        <p:txBody>
+          <a:bodyPr xmlns:a="http://schemas.openxmlformats.org/drawingml/2006/main" wrap="square" lIns="0" tIns="0" rIns="0" bIns="0" anchor="t">
+            <a:noAutofit/>
+          </a:bodyPr>
+          <a:lstStyle xmlns:a="http://schemas.openxmlformats.org/drawingml/2006/main">
+            <a:defPPr algn="ctr">
+              <a:defRPr sz="1575">
+                <a:solidFill>
+                  <a:srgbClr val="BCD0EB"/>
+                </a:solidFill>
+                <a:latin typeface="Arial"/>
+                <a:ea typeface="Arial"/>
+                <a:cs typeface="Arial"/>
+              </a:defRPr>
+            </a:defPPr>
+            <a:lvl1pPr algn="ctr">
+              <a:defRPr sz="1575">
+                <a:solidFill>
+                  <a:srgbClr val="BCD0EB"/>
+                </a:solidFill>
+                <a:latin typeface="Arial"/>
+                <a:ea typeface="Arial"/>
+                <a:cs typeface="Arial"/>
+              </a:defRPr>
+            </a:lvl1pPr>
+            <a:lvl2pPr algn="ctr">
+              <a:defRPr sz="1575">
+                <a:solidFill>
+                  <a:srgbClr val="BCD0EB"/>
+                </a:solidFill>
+                <a:latin typeface="Arial"/>
+                <a:ea typeface="Arial"/>
+                <a:cs typeface="Arial"/>
+              </a:defRPr>
+            </a:lvl2pPr>
+            <a:lvl3pPr algn="ctr">
+              <a:defRPr sz="1575">
+                <a:solidFill>
+                  <a:srgbClr val="BCD0EB"/>
+                </a:solidFill>
+                <a:latin typeface="Arial"/>
+                <a:ea typeface="Arial"/>
+                <a:cs typeface="Arial"/>
+              </a:defRPr>
+            </a:lvl3pPr>
+            <a:lvl4pPr algn="ctr">
+              <a:defRPr sz="1575">
+                <a:solidFill>
+                  <a:srgbClr val="BCD0EB"/>
+                </a:solidFill>
+                <a:latin typeface="Arial"/>
+                <a:ea typeface="Arial"/>
+                <a:cs typeface="Arial"/>
+              </a:defRPr>
+            </a:lvl4pPr>
+            <a:lvl5pPr algn="ctr">
+              <a:defRPr sz="1575">
+                <a:solidFill>
+                  <a:srgbClr val="BCD0EB"/>
+                </a:solidFill>
+                <a:latin typeface="Arial"/>
+                <a:ea typeface="Arial"/>
+                <a:cs typeface="Arial"/>
+              </a:defRPr>
+            </a:lvl5pPr>
+            <a:lvl6pPr algn="ctr">
+              <a:defRPr sz="1575">
+                <a:solidFill>
+                  <a:srgbClr val="BCD0EB"/>
+                </a:solidFill>
+                <a:latin typeface="Arial"/>
+                <a:ea typeface="Arial"/>
+                <a:cs typeface="Arial"/>
+              </a:defRPr>
+            </a:lvl6pPr>
+            <a:lvl7pPr algn="ctr">
+              <a:defRPr sz="1575">
+                <a:solidFill>
+                  <a:srgbClr val="BCD0EB"/>
+                </a:solidFill>
+                <a:latin typeface="Arial"/>
+                <a:ea typeface="Arial"/>
+                <a:cs typeface="Arial"/>
+              </a:defRPr>
+            </a:lvl7pPr>
+            <a:lvl8pPr algn="ctr">
+              <a:defRPr sz="1575">
+                <a:solidFill>
+                  <a:srgbClr val="BCD0EB"/>
+                </a:solidFill>
+                <a:latin typeface="Arial"/>
+                <a:ea typeface="Arial"/>
+                <a:cs typeface="Arial"/>
+              </a:defRPr>
+            </a:lvl8pPr>
+            <a:lvl9pPr algn="ctr">
+              <a:defRPr sz="1575">
+                <a:solidFill>
+                  <a:srgbClr val="BCD0EB"/>
+                </a:solidFill>
+                <a:latin typeface="Arial"/>
+                <a:ea typeface="Arial"/>
+                <a:cs typeface="Arial"/>
+              </a:defRPr>
+            </a:lvl9pPr>
+          </a:lstStyle>
+          <a:p xmlns:a="http://schemas.openxmlformats.org/drawingml/2006/main">
+            <a:pPr algn="ctr">
+              <a:defRPr sz="1575">
+                <a:solidFill>
+                  <a:srgbClr val="BCD0EB"/>
+                </a:solidFill>
+                <a:latin typeface="Arial"/>
+                <a:ea typeface="Arial"/>
+                <a:cs typeface="Arial"/>
+              </a:defRPr>
+            </a:pPr>
+            <a:r>
+              <a:rPr sz="1575">
+                <a:solidFill>
+                  <a:srgbClr val="BCD0EB"/>
+                </a:solidFill>
+                <a:latin typeface="Arial"/>
+                <a:ea typeface="Arial"/>
+                <a:cs typeface="Arial"/>
+              </a:rPr>
+              <a:t>03</a:t>
+            </a:r>
+          </a:p>
+        </p:txBody>
+      </p:sp>
+      <p:pic>
+        <p:nvPicPr>
+          <p:cNvPr id="13" name="">
+            <a:extLst xmlns:a="http://schemas.openxmlformats.org/drawingml/2006/main">
+              <a:ext uri="{FF2B5EF4-FFF2-40B4-BE49-F238E27FC236}">
+                <a16:creationId xmlns:a16="http://schemas.microsoft.com/office/drawing/2014/main" id="{32731A24-A460-4F3C-A89A-982B918292B2}"/>
+              </a:ext>
+            </a:extLst>
+          </p:cNvPr>
+          <p:cNvPicPr>
+            <a:picLocks xmlns:a="http://schemas.openxmlformats.org/drawingml/2006/main" noChangeAspect="1"/>
+          </p:cNvPicPr>
+          <p:nvPr/>
+        </p:nvPicPr>
+        <p:blipFill>
+          <a:blip xmlns:r="http://schemas.openxmlformats.org/officeDocument/2006/relationships" xmlns:a="http://schemas.openxmlformats.org/drawingml/2006/main" r:embed="Rae18de7bd35a4912"/>
+          <a:stretch xmlns:a="http://schemas.openxmlformats.org/drawingml/2006/main"/>
+        </p:blipFill>
+        <p:spPr>
+          <a:xfrm xmlns:a="http://schemas.openxmlformats.org/drawingml/2006/main">
+            <a:off x="8843963" y="2266950"/>
+            <a:ext cx="638175" cy="638175"/>
+          </a:xfrm>
+          <a:prstGeom xmlns:a="http://schemas.openxmlformats.org/drawingml/2006/main" prst="rect">
+            <a:avLst/>
+          </a:prstGeom>
+        </p:spPr>
+      </p:pic>
+      <p:sp>
+        <p:nvSpPr>
+          <p:cNvPr id="14" name="nomor-karakter-3">
+            <a:extLst xmlns:a="http://schemas.openxmlformats.org/drawingml/2006/main">
+              <a:ext uri="{FF2B5EF4-FFF2-40B4-BE49-F238E27FC236}">
+                <a16:creationId xmlns:a16="http://schemas.microsoft.com/office/drawing/2014/main" id="{9B656524-F2EA-4D23-A35A-ED3DC19A3822}"/>
+              </a:ext>
+            </a:extLst>
+          </p:cNvPr>
+          <p:cNvSpPr>
+            <a:spLocks xmlns:a="http://schemas.openxmlformats.org/drawingml/2006/main" noGrp="1"/>
+          </p:cNvSpPr>
+          <p:nvPr/>
+        </p:nvSpPr>
+        <p:spPr>
+          <a:xfrm xmlns:a="http://schemas.openxmlformats.org/drawingml/2006/main">
+            <a:off x="8829675" y="2952750"/>
+            <a:ext cx="666750" cy="257175"/>
+          </a:xfrm>
+          <a:prstGeom xmlns:a="http://schemas.openxmlformats.org/drawingml/2006/main" prst="rect">
+            <a:avLst/>
+          </a:prstGeom>
+          <a:noFill xmlns:a="http://schemas.openxmlformats.org/drawingml/2006/main"/>
+          <a:ln xmlns:a="http://schemas.openxmlformats.org/drawingml/2006/main" w="0">
+            <a:noFill/>
+            <a:prstDash val="solid"/>
+          </a:ln>
+        </p:spPr>
+        <p:txBody>
+          <a:bodyPr xmlns:a="http://schemas.openxmlformats.org/drawingml/2006/main" wrap="square" lIns="0" tIns="0" rIns="0" bIns="0" anchor="t">
+            <a:noAutofit/>
+          </a:bodyPr>
+          <a:lstStyle xmlns:a="http://schemas.openxmlformats.org/drawingml/2006/main">
+            <a:defPPr algn="ctr">
+              <a:defRPr sz="1575">
+                <a:solidFill>
+                  <a:srgbClr val="BCD0EB"/>
+                </a:solidFill>
+                <a:latin typeface="Arial"/>
+                <a:ea typeface="Arial"/>
+                <a:cs typeface="Arial"/>
+              </a:defRPr>
+            </a:defPPr>
+            <a:lvl1pPr algn="ctr">
+              <a:defRPr sz="1575">
+                <a:solidFill>
+                  <a:srgbClr val="BCD0EB"/>
+                </a:solidFill>
+                <a:latin typeface="Arial"/>
+                <a:ea typeface="Arial"/>
+                <a:cs typeface="Arial"/>
+              </a:defRPr>
+            </a:lvl1pPr>
+            <a:lvl2pPr algn="ctr">
+              <a:defRPr sz="1575">
+                <a:solidFill>
+                  <a:srgbClr val="BCD0EB"/>
+                </a:solidFill>
+                <a:latin typeface="Arial"/>
+                <a:ea typeface="Arial"/>
+                <a:cs typeface="Arial"/>
+              </a:defRPr>
+            </a:lvl2pPr>
+            <a:lvl3pPr algn="ctr">
+              <a:defRPr sz="1575">
+                <a:solidFill>
+                  <a:srgbClr val="BCD0EB"/>
+                </a:solidFill>
+                <a:latin typeface="Arial"/>
+                <a:ea typeface="Arial"/>
+                <a:cs typeface="Arial"/>
+              </a:defRPr>
+            </a:lvl3pPr>
+            <a:lvl4pPr algn="ctr">
+              <a:defRPr sz="1575">
+                <a:solidFill>
+                  <a:srgbClr val="BCD0EB"/>
+                </a:solidFill>
+                <a:latin typeface="Arial"/>
+                <a:ea typeface="Arial"/>
+                <a:cs typeface="Arial"/>
+              </a:defRPr>
+            </a:lvl4pPr>
+            <a:lvl5pPr algn="ctr">
+              <a:defRPr sz="1575">
+                <a:solidFill>
+                  <a:srgbClr val="BCD0EB"/>
+                </a:solidFill>
+                <a:latin typeface="Arial"/>
+                <a:ea typeface="Arial"/>
+                <a:cs typeface="Arial"/>
+              </a:defRPr>
+            </a:lvl5pPr>
+            <a:lvl6pPr algn="ctr">
+              <a:defRPr sz="1575">
+                <a:solidFill>
+                  <a:srgbClr val="BCD0EB"/>
+                </a:solidFill>
+                <a:latin typeface="Arial"/>
+                <a:ea typeface="Arial"/>
+                <a:cs typeface="Arial"/>
+              </a:defRPr>
+            </a:lvl6pPr>
+            <a:lvl7pPr algn="ctr">
+              <a:defRPr sz="1575">
+                <a:solidFill>
+                  <a:srgbClr val="BCD0EB"/>
+                </a:solidFill>
+                <a:latin typeface="Arial"/>
+                <a:ea typeface="Arial"/>
+                <a:cs typeface="Arial"/>
+              </a:defRPr>
+            </a:lvl7pPr>
+            <a:lvl8pPr algn="ctr">
+              <a:defRPr sz="1575">
+                <a:solidFill>
+                  <a:srgbClr val="BCD0EB"/>
+                </a:solidFill>
+                <a:latin typeface="Arial"/>
+                <a:ea typeface="Arial"/>
+                <a:cs typeface="Arial"/>
+              </a:defRPr>
+            </a:lvl8pPr>
+            <a:lvl9pPr algn="ctr">
+              <a:defRPr sz="1575">
+                <a:solidFill>
+                  <a:srgbClr val="BCD0EB"/>
+                </a:solidFill>
+                <a:latin typeface="Arial"/>
+                <a:ea typeface="Arial"/>
+                <a:cs typeface="Arial"/>
+              </a:defRPr>
+            </a:lvl9pPr>
+          </a:lstStyle>
+          <a:p xmlns:a="http://schemas.openxmlformats.org/drawingml/2006/main">
+            <a:pPr algn="ctr">
+              <a:defRPr sz="1575">
+                <a:solidFill>
+                  <a:srgbClr val="BCD0EB"/>
+                </a:solidFill>
+                <a:latin typeface="Arial"/>
+                <a:ea typeface="Arial"/>
+                <a:cs typeface="Arial"/>
+              </a:defRPr>
+            </a:pPr>
+            <a:r>
+              <a:rPr sz="1575">
+                <a:solidFill>
+                  <a:srgbClr val="BCD0EB"/>
+                </a:solidFill>
+                <a:latin typeface="Arial"/>
+                <a:ea typeface="Arial"/>
+                <a:cs typeface="Arial"/>
+              </a:rPr>
+              <a:t>04</a:t>
+            </a:r>
+          </a:p>
+        </p:txBody>
+      </p:sp>
+      <p:pic>
+        <p:nvPicPr>
+          <p:cNvPr id="15" name="">
+            <a:extLst xmlns:a="http://schemas.openxmlformats.org/drawingml/2006/main">
+              <a:ext uri="{FF2B5EF4-FFF2-40B4-BE49-F238E27FC236}">
+                <a16:creationId xmlns:a16="http://schemas.microsoft.com/office/drawing/2014/main" id="{6C2A2042-5D9B-409B-94EF-CFE780EA9980}"/>
+              </a:ext>
+            </a:extLst>
+          </p:cNvPr>
+          <p:cNvPicPr>
+            <a:picLocks xmlns:a="http://schemas.openxmlformats.org/drawingml/2006/main" noChangeAspect="1"/>
+          </p:cNvPicPr>
+          <p:nvPr/>
+        </p:nvPicPr>
+        <p:blipFill>
+          <a:blip xmlns:r="http://schemas.openxmlformats.org/officeDocument/2006/relationships" xmlns:a="http://schemas.openxmlformats.org/drawingml/2006/main" r:embed="Rf6f0729b0f734959"/>
+          <a:stretch xmlns:a="http://schemas.openxmlformats.org/drawingml/2006/main"/>
+        </p:blipFill>
+        <p:spPr>
+          <a:xfrm xmlns:a="http://schemas.openxmlformats.org/drawingml/2006/main">
+            <a:off x="9815342" y="2266950"/>
+            <a:ext cx="524215" cy="638175"/>
+          </a:xfrm>
+          <a:prstGeom xmlns:a="http://schemas.openxmlformats.org/drawingml/2006/main" prst="rect">
+            <a:avLst/>
+          </a:prstGeom>
+        </p:spPr>
+      </p:pic>
+      <p:sp>
+        <p:nvSpPr>
+          <p:cNvPr id="16" name="nomor-karakter-4">
+            <a:extLst xmlns:a="http://schemas.openxmlformats.org/drawingml/2006/main">
+              <a:ext uri="{FF2B5EF4-FFF2-40B4-BE49-F238E27FC236}">
+                <a16:creationId xmlns:a16="http://schemas.microsoft.com/office/drawing/2014/main" id="{CF70CF6F-23CA-458A-A1C3-66680CD5A496}"/>
+              </a:ext>
+            </a:extLst>
+          </p:cNvPr>
+          <p:cNvSpPr>
+            <a:spLocks xmlns:a="http://schemas.openxmlformats.org/drawingml/2006/main" noGrp="1"/>
+          </p:cNvSpPr>
+          <p:nvPr/>
+        </p:nvSpPr>
+        <p:spPr>
+          <a:xfrm xmlns:a="http://schemas.openxmlformats.org/drawingml/2006/main">
+            <a:off x="9744075" y="2952750"/>
+            <a:ext cx="666750" cy="257175"/>
+          </a:xfrm>
+          <a:prstGeom xmlns:a="http://schemas.openxmlformats.org/drawingml/2006/main" prst="rect">
+            <a:avLst/>
+          </a:prstGeom>
+          <a:noFill xmlns:a="http://schemas.openxmlformats.org/drawingml/2006/main"/>
+          <a:ln xmlns:a="http://schemas.openxmlformats.org/drawingml/2006/main" w="0">
+            <a:noFill/>
+            <a:prstDash val="solid"/>
+          </a:ln>
+        </p:spPr>
+        <p:txBody>
+          <a:bodyPr xmlns:a="http://schemas.openxmlformats.org/drawingml/2006/main" wrap="square" lIns="0" tIns="0" rIns="0" bIns="0" anchor="t">
+            <a:noAutofit/>
+          </a:bodyPr>
+          <a:lstStyle xmlns:a="http://schemas.openxmlformats.org/drawingml/2006/main">
+            <a:defPPr algn="ctr">
+              <a:defRPr sz="1575">
+                <a:solidFill>
+                  <a:srgbClr val="BCD0EB"/>
+                </a:solidFill>
+                <a:latin typeface="Arial"/>
+                <a:ea typeface="Arial"/>
+                <a:cs typeface="Arial"/>
+              </a:defRPr>
+            </a:defPPr>
+            <a:lvl1pPr algn="ctr">
+              <a:defRPr sz="1575">
+                <a:solidFill>
+                  <a:srgbClr val="BCD0EB"/>
+                </a:solidFill>
+                <a:latin typeface="Arial"/>
+                <a:ea typeface="Arial"/>
+                <a:cs typeface="Arial"/>
+              </a:defRPr>
+            </a:lvl1pPr>
+            <a:lvl2pPr algn="ctr">
+              <a:defRPr sz="1575">
+                <a:solidFill>
+                  <a:srgbClr val="BCD0EB"/>
+                </a:solidFill>
+                <a:latin typeface="Arial"/>
+                <a:ea typeface="Arial"/>
+                <a:cs typeface="Arial"/>
+              </a:defRPr>
+            </a:lvl2pPr>
+            <a:lvl3pPr algn="ctr">
+              <a:defRPr sz="1575">
+                <a:solidFill>
+                  <a:srgbClr val="BCD0EB"/>
+                </a:solidFill>
+                <a:latin typeface="Arial"/>
+                <a:ea typeface="Arial"/>
+                <a:cs typeface="Arial"/>
+              </a:defRPr>
+            </a:lvl3pPr>
+            <a:lvl4pPr algn="ctr">
+              <a:defRPr sz="1575">
+                <a:solidFill>
+                  <a:srgbClr val="BCD0EB"/>
+                </a:solidFill>
+                <a:latin typeface="Arial"/>
+                <a:ea typeface="Arial"/>
+                <a:cs typeface="Arial"/>
+              </a:defRPr>
+            </a:lvl4pPr>
+            <a:lvl5pPr algn="ctr">
+              <a:defRPr sz="1575">
+                <a:solidFill>
+                  <a:srgbClr val="BCD0EB"/>
+                </a:solidFill>
+                <a:latin typeface="Arial"/>
+                <a:ea typeface="Arial"/>
+                <a:cs typeface="Arial"/>
+              </a:defRPr>
+            </a:lvl5pPr>
+            <a:lvl6pPr algn="ctr">
+              <a:defRPr sz="1575">
+                <a:solidFill>
+                  <a:srgbClr val="BCD0EB"/>
+                </a:solidFill>
+                <a:latin typeface="Arial"/>
+                <a:ea typeface="Arial"/>
+                <a:cs typeface="Arial"/>
+              </a:defRPr>
+            </a:lvl6pPr>
+            <a:lvl7pPr algn="ctr">
+              <a:defRPr sz="1575">
+                <a:solidFill>
+                  <a:srgbClr val="BCD0EB"/>
+                </a:solidFill>
+                <a:latin typeface="Arial"/>
+                <a:ea typeface="Arial"/>
+                <a:cs typeface="Arial"/>
+              </a:defRPr>
+            </a:lvl7pPr>
+            <a:lvl8pPr algn="ctr">
+              <a:defRPr sz="1575">
+                <a:solidFill>
+                  <a:srgbClr val="BCD0EB"/>
+                </a:solidFill>
+                <a:latin typeface="Arial"/>
+                <a:ea typeface="Arial"/>
+                <a:cs typeface="Arial"/>
+              </a:defRPr>
+            </a:lvl8pPr>
+            <a:lvl9pPr algn="ctr">
+              <a:defRPr sz="1575">
+                <a:solidFill>
+                  <a:srgbClr val="BCD0EB"/>
+                </a:solidFill>
+                <a:latin typeface="Arial"/>
+                <a:ea typeface="Arial"/>
+                <a:cs typeface="Arial"/>
+              </a:defRPr>
+            </a:lvl9pPr>
+          </a:lstStyle>
+          <a:p xmlns:a="http://schemas.openxmlformats.org/drawingml/2006/main">
+            <a:pPr algn="ctr">
+              <a:defRPr sz="1575">
+                <a:solidFill>
+                  <a:srgbClr val="BCD0EB"/>
+                </a:solidFill>
+                <a:latin typeface="Arial"/>
+                <a:ea typeface="Arial"/>
+                <a:cs typeface="Arial"/>
+              </a:defRPr>
+            </a:pPr>
+            <a:r>
+              <a:rPr sz="1575">
+                <a:solidFill>
+                  <a:srgbClr val="BCD0EB"/>
+                </a:solidFill>
+                <a:latin typeface="Arial"/>
+                <a:ea typeface="Arial"/>
+                <a:cs typeface="Arial"/>
+              </a:rPr>
+              <a:t>05</a:t>
+            </a:r>
+          </a:p>
+        </p:txBody>
+      </p:sp>
+      <p:pic>
+        <p:nvPicPr>
+          <p:cNvPr id="17" name="">
+            <a:extLst xmlns:a="http://schemas.openxmlformats.org/drawingml/2006/main">
+              <a:ext uri="{FF2B5EF4-FFF2-40B4-BE49-F238E27FC236}">
+                <a16:creationId xmlns:a16="http://schemas.microsoft.com/office/drawing/2014/main" id="{22D8D93C-3042-403B-909D-1E0EF112289C}"/>
+              </a:ext>
+            </a:extLst>
+          </p:cNvPr>
+          <p:cNvPicPr>
+            <a:picLocks xmlns:a="http://schemas.openxmlformats.org/drawingml/2006/main" noChangeAspect="1"/>
+          </p:cNvPicPr>
+          <p:nvPr/>
+        </p:nvPicPr>
+        <p:blipFill>
+          <a:blip xmlns:r="http://schemas.openxmlformats.org/officeDocument/2006/relationships" xmlns:a="http://schemas.openxmlformats.org/drawingml/2006/main" r:embed="R88ffa644a3a143f4"/>
+          <a:stretch xmlns:a="http://schemas.openxmlformats.org/drawingml/2006/main"/>
+        </p:blipFill>
+        <p:spPr>
+          <a:xfrm xmlns:a="http://schemas.openxmlformats.org/drawingml/2006/main">
+            <a:off x="10658475" y="2311493"/>
+            <a:ext cx="666750" cy="549088"/>
+          </a:xfrm>
+          <a:prstGeom xmlns:a="http://schemas.openxmlformats.org/drawingml/2006/main" prst="rect">
+            <a:avLst/>
+          </a:prstGeom>
+        </p:spPr>
+      </p:pic>
+      <p:sp>
+        <p:nvSpPr>
+          <p:cNvPr id="18" name="nomor-karakter-5">
+            <a:extLst xmlns:a="http://schemas.openxmlformats.org/drawingml/2006/main">
+              <a:ext uri="{FF2B5EF4-FFF2-40B4-BE49-F238E27FC236}">
+                <a16:creationId xmlns:a16="http://schemas.microsoft.com/office/drawing/2014/main" id="{5BC63974-2ED6-4634-8271-DAFD78C84818}"/>
+              </a:ext>
+            </a:extLst>
+          </p:cNvPr>
+          <p:cNvSpPr>
+            <a:spLocks xmlns:a="http://schemas.openxmlformats.org/drawingml/2006/main" noGrp="1"/>
+          </p:cNvSpPr>
+          <p:nvPr/>
+        </p:nvSpPr>
+        <p:spPr>
+          <a:xfrm xmlns:a="http://schemas.openxmlformats.org/drawingml/2006/main">
+            <a:off x="10658475" y="2952750"/>
+            <a:ext cx="666750" cy="257175"/>
+          </a:xfrm>
+          <a:prstGeom xmlns:a="http://schemas.openxmlformats.org/drawingml/2006/main" prst="rect">
+            <a:avLst/>
+          </a:prstGeom>
+          <a:noFill xmlns:a="http://schemas.openxmlformats.org/drawingml/2006/main"/>
+          <a:ln xmlns:a="http://schemas.openxmlformats.org/drawingml/2006/main" w="0">
+            <a:noFill/>
+            <a:prstDash val="solid"/>
+          </a:ln>
+        </p:spPr>
+        <p:txBody>
+          <a:bodyPr xmlns:a="http://schemas.openxmlformats.org/drawingml/2006/main" wrap="square" lIns="0" tIns="0" rIns="0" bIns="0" anchor="t">
+            <a:noAutofit/>
+          </a:bodyPr>
+          <a:lstStyle xmlns:a="http://schemas.openxmlformats.org/drawingml/2006/main">
+            <a:defPPr algn="ctr">
+              <a:defRPr sz="1575">
+                <a:solidFill>
+                  <a:srgbClr val="BCD0EB"/>
+                </a:solidFill>
+                <a:latin typeface="Arial"/>
+                <a:ea typeface="Arial"/>
+                <a:cs typeface="Arial"/>
+              </a:defRPr>
+            </a:defPPr>
+            <a:lvl1pPr algn="ctr">
+              <a:defRPr sz="1575">
+                <a:solidFill>
+                  <a:srgbClr val="BCD0EB"/>
+                </a:solidFill>
+                <a:latin typeface="Arial"/>
+                <a:ea typeface="Arial"/>
+                <a:cs typeface="Arial"/>
+              </a:defRPr>
+            </a:lvl1pPr>
+            <a:lvl2pPr algn="ctr">
+              <a:defRPr sz="1575">
+                <a:solidFill>
+                  <a:srgbClr val="BCD0EB"/>
+                </a:solidFill>
+                <a:latin typeface="Arial"/>
+                <a:ea typeface="Arial"/>
+                <a:cs typeface="Arial"/>
+              </a:defRPr>
+            </a:lvl2pPr>
+            <a:lvl3pPr algn="ctr">
+              <a:defRPr sz="1575">
+                <a:solidFill>
+                  <a:srgbClr val="BCD0EB"/>
+                </a:solidFill>
+                <a:latin typeface="Arial"/>
+                <a:ea typeface="Arial"/>
+                <a:cs typeface="Arial"/>
+              </a:defRPr>
+            </a:lvl3pPr>
+            <a:lvl4pPr algn="ctr">
+              <a:defRPr sz="1575">
+                <a:solidFill>
+                  <a:srgbClr val="BCD0EB"/>
+                </a:solidFill>
+                <a:latin typeface="Arial"/>
+                <a:ea typeface="Arial"/>
+                <a:cs typeface="Arial"/>
+              </a:defRPr>
+            </a:lvl4pPr>
+            <a:lvl5pPr algn="ctr">
+              <a:defRPr sz="1575">
+                <a:solidFill>
+                  <a:srgbClr val="BCD0EB"/>
+                </a:solidFill>
+                <a:latin typeface="Arial"/>
+                <a:ea typeface="Arial"/>
+                <a:cs typeface="Arial"/>
+              </a:defRPr>
+            </a:lvl5pPr>
+            <a:lvl6pPr algn="ctr">
+              <a:defRPr sz="1575">
+                <a:solidFill>
+                  <a:srgbClr val="BCD0EB"/>
+                </a:solidFill>
+                <a:latin typeface="Arial"/>
+                <a:ea typeface="Arial"/>
+                <a:cs typeface="Arial"/>
+              </a:defRPr>
+            </a:lvl6pPr>
+            <a:lvl7pPr algn="ctr">
+              <a:defRPr sz="1575">
+                <a:solidFill>
+                  <a:srgbClr val="BCD0EB"/>
+                </a:solidFill>
+                <a:latin typeface="Arial"/>
+                <a:ea typeface="Arial"/>
+                <a:cs typeface="Arial"/>
+              </a:defRPr>
+            </a:lvl7pPr>
+            <a:lvl8pPr algn="ctr">
+              <a:defRPr sz="1575">
+                <a:solidFill>
+                  <a:srgbClr val="BCD0EB"/>
+                </a:solidFill>
+                <a:latin typeface="Arial"/>
+                <a:ea typeface="Arial"/>
+                <a:cs typeface="Arial"/>
+              </a:defRPr>
+            </a:lvl8pPr>
+            <a:lvl9pPr algn="ctr">
+              <a:defRPr sz="1575">
+                <a:solidFill>
+                  <a:srgbClr val="BCD0EB"/>
+                </a:solidFill>
+                <a:latin typeface="Arial"/>
+                <a:ea typeface="Arial"/>
+                <a:cs typeface="Arial"/>
+              </a:defRPr>
+            </a:lvl9pPr>
+          </a:lstStyle>
+          <a:p xmlns:a="http://schemas.openxmlformats.org/drawingml/2006/main">
+            <a:pPr algn="ctr">
+              <a:defRPr sz="1575">
+                <a:solidFill>
+                  <a:srgbClr val="BCD0EB"/>
+                </a:solidFill>
+                <a:latin typeface="Arial"/>
+                <a:ea typeface="Arial"/>
+                <a:cs typeface="Arial"/>
+              </a:defRPr>
+            </a:pPr>
+            <a:r>
+              <a:rPr sz="1575">
+                <a:solidFill>
+                  <a:srgbClr val="BCD0EB"/>
+                </a:solidFill>
+                <a:latin typeface="Arial"/>
+                <a:ea typeface="Arial"/>
+                <a:cs typeface="Arial"/>
+              </a:rPr>
+              <a:t>06</a:t>
+            </a:r>
+          </a:p>
+        </p:txBody>
+      </p:sp>
+      <p:pic>
+        <p:nvPicPr>
+          <p:cNvPr id="19" name="">
+            <a:extLst xmlns:a="http://schemas.openxmlformats.org/drawingml/2006/main">
+              <a:ext uri="{FF2B5EF4-FFF2-40B4-BE49-F238E27FC236}">
+                <a16:creationId xmlns:a16="http://schemas.microsoft.com/office/drawing/2014/main" id="{46F0D1B7-6BEF-43D5-A8A7-EA930E8B0980}"/>
+              </a:ext>
+            </a:extLst>
+          </p:cNvPr>
+          <p:cNvPicPr>
+            <a:picLocks xmlns:a="http://schemas.openxmlformats.org/drawingml/2006/main" noChangeAspect="1"/>
+          </p:cNvPicPr>
+          <p:nvPr/>
+        </p:nvPicPr>
+        <p:blipFill>
+          <a:blip xmlns:r="http://schemas.openxmlformats.org/officeDocument/2006/relationships" xmlns:a="http://schemas.openxmlformats.org/drawingml/2006/main" r:embed="R358f46be9dbf447b"/>
+          <a:stretch xmlns:a="http://schemas.openxmlformats.org/drawingml/2006/main"/>
+        </p:blipFill>
+        <p:spPr>
+          <a:xfrm xmlns:a="http://schemas.openxmlformats.org/drawingml/2006/main">
+            <a:off x="6248034" y="3400425"/>
+            <a:ext cx="343633" cy="638175"/>
+          </a:xfrm>
+          <a:prstGeom xmlns:a="http://schemas.openxmlformats.org/drawingml/2006/main" prst="rect">
+            <a:avLst/>
+          </a:prstGeom>
+        </p:spPr>
+      </p:pic>
+      <p:sp>
+        <p:nvSpPr>
+          <p:cNvPr id="20" name="nomor-karakter-6">
+            <a:extLst xmlns:a="http://schemas.openxmlformats.org/drawingml/2006/main">
+              <a:ext uri="{FF2B5EF4-FFF2-40B4-BE49-F238E27FC236}">
+                <a16:creationId xmlns:a16="http://schemas.microsoft.com/office/drawing/2014/main" id="{5CD26218-4821-4E6D-A542-D605F44D9943}"/>
+              </a:ext>
+            </a:extLst>
+          </p:cNvPr>
+          <p:cNvSpPr>
+            <a:spLocks xmlns:a="http://schemas.openxmlformats.org/drawingml/2006/main" noGrp="1"/>
+          </p:cNvSpPr>
+          <p:nvPr/>
+        </p:nvSpPr>
+        <p:spPr>
+          <a:xfrm xmlns:a="http://schemas.openxmlformats.org/drawingml/2006/main">
+            <a:off x="6086475" y="4086225"/>
+            <a:ext cx="666750" cy="257175"/>
+          </a:xfrm>
+          <a:prstGeom xmlns:a="http://schemas.openxmlformats.org/drawingml/2006/main" prst="rect">
+            <a:avLst/>
+          </a:prstGeom>
+          <a:noFill xmlns:a="http://schemas.openxmlformats.org/drawingml/2006/main"/>
+          <a:ln xmlns:a="http://schemas.openxmlformats.org/drawingml/2006/main" w="0">
+            <a:noFill/>
+            <a:prstDash val="solid"/>
+          </a:ln>
+        </p:spPr>
+        <p:txBody>
+          <a:bodyPr xmlns:a="http://schemas.openxmlformats.org/drawingml/2006/main" wrap="square" lIns="0" tIns="0" rIns="0" bIns="0" anchor="t">
+            <a:noAutofit/>
+          </a:bodyPr>
+          <a:lstStyle xmlns:a="http://schemas.openxmlformats.org/drawingml/2006/main">
+            <a:defPPr algn="ctr">
+              <a:defRPr sz="1575">
+                <a:solidFill>
+                  <a:srgbClr val="BCD0EB"/>
+                </a:solidFill>
+                <a:latin typeface="Arial"/>
+                <a:ea typeface="Arial"/>
+                <a:cs typeface="Arial"/>
+              </a:defRPr>
+            </a:defPPr>
+            <a:lvl1pPr algn="ctr">
+              <a:defRPr sz="1575">
+                <a:solidFill>
+                  <a:srgbClr val="BCD0EB"/>
+                </a:solidFill>
+                <a:latin typeface="Arial"/>
+                <a:ea typeface="Arial"/>
+                <a:cs typeface="Arial"/>
+              </a:defRPr>
+            </a:lvl1pPr>
+            <a:lvl2pPr algn="ctr">
+              <a:defRPr sz="1575">
+                <a:solidFill>
+                  <a:srgbClr val="BCD0EB"/>
+                </a:solidFill>
+                <a:latin typeface="Arial"/>
+                <a:ea typeface="Arial"/>
+                <a:cs typeface="Arial"/>
+              </a:defRPr>
+            </a:lvl2pPr>
+            <a:lvl3pPr algn="ctr">
+              <a:defRPr sz="1575">
+                <a:solidFill>
+                  <a:srgbClr val="BCD0EB"/>
+                </a:solidFill>
+                <a:latin typeface="Arial"/>
+                <a:ea typeface="Arial"/>
+                <a:cs typeface="Arial"/>
+              </a:defRPr>
+            </a:lvl3pPr>
+            <a:lvl4pPr algn="ctr">
+              <a:defRPr sz="1575">
+                <a:solidFill>
+                  <a:srgbClr val="BCD0EB"/>
+                </a:solidFill>
+                <a:latin typeface="Arial"/>
+                <a:ea typeface="Arial"/>
+                <a:cs typeface="Arial"/>
+              </a:defRPr>
+            </a:lvl4pPr>
+            <a:lvl5pPr algn="ctr">
+              <a:defRPr sz="1575">
+                <a:solidFill>
+                  <a:srgbClr val="BCD0EB"/>
+                </a:solidFill>
+                <a:latin typeface="Arial"/>
+                <a:ea typeface="Arial"/>
+                <a:cs typeface="Arial"/>
+              </a:defRPr>
+            </a:lvl5pPr>
+            <a:lvl6pPr algn="ctr">
+              <a:defRPr sz="1575">
+                <a:solidFill>
+                  <a:srgbClr val="BCD0EB"/>
+                </a:solidFill>
+                <a:latin typeface="Arial"/>
+                <a:ea typeface="Arial"/>
+                <a:cs typeface="Arial"/>
+              </a:defRPr>
+            </a:lvl6pPr>
+            <a:lvl7pPr algn="ctr">
+              <a:defRPr sz="1575">
+                <a:solidFill>
+                  <a:srgbClr val="BCD0EB"/>
+                </a:solidFill>
+                <a:latin typeface="Arial"/>
+                <a:ea typeface="Arial"/>
+                <a:cs typeface="Arial"/>
+              </a:defRPr>
+            </a:lvl7pPr>
+            <a:lvl8pPr algn="ctr">
+              <a:defRPr sz="1575">
+                <a:solidFill>
+                  <a:srgbClr val="BCD0EB"/>
+                </a:solidFill>
+                <a:latin typeface="Arial"/>
+                <a:ea typeface="Arial"/>
+                <a:cs typeface="Arial"/>
+              </a:defRPr>
+            </a:lvl8pPr>
+            <a:lvl9pPr algn="ctr">
+              <a:defRPr sz="1575">
+                <a:solidFill>
+                  <a:srgbClr val="BCD0EB"/>
+                </a:solidFill>
+                <a:latin typeface="Arial"/>
+                <a:ea typeface="Arial"/>
+                <a:cs typeface="Arial"/>
+              </a:defRPr>
+            </a:lvl9pPr>
+          </a:lstStyle>
+          <a:p xmlns:a="http://schemas.openxmlformats.org/drawingml/2006/main">
+            <a:pPr algn="ctr">
+              <a:defRPr sz="1575">
+                <a:solidFill>
+                  <a:srgbClr val="BCD0EB"/>
+                </a:solidFill>
+                <a:latin typeface="Arial"/>
+                <a:ea typeface="Arial"/>
+                <a:cs typeface="Arial"/>
+              </a:defRPr>
+            </a:pPr>
+            <a:r>
+              <a:rPr sz="1575">
+                <a:solidFill>
+                  <a:srgbClr val="BCD0EB"/>
+                </a:solidFill>
+                <a:latin typeface="Arial"/>
+                <a:ea typeface="Arial"/>
+                <a:cs typeface="Arial"/>
+              </a:rPr>
+              <a:t>07</a:t>
+            </a:r>
+          </a:p>
+        </p:txBody>
+      </p:sp>
+      <p:pic>
+        <p:nvPicPr>
+          <p:cNvPr id="21" name="">
+            <a:extLst xmlns:a="http://schemas.openxmlformats.org/drawingml/2006/main">
+              <a:ext uri="{FF2B5EF4-FFF2-40B4-BE49-F238E27FC236}">
+                <a16:creationId xmlns:a16="http://schemas.microsoft.com/office/drawing/2014/main" id="{E3EF308D-A3BA-4461-99CF-298189ADE3A5}"/>
+              </a:ext>
+            </a:extLst>
+          </p:cNvPr>
+          <p:cNvPicPr>
+            <a:picLocks xmlns:a="http://schemas.openxmlformats.org/drawingml/2006/main" noChangeAspect="1"/>
+          </p:cNvPicPr>
+          <p:nvPr/>
+        </p:nvPicPr>
+        <p:blipFill>
+          <a:blip xmlns:r="http://schemas.openxmlformats.org/officeDocument/2006/relationships" xmlns:a="http://schemas.openxmlformats.org/drawingml/2006/main" r:embed="R88f3b4acc5d7483d"/>
+          <a:stretch xmlns:a="http://schemas.openxmlformats.org/drawingml/2006/main"/>
+        </p:blipFill>
+        <p:spPr>
+          <a:xfrm xmlns:a="http://schemas.openxmlformats.org/drawingml/2006/main">
+            <a:off x="7078980" y="3400425"/>
+            <a:ext cx="510540" cy="638175"/>
+          </a:xfrm>
+          <a:prstGeom xmlns:a="http://schemas.openxmlformats.org/drawingml/2006/main" prst="rect">
+            <a:avLst/>
+          </a:prstGeom>
+        </p:spPr>
+      </p:pic>
+      <p:sp>
+        <p:nvSpPr>
+          <p:cNvPr id="22" name="nomor-karakter-7">
+            <a:extLst xmlns:a="http://schemas.openxmlformats.org/drawingml/2006/main">
+              <a:ext uri="{FF2B5EF4-FFF2-40B4-BE49-F238E27FC236}">
+                <a16:creationId xmlns:a16="http://schemas.microsoft.com/office/drawing/2014/main" id="{F849EC2D-2C21-44B8-AC50-D6B38F73E14E}"/>
+              </a:ext>
+            </a:extLst>
+          </p:cNvPr>
+          <p:cNvSpPr>
+            <a:spLocks xmlns:a="http://schemas.openxmlformats.org/drawingml/2006/main" noGrp="1"/>
+          </p:cNvSpPr>
+          <p:nvPr/>
+        </p:nvSpPr>
+        <p:spPr>
+          <a:xfrm xmlns:a="http://schemas.openxmlformats.org/drawingml/2006/main">
+            <a:off x="7000875" y="4086225"/>
+            <a:ext cx="666750" cy="257175"/>
+          </a:xfrm>
+          <a:prstGeom xmlns:a="http://schemas.openxmlformats.org/drawingml/2006/main" prst="rect">
+            <a:avLst/>
+          </a:prstGeom>
+          <a:noFill xmlns:a="http://schemas.openxmlformats.org/drawingml/2006/main"/>
+          <a:ln xmlns:a="http://schemas.openxmlformats.org/drawingml/2006/main" w="0">
+            <a:noFill/>
+            <a:prstDash val="solid"/>
+          </a:ln>
+        </p:spPr>
+        <p:txBody>
+          <a:bodyPr xmlns:a="http://schemas.openxmlformats.org/drawingml/2006/main" wrap="square" lIns="0" tIns="0" rIns="0" bIns="0" anchor="t">
+            <a:noAutofit/>
+          </a:bodyPr>
+          <a:lstStyle xmlns:a="http://schemas.openxmlformats.org/drawingml/2006/main">
+            <a:defPPr algn="ctr">
+              <a:defRPr sz="1575">
+                <a:solidFill>
+                  <a:srgbClr val="BCD0EB"/>
+                </a:solidFill>
+                <a:latin typeface="Arial"/>
+                <a:ea typeface="Arial"/>
+                <a:cs typeface="Arial"/>
+              </a:defRPr>
+            </a:defPPr>
+            <a:lvl1pPr algn="ctr">
+              <a:defRPr sz="1575">
+                <a:solidFill>
+                  <a:srgbClr val="BCD0EB"/>
+                </a:solidFill>
+                <a:latin typeface="Arial"/>
+                <a:ea typeface="Arial"/>
+                <a:cs typeface="Arial"/>
+              </a:defRPr>
+            </a:lvl1pPr>
+            <a:lvl2pPr algn="ctr">
+              <a:defRPr sz="1575">
+                <a:solidFill>
+                  <a:srgbClr val="BCD0EB"/>
+                </a:solidFill>
+                <a:latin typeface="Arial"/>
+                <a:ea typeface="Arial"/>
+                <a:cs typeface="Arial"/>
+              </a:defRPr>
+            </a:lvl2pPr>
+            <a:lvl3pPr algn="ctr">
+              <a:defRPr sz="1575">
+                <a:solidFill>
+                  <a:srgbClr val="BCD0EB"/>
+                </a:solidFill>
+                <a:latin typeface="Arial"/>
+                <a:ea typeface="Arial"/>
+                <a:cs typeface="Arial"/>
+              </a:defRPr>
+            </a:lvl3pPr>
+            <a:lvl4pPr algn="ctr">
+              <a:defRPr sz="1575">
+                <a:solidFill>
+                  <a:srgbClr val="BCD0EB"/>
+                </a:solidFill>
+                <a:latin typeface="Arial"/>
+                <a:ea typeface="Arial"/>
+                <a:cs typeface="Arial"/>
+              </a:defRPr>
+            </a:lvl4pPr>
+            <a:lvl5pPr algn="ctr">
+              <a:defRPr sz="1575">
+                <a:solidFill>
+                  <a:srgbClr val="BCD0EB"/>
+                </a:solidFill>
+                <a:latin typeface="Arial"/>
+                <a:ea typeface="Arial"/>
+                <a:cs typeface="Arial"/>
+              </a:defRPr>
+            </a:lvl5pPr>
+            <a:lvl6pPr algn="ctr">
+              <a:defRPr sz="1575">
+                <a:solidFill>
+                  <a:srgbClr val="BCD0EB"/>
+                </a:solidFill>
+                <a:latin typeface="Arial"/>
+                <a:ea typeface="Arial"/>
+                <a:cs typeface="Arial"/>
+              </a:defRPr>
+            </a:lvl6pPr>
+            <a:lvl7pPr algn="ctr">
+              <a:defRPr sz="1575">
+                <a:solidFill>
+                  <a:srgbClr val="BCD0EB"/>
+                </a:solidFill>
+                <a:latin typeface="Arial"/>
+                <a:ea typeface="Arial"/>
+                <a:cs typeface="Arial"/>
+              </a:defRPr>
+            </a:lvl7pPr>
+            <a:lvl8pPr algn="ctr">
+              <a:defRPr sz="1575">
+                <a:solidFill>
+                  <a:srgbClr val="BCD0EB"/>
+                </a:solidFill>
+                <a:latin typeface="Arial"/>
+                <a:ea typeface="Arial"/>
+                <a:cs typeface="Arial"/>
+              </a:defRPr>
+            </a:lvl8pPr>
+            <a:lvl9pPr algn="ctr">
+              <a:defRPr sz="1575">
+                <a:solidFill>
+                  <a:srgbClr val="BCD0EB"/>
+                </a:solidFill>
+                <a:latin typeface="Arial"/>
+                <a:ea typeface="Arial"/>
+                <a:cs typeface="Arial"/>
+              </a:defRPr>
+            </a:lvl9pPr>
+          </a:lstStyle>
+          <a:p xmlns:a="http://schemas.openxmlformats.org/drawingml/2006/main">
+            <a:pPr algn="ctr">
+              <a:defRPr sz="1575">
+                <a:solidFill>
+                  <a:srgbClr val="BCD0EB"/>
+                </a:solidFill>
+                <a:latin typeface="Arial"/>
+                <a:ea typeface="Arial"/>
+                <a:cs typeface="Arial"/>
+              </a:defRPr>
+            </a:pPr>
+            <a:r>
+              <a:rPr sz="1575">
+                <a:solidFill>
+                  <a:srgbClr val="BCD0EB"/>
+                </a:solidFill>
+                <a:latin typeface="Arial"/>
+                <a:ea typeface="Arial"/>
+                <a:cs typeface="Arial"/>
+              </a:rPr>
+              <a:t>08</a:t>
+            </a:r>
+          </a:p>
+        </p:txBody>
+      </p:sp>
+      <p:pic>
+        <p:nvPicPr>
+          <p:cNvPr id="23" name="">
+            <a:extLst xmlns:a="http://schemas.openxmlformats.org/drawingml/2006/main">
+              <a:ext uri="{FF2B5EF4-FFF2-40B4-BE49-F238E27FC236}">
+                <a16:creationId xmlns:a16="http://schemas.microsoft.com/office/drawing/2014/main" id="{7978E1D6-F510-4818-A97F-71C9031FECD6}"/>
+              </a:ext>
+            </a:extLst>
+          </p:cNvPr>
+          <p:cNvPicPr>
+            <a:picLocks xmlns:a="http://schemas.openxmlformats.org/drawingml/2006/main" noChangeAspect="1"/>
+          </p:cNvPicPr>
+          <p:nvPr/>
+        </p:nvPicPr>
+        <p:blipFill>
+          <a:blip xmlns:r="http://schemas.openxmlformats.org/officeDocument/2006/relationships" xmlns:a="http://schemas.openxmlformats.org/drawingml/2006/main" r:embed="R313e2059b74f4fd1"/>
+          <a:stretch xmlns:a="http://schemas.openxmlformats.org/drawingml/2006/main"/>
+        </p:blipFill>
+        <p:spPr>
+          <a:xfrm xmlns:a="http://schemas.openxmlformats.org/drawingml/2006/main">
+            <a:off x="7995581" y="3400425"/>
+            <a:ext cx="506139" cy="638175"/>
+          </a:xfrm>
+          <a:prstGeom xmlns:a="http://schemas.openxmlformats.org/drawingml/2006/main" prst="rect">
+            <a:avLst/>
+          </a:prstGeom>
+        </p:spPr>
+      </p:pic>
+      <p:sp>
+        <p:nvSpPr>
+          <p:cNvPr id="24" name="nomor-karakter-8">
+            <a:extLst xmlns:a="http://schemas.openxmlformats.org/drawingml/2006/main">
+              <a:ext uri="{FF2B5EF4-FFF2-40B4-BE49-F238E27FC236}">
+                <a16:creationId xmlns:a16="http://schemas.microsoft.com/office/drawing/2014/main" id="{8075DE39-A4C9-4DC4-A91C-507908779097}"/>
+              </a:ext>
+            </a:extLst>
+          </p:cNvPr>
+          <p:cNvSpPr>
+            <a:spLocks xmlns:a="http://schemas.openxmlformats.org/drawingml/2006/main" noGrp="1"/>
+          </p:cNvSpPr>
+          <p:nvPr/>
+        </p:nvSpPr>
+        <p:spPr>
+          <a:xfrm xmlns:a="http://schemas.openxmlformats.org/drawingml/2006/main">
+            <a:off x="7915275" y="4086225"/>
+            <a:ext cx="666750" cy="257175"/>
+          </a:xfrm>
+          <a:prstGeom xmlns:a="http://schemas.openxmlformats.org/drawingml/2006/main" prst="rect">
+            <a:avLst/>
+          </a:prstGeom>
+          <a:noFill xmlns:a="http://schemas.openxmlformats.org/drawingml/2006/main"/>
+          <a:ln xmlns:a="http://schemas.openxmlformats.org/drawingml/2006/main" w="0">
+            <a:noFill/>
+            <a:prstDash val="solid"/>
+          </a:ln>
+        </p:spPr>
+        <p:txBody>
+          <a:bodyPr xmlns:a="http://schemas.openxmlformats.org/drawingml/2006/main" wrap="square" lIns="0" tIns="0" rIns="0" bIns="0" anchor="t">
+            <a:noAutofit/>
+          </a:bodyPr>
+          <a:lstStyle xmlns:a="http://schemas.openxmlformats.org/drawingml/2006/main">
+            <a:defPPr algn="ctr">
+              <a:defRPr sz="1575">
+                <a:solidFill>
+                  <a:srgbClr val="BCD0EB"/>
+                </a:solidFill>
+                <a:latin typeface="Arial"/>
+                <a:ea typeface="Arial"/>
+                <a:cs typeface="Arial"/>
+              </a:defRPr>
+            </a:defPPr>
+            <a:lvl1pPr algn="ctr">
+              <a:defRPr sz="1575">
+                <a:solidFill>
+                  <a:srgbClr val="BCD0EB"/>
+                </a:solidFill>
+                <a:latin typeface="Arial"/>
+                <a:ea typeface="Arial"/>
+                <a:cs typeface="Arial"/>
+              </a:defRPr>
+            </a:lvl1pPr>
+            <a:lvl2pPr algn="ctr">
+              <a:defRPr sz="1575">
+                <a:solidFill>
+                  <a:srgbClr val="BCD0EB"/>
+                </a:solidFill>
+                <a:latin typeface="Arial"/>
+                <a:ea typeface="Arial"/>
+                <a:cs typeface="Arial"/>
+              </a:defRPr>
+            </a:lvl2pPr>
+            <a:lvl3pPr algn="ctr">
+              <a:defRPr sz="1575">
+                <a:solidFill>
+                  <a:srgbClr val="BCD0EB"/>
+                </a:solidFill>
+                <a:latin typeface="Arial"/>
+                <a:ea typeface="Arial"/>
+                <a:cs typeface="Arial"/>
+              </a:defRPr>
+            </a:lvl3pPr>
+            <a:lvl4pPr algn="ctr">
+              <a:defRPr sz="1575">
+                <a:solidFill>
+                  <a:srgbClr val="BCD0EB"/>
+                </a:solidFill>
+                <a:latin typeface="Arial"/>
+                <a:ea typeface="Arial"/>
+                <a:cs typeface="Arial"/>
+              </a:defRPr>
+            </a:lvl4pPr>
+            <a:lvl5pPr algn="ctr">
+              <a:defRPr sz="1575">
+                <a:solidFill>
+                  <a:srgbClr val="BCD0EB"/>
+                </a:solidFill>
+                <a:latin typeface="Arial"/>
+                <a:ea typeface="Arial"/>
+                <a:cs typeface="Arial"/>
+              </a:defRPr>
+            </a:lvl5pPr>
+            <a:lvl6pPr algn="ctr">
+              <a:defRPr sz="1575">
+                <a:solidFill>
+                  <a:srgbClr val="BCD0EB"/>
+                </a:solidFill>
+                <a:latin typeface="Arial"/>
+                <a:ea typeface="Arial"/>
+                <a:cs typeface="Arial"/>
+              </a:defRPr>
+            </a:lvl6pPr>
+            <a:lvl7pPr algn="ctr">
+              <a:defRPr sz="1575">
+                <a:solidFill>
+                  <a:srgbClr val="BCD0EB"/>
+                </a:solidFill>
+                <a:latin typeface="Arial"/>
+                <a:ea typeface="Arial"/>
+                <a:cs typeface="Arial"/>
+              </a:defRPr>
+            </a:lvl7pPr>
+            <a:lvl8pPr algn="ctr">
+              <a:defRPr sz="1575">
+                <a:solidFill>
+                  <a:srgbClr val="BCD0EB"/>
+                </a:solidFill>
+                <a:latin typeface="Arial"/>
+                <a:ea typeface="Arial"/>
+                <a:cs typeface="Arial"/>
+              </a:defRPr>
+            </a:lvl8pPr>
+            <a:lvl9pPr algn="ctr">
+              <a:defRPr sz="1575">
+                <a:solidFill>
+                  <a:srgbClr val="BCD0EB"/>
+                </a:solidFill>
+                <a:latin typeface="Arial"/>
+                <a:ea typeface="Arial"/>
+                <a:cs typeface="Arial"/>
+              </a:defRPr>
+            </a:lvl9pPr>
+          </a:lstStyle>
+          <a:p xmlns:a="http://schemas.openxmlformats.org/drawingml/2006/main">
+            <a:pPr algn="ctr">
+              <a:defRPr sz="1575">
+                <a:solidFill>
+                  <a:srgbClr val="BCD0EB"/>
+                </a:solidFill>
+                <a:latin typeface="Arial"/>
+                <a:ea typeface="Arial"/>
+                <a:cs typeface="Arial"/>
+              </a:defRPr>
+            </a:pPr>
+            <a:r>
+              <a:rPr sz="1575">
+                <a:solidFill>
+                  <a:srgbClr val="BCD0EB"/>
+                </a:solidFill>
+                <a:latin typeface="Arial"/>
+                <a:ea typeface="Arial"/>
+                <a:cs typeface="Arial"/>
+              </a:rPr>
+              <a:t>09</a:t>
+            </a:r>
+          </a:p>
+        </p:txBody>
+      </p:sp>
+      <p:pic>
+        <p:nvPicPr>
+          <p:cNvPr id="25" name="">
+            <a:extLst xmlns:a="http://schemas.openxmlformats.org/drawingml/2006/main">
+              <a:ext uri="{FF2B5EF4-FFF2-40B4-BE49-F238E27FC236}">
+                <a16:creationId xmlns:a16="http://schemas.microsoft.com/office/drawing/2014/main" id="{3C2C616E-6039-40CB-8ECB-A5DAA940EA6A}"/>
+              </a:ext>
+            </a:extLst>
+          </p:cNvPr>
+          <p:cNvPicPr>
+            <a:picLocks xmlns:a="http://schemas.openxmlformats.org/drawingml/2006/main" noChangeAspect="1"/>
+          </p:cNvPicPr>
+          <p:nvPr/>
+        </p:nvPicPr>
+        <p:blipFill>
+          <a:blip xmlns:r="http://schemas.openxmlformats.org/officeDocument/2006/relationships" xmlns:a="http://schemas.openxmlformats.org/drawingml/2006/main" r:embed="R4964ffeba7ef4659"/>
+          <a:stretch xmlns:a="http://schemas.openxmlformats.org/drawingml/2006/main"/>
+        </p:blipFill>
+        <p:spPr>
+          <a:xfrm xmlns:a="http://schemas.openxmlformats.org/drawingml/2006/main">
+            <a:off x="8916015" y="3400425"/>
+            <a:ext cx="494071" cy="638175"/>
+          </a:xfrm>
+          <a:prstGeom xmlns:a="http://schemas.openxmlformats.org/drawingml/2006/main" prst="rect">
+            <a:avLst/>
+          </a:prstGeom>
+        </p:spPr>
+      </p:pic>
+      <p:sp>
+        <p:nvSpPr>
+          <p:cNvPr id="26" name="nomor-karakter-9">
+            <a:extLst xmlns:a="http://schemas.openxmlformats.org/drawingml/2006/main">
+              <a:ext uri="{FF2B5EF4-FFF2-40B4-BE49-F238E27FC236}">
+                <a16:creationId xmlns:a16="http://schemas.microsoft.com/office/drawing/2014/main" id="{C9156B1D-870B-4BF3-9253-8E5D4BEB2E98}"/>
+              </a:ext>
+            </a:extLst>
+          </p:cNvPr>
+          <p:cNvSpPr>
+            <a:spLocks xmlns:a="http://schemas.openxmlformats.org/drawingml/2006/main" noGrp="1"/>
+          </p:cNvSpPr>
+          <p:nvPr/>
+        </p:nvSpPr>
+        <p:spPr>
+          <a:xfrm xmlns:a="http://schemas.openxmlformats.org/drawingml/2006/main">
+            <a:off x="8829675" y="4086225"/>
+            <a:ext cx="666750" cy="257175"/>
+          </a:xfrm>
+          <a:prstGeom xmlns:a="http://schemas.openxmlformats.org/drawingml/2006/main" prst="rect">
+            <a:avLst/>
+          </a:prstGeom>
+          <a:noFill xmlns:a="http://schemas.openxmlformats.org/drawingml/2006/main"/>
+          <a:ln xmlns:a="http://schemas.openxmlformats.org/drawingml/2006/main" w="0">
+            <a:noFill/>
+            <a:prstDash val="solid"/>
+          </a:ln>
+        </p:spPr>
+        <p:txBody>
+          <a:bodyPr xmlns:a="http://schemas.openxmlformats.org/drawingml/2006/main" wrap="square" lIns="0" tIns="0" rIns="0" bIns="0" anchor="t">
+            <a:noAutofit/>
+          </a:bodyPr>
+          <a:lstStyle xmlns:a="http://schemas.openxmlformats.org/drawingml/2006/main">
+            <a:defPPr algn="ctr">
+              <a:defRPr sz="1575">
+                <a:solidFill>
+                  <a:srgbClr val="BCD0EB"/>
+                </a:solidFill>
+                <a:latin typeface="Arial"/>
+                <a:ea typeface="Arial"/>
+                <a:cs typeface="Arial"/>
+              </a:defRPr>
+            </a:defPPr>
+            <a:lvl1pPr algn="ctr">
+              <a:defRPr sz="1575">
+                <a:solidFill>
+                  <a:srgbClr val="BCD0EB"/>
+                </a:solidFill>
+                <a:latin typeface="Arial"/>
+                <a:ea typeface="Arial"/>
+                <a:cs typeface="Arial"/>
+              </a:defRPr>
+            </a:lvl1pPr>
+            <a:lvl2pPr algn="ctr">
+              <a:defRPr sz="1575">
+                <a:solidFill>
+                  <a:srgbClr val="BCD0EB"/>
+                </a:solidFill>
+                <a:latin typeface="Arial"/>
+                <a:ea typeface="Arial"/>
+                <a:cs typeface="Arial"/>
+              </a:defRPr>
+            </a:lvl2pPr>
+            <a:lvl3pPr algn="ctr">
+              <a:defRPr sz="1575">
+                <a:solidFill>
+                  <a:srgbClr val="BCD0EB"/>
+                </a:solidFill>
+                <a:latin typeface="Arial"/>
+                <a:ea typeface="Arial"/>
+                <a:cs typeface="Arial"/>
+              </a:defRPr>
+            </a:lvl3pPr>
+            <a:lvl4pPr algn="ctr">
+              <a:defRPr sz="1575">
+                <a:solidFill>
+                  <a:srgbClr val="BCD0EB"/>
+                </a:solidFill>
+                <a:latin typeface="Arial"/>
+                <a:ea typeface="Arial"/>
+                <a:cs typeface="Arial"/>
+              </a:defRPr>
+            </a:lvl4pPr>
+            <a:lvl5pPr algn="ctr">
+              <a:defRPr sz="1575">
+                <a:solidFill>
+                  <a:srgbClr val="BCD0EB"/>
+                </a:solidFill>
+                <a:latin typeface="Arial"/>
+                <a:ea typeface="Arial"/>
+                <a:cs typeface="Arial"/>
+              </a:defRPr>
+            </a:lvl5pPr>
+            <a:lvl6pPr algn="ctr">
+              <a:defRPr sz="1575">
+                <a:solidFill>
+                  <a:srgbClr val="BCD0EB"/>
+                </a:solidFill>
+                <a:latin typeface="Arial"/>
+                <a:ea typeface="Arial"/>
+                <a:cs typeface="Arial"/>
+              </a:defRPr>
+            </a:lvl6pPr>
+            <a:lvl7pPr algn="ctr">
+              <a:defRPr sz="1575">
+                <a:solidFill>
+                  <a:srgbClr val="BCD0EB"/>
+                </a:solidFill>
+                <a:latin typeface="Arial"/>
+                <a:ea typeface="Arial"/>
+                <a:cs typeface="Arial"/>
+              </a:defRPr>
+            </a:lvl7pPr>
+            <a:lvl8pPr algn="ctr">
+              <a:defRPr sz="1575">
+                <a:solidFill>
+                  <a:srgbClr val="BCD0EB"/>
+                </a:solidFill>
+                <a:latin typeface="Arial"/>
+                <a:ea typeface="Arial"/>
+                <a:cs typeface="Arial"/>
+              </a:defRPr>
+            </a:lvl8pPr>
+            <a:lvl9pPr algn="ctr">
+              <a:defRPr sz="1575">
+                <a:solidFill>
+                  <a:srgbClr val="BCD0EB"/>
+                </a:solidFill>
+                <a:latin typeface="Arial"/>
+                <a:ea typeface="Arial"/>
+                <a:cs typeface="Arial"/>
+              </a:defRPr>
+            </a:lvl9pPr>
+          </a:lstStyle>
+          <a:p xmlns:a="http://schemas.openxmlformats.org/drawingml/2006/main">
+            <a:pPr algn="ctr">
+              <a:defRPr sz="1575">
+                <a:solidFill>
+                  <a:srgbClr val="BCD0EB"/>
+                </a:solidFill>
+                <a:latin typeface="Arial"/>
+                <a:ea typeface="Arial"/>
+                <a:cs typeface="Arial"/>
+              </a:defRPr>
+            </a:pPr>
+            <a:r>
+              <a:rPr sz="1575">
+                <a:solidFill>
+                  <a:srgbClr val="BCD0EB"/>
+                </a:solidFill>
+                <a:latin typeface="Arial"/>
+                <a:ea typeface="Arial"/>
+                <a:cs typeface="Arial"/>
+              </a:rPr>
+              <a:t>10</a:t>
+            </a:r>
+          </a:p>
+        </p:txBody>
+      </p:sp>
+      <p:pic>
+        <p:nvPicPr>
+          <p:cNvPr id="27" name="">
+            <a:extLst xmlns:a="http://schemas.openxmlformats.org/drawingml/2006/main">
+              <a:ext uri="{FF2B5EF4-FFF2-40B4-BE49-F238E27FC236}">
+                <a16:creationId xmlns:a16="http://schemas.microsoft.com/office/drawing/2014/main" id="{EECE1343-193F-4B33-B3F4-8DFDAA472629}"/>
+              </a:ext>
+            </a:extLst>
+          </p:cNvPr>
+          <p:cNvPicPr>
+            <a:picLocks xmlns:a="http://schemas.openxmlformats.org/drawingml/2006/main" noChangeAspect="1"/>
+          </p:cNvPicPr>
+          <p:nvPr/>
+        </p:nvPicPr>
+        <p:blipFill>
+          <a:blip xmlns:r="http://schemas.openxmlformats.org/officeDocument/2006/relationships" xmlns:a="http://schemas.openxmlformats.org/drawingml/2006/main" r:embed="R3a5a835be9bf49d4"/>
+          <a:stretch xmlns:a="http://schemas.openxmlformats.org/drawingml/2006/main"/>
+        </p:blipFill>
+        <p:spPr>
+          <a:xfrm xmlns:a="http://schemas.openxmlformats.org/drawingml/2006/main">
+            <a:off x="9830415" y="3400425"/>
+            <a:ext cx="494071" cy="638175"/>
+          </a:xfrm>
+          <a:prstGeom xmlns:a="http://schemas.openxmlformats.org/drawingml/2006/main" prst="rect">
+            <a:avLst/>
+          </a:prstGeom>
+        </p:spPr>
+      </p:pic>
+      <p:sp>
+        <p:nvSpPr>
+          <p:cNvPr id="28" name="nomor-karakter-10">
+            <a:extLst xmlns:a="http://schemas.openxmlformats.org/drawingml/2006/main">
+              <a:ext uri="{FF2B5EF4-FFF2-40B4-BE49-F238E27FC236}">
+                <a16:creationId xmlns:a16="http://schemas.microsoft.com/office/drawing/2014/main" id="{05A2B187-B73A-40B2-9EE6-915D0298AD09}"/>
+              </a:ext>
+            </a:extLst>
+          </p:cNvPr>
+          <p:cNvSpPr>
+            <a:spLocks xmlns:a="http://schemas.openxmlformats.org/drawingml/2006/main" noGrp="1"/>
+          </p:cNvSpPr>
+          <p:nvPr/>
+        </p:nvSpPr>
+        <p:spPr>
+          <a:xfrm xmlns:a="http://schemas.openxmlformats.org/drawingml/2006/main">
+            <a:off x="9744075" y="4086225"/>
+            <a:ext cx="666750" cy="257175"/>
+          </a:xfrm>
+          <a:prstGeom xmlns:a="http://schemas.openxmlformats.org/drawingml/2006/main" prst="rect">
+            <a:avLst/>
+          </a:prstGeom>
+          <a:noFill xmlns:a="http://schemas.openxmlformats.org/drawingml/2006/main"/>
+          <a:ln xmlns:a="http://schemas.openxmlformats.org/drawingml/2006/main" w="0">
+            <a:noFill/>
+            <a:prstDash val="solid"/>
+          </a:ln>
+        </p:spPr>
+        <p:txBody>
+          <a:bodyPr xmlns:a="http://schemas.openxmlformats.org/drawingml/2006/main" wrap="square" lIns="0" tIns="0" rIns="0" bIns="0" anchor="t">
+            <a:noAutofit/>
+          </a:bodyPr>
+          <a:lstStyle xmlns:a="http://schemas.openxmlformats.org/drawingml/2006/main">
+            <a:defPPr algn="ctr">
+              <a:defRPr sz="1575">
+                <a:solidFill>
+                  <a:srgbClr val="BCD0EB"/>
+                </a:solidFill>
+                <a:latin typeface="Arial"/>
+                <a:ea typeface="Arial"/>
+                <a:cs typeface="Arial"/>
+              </a:defRPr>
+            </a:defPPr>
+            <a:lvl1pPr algn="ctr">
+              <a:defRPr sz="1575">
+                <a:solidFill>
+                  <a:srgbClr val="BCD0EB"/>
+                </a:solidFill>
+                <a:latin typeface="Arial"/>
+                <a:ea typeface="Arial"/>
+                <a:cs typeface="Arial"/>
+              </a:defRPr>
+            </a:lvl1pPr>
+            <a:lvl2pPr algn="ctr">
+              <a:defRPr sz="1575">
+                <a:solidFill>
+                  <a:srgbClr val="BCD0EB"/>
+                </a:solidFill>
+                <a:latin typeface="Arial"/>
+                <a:ea typeface="Arial"/>
+                <a:cs typeface="Arial"/>
+              </a:defRPr>
+            </a:lvl2pPr>
+            <a:lvl3pPr algn="ctr">
+              <a:defRPr sz="1575">
+                <a:solidFill>
+                  <a:srgbClr val="BCD0EB"/>
+                </a:solidFill>
+                <a:latin typeface="Arial"/>
+                <a:ea typeface="Arial"/>
+                <a:cs typeface="Arial"/>
+              </a:defRPr>
+            </a:lvl3pPr>
+            <a:lvl4pPr algn="ctr">
+              <a:defRPr sz="1575">
+                <a:solidFill>
+                  <a:srgbClr val="BCD0EB"/>
+                </a:solidFill>
+                <a:latin typeface="Arial"/>
+                <a:ea typeface="Arial"/>
+                <a:cs typeface="Arial"/>
+              </a:defRPr>
+            </a:lvl4pPr>
+            <a:lvl5pPr algn="ctr">
+              <a:defRPr sz="1575">
+                <a:solidFill>
+                  <a:srgbClr val="BCD0EB"/>
+                </a:solidFill>
+                <a:latin typeface="Arial"/>
+                <a:ea typeface="Arial"/>
+                <a:cs typeface="Arial"/>
+              </a:defRPr>
+            </a:lvl5pPr>
+            <a:lvl6pPr algn="ctr">
+              <a:defRPr sz="1575">
+                <a:solidFill>
+                  <a:srgbClr val="BCD0EB"/>
+                </a:solidFill>
+                <a:latin typeface="Arial"/>
+                <a:ea typeface="Arial"/>
+                <a:cs typeface="Arial"/>
+              </a:defRPr>
+            </a:lvl6pPr>
+            <a:lvl7pPr algn="ctr">
+              <a:defRPr sz="1575">
+                <a:solidFill>
+                  <a:srgbClr val="BCD0EB"/>
+                </a:solidFill>
+                <a:latin typeface="Arial"/>
+                <a:ea typeface="Arial"/>
+                <a:cs typeface="Arial"/>
+              </a:defRPr>
+            </a:lvl7pPr>
+            <a:lvl8pPr algn="ctr">
+              <a:defRPr sz="1575">
+                <a:solidFill>
+                  <a:srgbClr val="BCD0EB"/>
+                </a:solidFill>
+                <a:latin typeface="Arial"/>
+                <a:ea typeface="Arial"/>
+                <a:cs typeface="Arial"/>
+              </a:defRPr>
+            </a:lvl8pPr>
+            <a:lvl9pPr algn="ctr">
+              <a:defRPr sz="1575">
+                <a:solidFill>
+                  <a:srgbClr val="BCD0EB"/>
+                </a:solidFill>
+                <a:latin typeface="Arial"/>
+                <a:ea typeface="Arial"/>
+                <a:cs typeface="Arial"/>
+              </a:defRPr>
+            </a:lvl9pPr>
+          </a:lstStyle>
+          <a:p xmlns:a="http://schemas.openxmlformats.org/drawingml/2006/main">
+            <a:pPr algn="ctr">
+              <a:defRPr sz="1575">
+                <a:solidFill>
+                  <a:srgbClr val="BCD0EB"/>
+                </a:solidFill>
+                <a:latin typeface="Arial"/>
+                <a:ea typeface="Arial"/>
+                <a:cs typeface="Arial"/>
+              </a:defRPr>
+            </a:pPr>
+            <a:r>
+              <a:rPr sz="1575">
+                <a:solidFill>
+                  <a:srgbClr val="BCD0EB"/>
+                </a:solidFill>
+                <a:latin typeface="Arial"/>
+                <a:ea typeface="Arial"/>
+                <a:cs typeface="Arial"/>
+              </a:rPr>
+              <a:t>11</a:t>
+            </a:r>
+          </a:p>
+        </p:txBody>
+      </p:sp>
+      <p:pic>
+        <p:nvPicPr>
+          <p:cNvPr id="29" name="">
+            <a:extLst xmlns:a="http://schemas.openxmlformats.org/drawingml/2006/main">
+              <a:ext uri="{FF2B5EF4-FFF2-40B4-BE49-F238E27FC236}">
+                <a16:creationId xmlns:a16="http://schemas.microsoft.com/office/drawing/2014/main" id="{2972DD33-86C1-4B70-B71C-1B57B0AFC10D}"/>
+              </a:ext>
+            </a:extLst>
+          </p:cNvPr>
+          <p:cNvPicPr>
+            <a:picLocks xmlns:a="http://schemas.openxmlformats.org/drawingml/2006/main" noChangeAspect="1"/>
+          </p:cNvPicPr>
+          <p:nvPr/>
+        </p:nvPicPr>
+        <p:blipFill>
+          <a:blip xmlns:r="http://schemas.openxmlformats.org/officeDocument/2006/relationships" xmlns:a="http://schemas.openxmlformats.org/drawingml/2006/main" r:embed="R76f82790abdb447f"/>
+          <a:stretch xmlns:a="http://schemas.openxmlformats.org/drawingml/2006/main"/>
+        </p:blipFill>
+        <p:spPr>
+          <a:xfrm xmlns:a="http://schemas.openxmlformats.org/drawingml/2006/main">
+            <a:off x="10722620" y="3400425"/>
+            <a:ext cx="538460" cy="638175"/>
+          </a:xfrm>
+          <a:prstGeom xmlns:a="http://schemas.openxmlformats.org/drawingml/2006/main" prst="rect">
+            <a:avLst/>
+          </a:prstGeom>
+        </p:spPr>
+      </p:pic>
+      <p:sp>
+        <p:nvSpPr>
+          <p:cNvPr id="30" name="nomor-karakter-11">
+            <a:extLst xmlns:a="http://schemas.openxmlformats.org/drawingml/2006/main">
+              <a:ext uri="{FF2B5EF4-FFF2-40B4-BE49-F238E27FC236}">
+                <a16:creationId xmlns:a16="http://schemas.microsoft.com/office/drawing/2014/main" id="{9977418F-4570-47E8-A238-DCC27F8B9787}"/>
+              </a:ext>
+            </a:extLst>
+          </p:cNvPr>
+          <p:cNvSpPr>
+            <a:spLocks xmlns:a="http://schemas.openxmlformats.org/drawingml/2006/main" noGrp="1"/>
+          </p:cNvSpPr>
+          <p:nvPr/>
+        </p:nvSpPr>
+        <p:spPr>
+          <a:xfrm xmlns:a="http://schemas.openxmlformats.org/drawingml/2006/main">
+            <a:off x="10658475" y="4086225"/>
+            <a:ext cx="666750" cy="257175"/>
+          </a:xfrm>
+          <a:prstGeom xmlns:a="http://schemas.openxmlformats.org/drawingml/2006/main" prst="rect">
+            <a:avLst/>
+          </a:prstGeom>
+          <a:noFill xmlns:a="http://schemas.openxmlformats.org/drawingml/2006/main"/>
+          <a:ln xmlns:a="http://schemas.openxmlformats.org/drawingml/2006/main" w="0">
+            <a:noFill/>
+            <a:prstDash val="solid"/>
+          </a:ln>
+        </p:spPr>
+        <p:txBody>
+          <a:bodyPr xmlns:a="http://schemas.openxmlformats.org/drawingml/2006/main" wrap="square" lIns="0" tIns="0" rIns="0" bIns="0" anchor="t">
+            <a:noAutofit/>
+          </a:bodyPr>
+          <a:lstStyle xmlns:a="http://schemas.openxmlformats.org/drawingml/2006/main">
+            <a:defPPr algn="ctr">
+              <a:defRPr sz="1575">
+                <a:solidFill>
+                  <a:srgbClr val="BCD0EB"/>
+                </a:solidFill>
+                <a:latin typeface="Arial"/>
+                <a:ea typeface="Arial"/>
+                <a:cs typeface="Arial"/>
+              </a:defRPr>
+            </a:defPPr>
+            <a:lvl1pPr algn="ctr">
+              <a:defRPr sz="1575">
+                <a:solidFill>
+                  <a:srgbClr val="BCD0EB"/>
+                </a:solidFill>
+                <a:latin typeface="Arial"/>
+                <a:ea typeface="Arial"/>
+                <a:cs typeface="Arial"/>
+              </a:defRPr>
+            </a:lvl1pPr>
+            <a:lvl2pPr algn="ctr">
+              <a:defRPr sz="1575">
+                <a:solidFill>
+                  <a:srgbClr val="BCD0EB"/>
+                </a:solidFill>
+                <a:latin typeface="Arial"/>
+                <a:ea typeface="Arial"/>
+                <a:cs typeface="Arial"/>
+              </a:defRPr>
+            </a:lvl2pPr>
+            <a:lvl3pPr algn="ctr">
+              <a:defRPr sz="1575">
+                <a:solidFill>
+                  <a:srgbClr val="BCD0EB"/>
+                </a:solidFill>
+                <a:latin typeface="Arial"/>
+                <a:ea typeface="Arial"/>
+                <a:cs typeface="Arial"/>
+              </a:defRPr>
+            </a:lvl3pPr>
+            <a:lvl4pPr algn="ctr">
+              <a:defRPr sz="1575">
+                <a:solidFill>
+                  <a:srgbClr val="BCD0EB"/>
+                </a:solidFill>
+                <a:latin typeface="Arial"/>
+                <a:ea typeface="Arial"/>
+                <a:cs typeface="Arial"/>
+              </a:defRPr>
+            </a:lvl4pPr>
+            <a:lvl5pPr algn="ctr">
+              <a:defRPr sz="1575">
+                <a:solidFill>
+                  <a:srgbClr val="BCD0EB"/>
+                </a:solidFill>
+                <a:latin typeface="Arial"/>
+                <a:ea typeface="Arial"/>
+                <a:cs typeface="Arial"/>
+              </a:defRPr>
+            </a:lvl5pPr>
+            <a:lvl6pPr algn="ctr">
+              <a:defRPr sz="1575">
+                <a:solidFill>
+                  <a:srgbClr val="BCD0EB"/>
+                </a:solidFill>
+                <a:latin typeface="Arial"/>
+                <a:ea typeface="Arial"/>
+                <a:cs typeface="Arial"/>
+              </a:defRPr>
+            </a:lvl6pPr>
+            <a:lvl7pPr algn="ctr">
+              <a:defRPr sz="1575">
+                <a:solidFill>
+                  <a:srgbClr val="BCD0EB"/>
+                </a:solidFill>
+                <a:latin typeface="Arial"/>
+                <a:ea typeface="Arial"/>
+                <a:cs typeface="Arial"/>
+              </a:defRPr>
+            </a:lvl7pPr>
+            <a:lvl8pPr algn="ctr">
+              <a:defRPr sz="1575">
+                <a:solidFill>
+                  <a:srgbClr val="BCD0EB"/>
+                </a:solidFill>
+                <a:latin typeface="Arial"/>
+                <a:ea typeface="Arial"/>
+                <a:cs typeface="Arial"/>
+              </a:defRPr>
+            </a:lvl8pPr>
+            <a:lvl9pPr algn="ctr">
+              <a:defRPr sz="1575">
+                <a:solidFill>
+                  <a:srgbClr val="BCD0EB"/>
+                </a:solidFill>
+                <a:latin typeface="Arial"/>
+                <a:ea typeface="Arial"/>
+                <a:cs typeface="Arial"/>
+              </a:defRPr>
+            </a:lvl9pPr>
+          </a:lstStyle>
+          <a:p xmlns:a="http://schemas.openxmlformats.org/drawingml/2006/main">
+            <a:pPr algn="ctr">
+              <a:defRPr sz="1575">
+                <a:solidFill>
+                  <a:srgbClr val="BCD0EB"/>
+                </a:solidFill>
+                <a:latin typeface="Arial"/>
+                <a:ea typeface="Arial"/>
+                <a:cs typeface="Arial"/>
+              </a:defRPr>
+            </a:pPr>
+            <a:r>
+              <a:rPr sz="1575">
+                <a:solidFill>
+                  <a:srgbClr val="BCD0EB"/>
+                </a:solidFill>
+                <a:latin typeface="Arial"/>
+                <a:ea typeface="Arial"/>
+                <a:cs typeface="Arial"/>
+              </a:rPr>
+              <a:t>12</a:t>
+            </a:r>
+          </a:p>
+        </p:txBody>
+      </p:sp>
+      <p:pic>
+        <p:nvPicPr>
+          <p:cNvPr id="31" name="">
+            <a:extLst xmlns:a="http://schemas.openxmlformats.org/drawingml/2006/main">
+              <a:ext uri="{FF2B5EF4-FFF2-40B4-BE49-F238E27FC236}">
+                <a16:creationId xmlns:a16="http://schemas.microsoft.com/office/drawing/2014/main" id="{244A0209-2F51-4EAB-98FC-FC8B602CF8A4}"/>
+              </a:ext>
+            </a:extLst>
+          </p:cNvPr>
+          <p:cNvPicPr>
+            <a:picLocks xmlns:a="http://schemas.openxmlformats.org/drawingml/2006/main" noChangeAspect="1"/>
+          </p:cNvPicPr>
+          <p:nvPr/>
+        </p:nvPicPr>
+        <p:blipFill>
+          <a:blip xmlns:r="http://schemas.openxmlformats.org/officeDocument/2006/relationships" xmlns:a="http://schemas.openxmlformats.org/drawingml/2006/main" r:embed="R9f63cdbff5604a3a"/>
+          <a:stretch xmlns:a="http://schemas.openxmlformats.org/drawingml/2006/main"/>
+        </p:blipFill>
+        <p:spPr>
+          <a:xfrm xmlns:a="http://schemas.openxmlformats.org/drawingml/2006/main">
+            <a:off x="6130677" y="4533900"/>
+            <a:ext cx="578346" cy="638175"/>
+          </a:xfrm>
+          <a:prstGeom xmlns:a="http://schemas.openxmlformats.org/drawingml/2006/main" prst="rect">
+            <a:avLst/>
+          </a:prstGeom>
+        </p:spPr>
+      </p:pic>
+      <p:sp>
+        <p:nvSpPr>
+          <p:cNvPr id="32" name="nomor-karakter-12">
+            <a:extLst xmlns:a="http://schemas.openxmlformats.org/drawingml/2006/main">
+              <a:ext uri="{FF2B5EF4-FFF2-40B4-BE49-F238E27FC236}">
+                <a16:creationId xmlns:a16="http://schemas.microsoft.com/office/drawing/2014/main" id="{9CFE7688-484F-490E-99FC-6CC5E3D4DE4A}"/>
+              </a:ext>
+            </a:extLst>
+          </p:cNvPr>
+          <p:cNvSpPr>
+            <a:spLocks xmlns:a="http://schemas.openxmlformats.org/drawingml/2006/main" noGrp="1"/>
+          </p:cNvSpPr>
+          <p:nvPr/>
+        </p:nvSpPr>
+        <p:spPr>
+          <a:xfrm xmlns:a="http://schemas.openxmlformats.org/drawingml/2006/main">
+            <a:off x="6086475" y="5219700"/>
+            <a:ext cx="666750" cy="257175"/>
+          </a:xfrm>
+          <a:prstGeom xmlns:a="http://schemas.openxmlformats.org/drawingml/2006/main" prst="rect">
+            <a:avLst/>
+          </a:prstGeom>
+          <a:noFill xmlns:a="http://schemas.openxmlformats.org/drawingml/2006/main"/>
+          <a:ln xmlns:a="http://schemas.openxmlformats.org/drawingml/2006/main" w="0">
+            <a:noFill/>
+            <a:prstDash val="solid"/>
+          </a:ln>
+        </p:spPr>
+        <p:txBody>
+          <a:bodyPr xmlns:a="http://schemas.openxmlformats.org/drawingml/2006/main" wrap="square" lIns="0" tIns="0" rIns="0" bIns="0" anchor="t">
+            <a:noAutofit/>
+          </a:bodyPr>
+          <a:lstStyle xmlns:a="http://schemas.openxmlformats.org/drawingml/2006/main">
+            <a:defPPr algn="ctr">
+              <a:defRPr sz="1575">
+                <a:solidFill>
+                  <a:srgbClr val="BCD0EB"/>
+                </a:solidFill>
+                <a:latin typeface="Arial"/>
+                <a:ea typeface="Arial"/>
+                <a:cs typeface="Arial"/>
+              </a:defRPr>
+            </a:defPPr>
+            <a:lvl1pPr algn="ctr">
+              <a:defRPr sz="1575">
+                <a:solidFill>
+                  <a:srgbClr val="BCD0EB"/>
+                </a:solidFill>
+                <a:latin typeface="Arial"/>
+                <a:ea typeface="Arial"/>
+                <a:cs typeface="Arial"/>
+              </a:defRPr>
+            </a:lvl1pPr>
+            <a:lvl2pPr algn="ctr">
+              <a:defRPr sz="1575">
+                <a:solidFill>
+                  <a:srgbClr val="BCD0EB"/>
+                </a:solidFill>
+                <a:latin typeface="Arial"/>
+                <a:ea typeface="Arial"/>
+                <a:cs typeface="Arial"/>
+              </a:defRPr>
+            </a:lvl2pPr>
+            <a:lvl3pPr algn="ctr">
+              <a:defRPr sz="1575">
+                <a:solidFill>
+                  <a:srgbClr val="BCD0EB"/>
+                </a:solidFill>
+                <a:latin typeface="Arial"/>
+                <a:ea typeface="Arial"/>
+                <a:cs typeface="Arial"/>
+              </a:defRPr>
+            </a:lvl3pPr>
+            <a:lvl4pPr algn="ctr">
+              <a:defRPr sz="1575">
+                <a:solidFill>
+                  <a:srgbClr val="BCD0EB"/>
+                </a:solidFill>
+                <a:latin typeface="Arial"/>
+                <a:ea typeface="Arial"/>
+                <a:cs typeface="Arial"/>
+              </a:defRPr>
+            </a:lvl4pPr>
+            <a:lvl5pPr algn="ctr">
+              <a:defRPr sz="1575">
+                <a:solidFill>
+                  <a:srgbClr val="BCD0EB"/>
+                </a:solidFill>
+                <a:latin typeface="Arial"/>
+                <a:ea typeface="Arial"/>
+                <a:cs typeface="Arial"/>
+              </a:defRPr>
+            </a:lvl5pPr>
+            <a:lvl6pPr algn="ctr">
+              <a:defRPr sz="1575">
+                <a:solidFill>
+                  <a:srgbClr val="BCD0EB"/>
+                </a:solidFill>
+                <a:latin typeface="Arial"/>
+                <a:ea typeface="Arial"/>
+                <a:cs typeface="Arial"/>
+              </a:defRPr>
+            </a:lvl6pPr>
+            <a:lvl7pPr algn="ctr">
+              <a:defRPr sz="1575">
+                <a:solidFill>
+                  <a:srgbClr val="BCD0EB"/>
+                </a:solidFill>
+                <a:latin typeface="Arial"/>
+                <a:ea typeface="Arial"/>
+                <a:cs typeface="Arial"/>
+              </a:defRPr>
+            </a:lvl7pPr>
+            <a:lvl8pPr algn="ctr">
+              <a:defRPr sz="1575">
+                <a:solidFill>
+                  <a:srgbClr val="BCD0EB"/>
+                </a:solidFill>
+                <a:latin typeface="Arial"/>
+                <a:ea typeface="Arial"/>
+                <a:cs typeface="Arial"/>
+              </a:defRPr>
+            </a:lvl8pPr>
+            <a:lvl9pPr algn="ctr">
+              <a:defRPr sz="1575">
+                <a:solidFill>
+                  <a:srgbClr val="BCD0EB"/>
+                </a:solidFill>
+                <a:latin typeface="Arial"/>
+                <a:ea typeface="Arial"/>
+                <a:cs typeface="Arial"/>
+              </a:defRPr>
+            </a:lvl9pPr>
+          </a:lstStyle>
+          <a:p xmlns:a="http://schemas.openxmlformats.org/drawingml/2006/main">
+            <a:pPr algn="ctr">
+              <a:defRPr sz="1575">
+                <a:solidFill>
+                  <a:srgbClr val="BCD0EB"/>
+                </a:solidFill>
+                <a:latin typeface="Arial"/>
+                <a:ea typeface="Arial"/>
+                <a:cs typeface="Arial"/>
+              </a:defRPr>
+            </a:pPr>
+            <a:r>
+              <a:rPr sz="1575">
+                <a:solidFill>
+                  <a:srgbClr val="BCD0EB"/>
+                </a:solidFill>
+                <a:latin typeface="Arial"/>
+                <a:ea typeface="Arial"/>
+                <a:cs typeface="Arial"/>
+              </a:rPr>
+              <a:t>13</a:t>
+            </a:r>
+          </a:p>
+        </p:txBody>
+      </p:sp>
+      <p:pic>
+        <p:nvPicPr>
+          <p:cNvPr id="33" name="">
+            <a:extLst xmlns:a="http://schemas.openxmlformats.org/drawingml/2006/main">
+              <a:ext uri="{FF2B5EF4-FFF2-40B4-BE49-F238E27FC236}">
+                <a16:creationId xmlns:a16="http://schemas.microsoft.com/office/drawing/2014/main" id="{1E8C53C2-673E-4846-9922-86E4A649903F}"/>
+              </a:ext>
+            </a:extLst>
+          </p:cNvPr>
+          <p:cNvPicPr>
+            <a:picLocks xmlns:a="http://schemas.openxmlformats.org/drawingml/2006/main" noChangeAspect="1"/>
+          </p:cNvPicPr>
+          <p:nvPr/>
+        </p:nvPicPr>
+        <p:blipFill>
+          <a:blip xmlns:r="http://schemas.openxmlformats.org/officeDocument/2006/relationships" xmlns:a="http://schemas.openxmlformats.org/drawingml/2006/main" r:embed="R04cd6ea421154372"/>
+          <a:stretch xmlns:a="http://schemas.openxmlformats.org/drawingml/2006/main"/>
+        </p:blipFill>
+        <p:spPr>
+          <a:xfrm xmlns:a="http://schemas.openxmlformats.org/drawingml/2006/main">
+            <a:off x="7053840" y="4533900"/>
+            <a:ext cx="560820" cy="638175"/>
+          </a:xfrm>
+          <a:prstGeom xmlns:a="http://schemas.openxmlformats.org/drawingml/2006/main" prst="rect">
+            <a:avLst/>
+          </a:prstGeom>
+        </p:spPr>
+      </p:pic>
+      <p:sp>
+        <p:nvSpPr>
+          <p:cNvPr id="34" name="nomor-karakter-13">
+            <a:extLst xmlns:a="http://schemas.openxmlformats.org/drawingml/2006/main">
+              <a:ext uri="{FF2B5EF4-FFF2-40B4-BE49-F238E27FC236}">
+                <a16:creationId xmlns:a16="http://schemas.microsoft.com/office/drawing/2014/main" id="{793BA8BD-3E98-48E4-A75F-BF826C3FC9C7}"/>
+              </a:ext>
+            </a:extLst>
+          </p:cNvPr>
+          <p:cNvSpPr>
+            <a:spLocks xmlns:a="http://schemas.openxmlformats.org/drawingml/2006/main" noGrp="1"/>
+          </p:cNvSpPr>
+          <p:nvPr/>
+        </p:nvSpPr>
+        <p:spPr>
+          <a:xfrm xmlns:a="http://schemas.openxmlformats.org/drawingml/2006/main">
+            <a:off x="7000875" y="5219700"/>
+            <a:ext cx="666750" cy="257175"/>
+          </a:xfrm>
+          <a:prstGeom xmlns:a="http://schemas.openxmlformats.org/drawingml/2006/main" prst="rect">
+            <a:avLst/>
+          </a:prstGeom>
+          <a:noFill xmlns:a="http://schemas.openxmlformats.org/drawingml/2006/main"/>
+          <a:ln xmlns:a="http://schemas.openxmlformats.org/drawingml/2006/main" w="0">
+            <a:noFill/>
+            <a:prstDash val="solid"/>
+          </a:ln>
+        </p:spPr>
+        <p:txBody>
+          <a:bodyPr xmlns:a="http://schemas.openxmlformats.org/drawingml/2006/main" wrap="square" lIns="0" tIns="0" rIns="0" bIns="0" anchor="t">
+            <a:noAutofit/>
+          </a:bodyPr>
+          <a:lstStyle xmlns:a="http://schemas.openxmlformats.org/drawingml/2006/main">
+            <a:defPPr algn="ctr">
+              <a:defRPr sz="1575">
+                <a:solidFill>
+                  <a:srgbClr val="BCD0EB"/>
+                </a:solidFill>
+                <a:latin typeface="Arial"/>
+                <a:ea typeface="Arial"/>
+                <a:cs typeface="Arial"/>
+              </a:defRPr>
+            </a:defPPr>
+            <a:lvl1pPr algn="ctr">
+              <a:defRPr sz="1575">
+                <a:solidFill>
+                  <a:srgbClr val="BCD0EB"/>
+                </a:solidFill>
+                <a:latin typeface="Arial"/>
+                <a:ea typeface="Arial"/>
+                <a:cs typeface="Arial"/>
+              </a:defRPr>
+            </a:lvl1pPr>
+            <a:lvl2pPr algn="ctr">
+              <a:defRPr sz="1575">
+                <a:solidFill>
+                  <a:srgbClr val="BCD0EB"/>
+                </a:solidFill>
+                <a:latin typeface="Arial"/>
+                <a:ea typeface="Arial"/>
+                <a:cs typeface="Arial"/>
+              </a:defRPr>
+            </a:lvl2pPr>
+            <a:lvl3pPr algn="ctr">
+              <a:defRPr sz="1575">
+                <a:solidFill>
+                  <a:srgbClr val="BCD0EB"/>
+                </a:solidFill>
+                <a:latin typeface="Arial"/>
+                <a:ea typeface="Arial"/>
+                <a:cs typeface="Arial"/>
+              </a:defRPr>
+            </a:lvl3pPr>
+            <a:lvl4pPr algn="ctr">
+              <a:defRPr sz="1575">
+                <a:solidFill>
+                  <a:srgbClr val="BCD0EB"/>
+                </a:solidFill>
+                <a:latin typeface="Arial"/>
+                <a:ea typeface="Arial"/>
+                <a:cs typeface="Arial"/>
+              </a:defRPr>
+            </a:lvl4pPr>
+            <a:lvl5pPr algn="ctr">
+              <a:defRPr sz="1575">
+                <a:solidFill>
+                  <a:srgbClr val="BCD0EB"/>
+                </a:solidFill>
+                <a:latin typeface="Arial"/>
+                <a:ea typeface="Arial"/>
+                <a:cs typeface="Arial"/>
+              </a:defRPr>
+            </a:lvl5pPr>
+            <a:lvl6pPr algn="ctr">
+              <a:defRPr sz="1575">
+                <a:solidFill>
+                  <a:srgbClr val="BCD0EB"/>
+                </a:solidFill>
+                <a:latin typeface="Arial"/>
+                <a:ea typeface="Arial"/>
+                <a:cs typeface="Arial"/>
+              </a:defRPr>
+            </a:lvl6pPr>
+            <a:lvl7pPr algn="ctr">
+              <a:defRPr sz="1575">
+                <a:solidFill>
+                  <a:srgbClr val="BCD0EB"/>
+                </a:solidFill>
+                <a:latin typeface="Arial"/>
+                <a:ea typeface="Arial"/>
+                <a:cs typeface="Arial"/>
+              </a:defRPr>
+            </a:lvl7pPr>
+            <a:lvl8pPr algn="ctr">
+              <a:defRPr sz="1575">
+                <a:solidFill>
+                  <a:srgbClr val="BCD0EB"/>
+                </a:solidFill>
+                <a:latin typeface="Arial"/>
+                <a:ea typeface="Arial"/>
+                <a:cs typeface="Arial"/>
+              </a:defRPr>
+            </a:lvl8pPr>
+            <a:lvl9pPr algn="ctr">
+              <a:defRPr sz="1575">
+                <a:solidFill>
+                  <a:srgbClr val="BCD0EB"/>
+                </a:solidFill>
+                <a:latin typeface="Arial"/>
+                <a:ea typeface="Arial"/>
+                <a:cs typeface="Arial"/>
+              </a:defRPr>
+            </a:lvl9pPr>
+          </a:lstStyle>
+          <a:p xmlns:a="http://schemas.openxmlformats.org/drawingml/2006/main">
+            <a:pPr algn="ctr">
+              <a:defRPr sz="1575">
+                <a:solidFill>
+                  <a:srgbClr val="BCD0EB"/>
+                </a:solidFill>
+                <a:latin typeface="Arial"/>
+                <a:ea typeface="Arial"/>
+                <a:cs typeface="Arial"/>
+              </a:defRPr>
+            </a:pPr>
+            <a:r>
+              <a:rPr sz="1575">
+                <a:solidFill>
+                  <a:srgbClr val="BCD0EB"/>
+                </a:solidFill>
+                <a:latin typeface="Arial"/>
+                <a:ea typeface="Arial"/>
+                <a:cs typeface="Arial"/>
+              </a:rPr>
+              <a:t>14</a:t>
+            </a:r>
+          </a:p>
+        </p:txBody>
+      </p:sp>
+      <p:pic>
+        <p:nvPicPr>
+          <p:cNvPr id="35" name="">
+            <a:extLst xmlns:a="http://schemas.openxmlformats.org/drawingml/2006/main">
+              <a:ext uri="{FF2B5EF4-FFF2-40B4-BE49-F238E27FC236}">
+                <a16:creationId xmlns:a16="http://schemas.microsoft.com/office/drawing/2014/main" id="{A312474C-E2FC-412A-B66F-388EC8F1AB32}"/>
+              </a:ext>
+            </a:extLst>
+          </p:cNvPr>
+          <p:cNvPicPr>
+            <a:picLocks xmlns:a="http://schemas.openxmlformats.org/drawingml/2006/main" noChangeAspect="1"/>
+          </p:cNvPicPr>
+          <p:nvPr/>
+        </p:nvPicPr>
+        <p:blipFill>
+          <a:blip xmlns:r="http://schemas.openxmlformats.org/officeDocument/2006/relationships" xmlns:a="http://schemas.openxmlformats.org/drawingml/2006/main" r:embed="R385081cc4c054df9"/>
+          <a:stretch xmlns:a="http://schemas.openxmlformats.org/drawingml/2006/main"/>
+        </p:blipFill>
+        <p:spPr>
+          <a:xfrm xmlns:a="http://schemas.openxmlformats.org/drawingml/2006/main">
+            <a:off x="7949505" y="4533900"/>
+            <a:ext cx="598289" cy="638175"/>
+          </a:xfrm>
+          <a:prstGeom xmlns:a="http://schemas.openxmlformats.org/drawingml/2006/main" prst="rect">
+            <a:avLst/>
+          </a:prstGeom>
+        </p:spPr>
+      </p:pic>
+      <p:sp>
+        <p:nvSpPr>
+          <p:cNvPr id="36" name="nomor-karakter-14">
+            <a:extLst xmlns:a="http://schemas.openxmlformats.org/drawingml/2006/main">
+              <a:ext uri="{FF2B5EF4-FFF2-40B4-BE49-F238E27FC236}">
+                <a16:creationId xmlns:a16="http://schemas.microsoft.com/office/drawing/2014/main" id="{8E03369A-0FD2-4B73-A65F-A2B6E6432F36}"/>
+              </a:ext>
+            </a:extLst>
+          </p:cNvPr>
+          <p:cNvSpPr>
+            <a:spLocks xmlns:a="http://schemas.openxmlformats.org/drawingml/2006/main" noGrp="1"/>
+          </p:cNvSpPr>
+          <p:nvPr/>
+        </p:nvSpPr>
+        <p:spPr>
+          <a:xfrm xmlns:a="http://schemas.openxmlformats.org/drawingml/2006/main">
+            <a:off x="7915275" y="5219700"/>
+            <a:ext cx="666750" cy="257175"/>
+          </a:xfrm>
+          <a:prstGeom xmlns:a="http://schemas.openxmlformats.org/drawingml/2006/main" prst="rect">
+            <a:avLst/>
+          </a:prstGeom>
+          <a:noFill xmlns:a="http://schemas.openxmlformats.org/drawingml/2006/main"/>
+          <a:ln xmlns:a="http://schemas.openxmlformats.org/drawingml/2006/main" w="0">
+            <a:noFill/>
+            <a:prstDash val="solid"/>
+          </a:ln>
+        </p:spPr>
+        <p:txBody>
+          <a:bodyPr xmlns:a="http://schemas.openxmlformats.org/drawingml/2006/main" wrap="square" lIns="0" tIns="0" rIns="0" bIns="0" anchor="t">
+            <a:noAutofit/>
+          </a:bodyPr>
+          <a:lstStyle xmlns:a="http://schemas.openxmlformats.org/drawingml/2006/main">
+            <a:defPPr algn="ctr">
+              <a:defRPr sz="1575">
+                <a:solidFill>
+                  <a:srgbClr val="BCD0EB"/>
+                </a:solidFill>
+                <a:latin typeface="Arial"/>
+                <a:ea typeface="Arial"/>
+                <a:cs typeface="Arial"/>
+              </a:defRPr>
+            </a:defPPr>
+            <a:lvl1pPr algn="ctr">
+              <a:defRPr sz="1575">
+                <a:solidFill>
+                  <a:srgbClr val="BCD0EB"/>
+                </a:solidFill>
+                <a:latin typeface="Arial"/>
+                <a:ea typeface="Arial"/>
+                <a:cs typeface="Arial"/>
+              </a:defRPr>
+            </a:lvl1pPr>
+            <a:lvl2pPr algn="ctr">
+              <a:defRPr sz="1575">
+                <a:solidFill>
+                  <a:srgbClr val="BCD0EB"/>
+                </a:solidFill>
+                <a:latin typeface="Arial"/>
+                <a:ea typeface="Arial"/>
+                <a:cs typeface="Arial"/>
+              </a:defRPr>
+            </a:lvl2pPr>
+            <a:lvl3pPr algn="ctr">
+              <a:defRPr sz="1575">
+                <a:solidFill>
+                  <a:srgbClr val="BCD0EB"/>
+                </a:solidFill>
+                <a:latin typeface="Arial"/>
+                <a:ea typeface="Arial"/>
+                <a:cs typeface="Arial"/>
+              </a:defRPr>
+            </a:lvl3pPr>
+            <a:lvl4pPr algn="ctr">
+              <a:defRPr sz="1575">
+                <a:solidFill>
+                  <a:srgbClr val="BCD0EB"/>
+                </a:solidFill>
+                <a:latin typeface="Arial"/>
+                <a:ea typeface="Arial"/>
+                <a:cs typeface="Arial"/>
+              </a:defRPr>
+            </a:lvl4pPr>
+            <a:lvl5pPr algn="ctr">
+              <a:defRPr sz="1575">
+                <a:solidFill>
+                  <a:srgbClr val="BCD0EB"/>
+                </a:solidFill>
+                <a:latin typeface="Arial"/>
+                <a:ea typeface="Arial"/>
+                <a:cs typeface="Arial"/>
+              </a:defRPr>
+            </a:lvl5pPr>
+            <a:lvl6pPr algn="ctr">
+              <a:defRPr sz="1575">
+                <a:solidFill>
+                  <a:srgbClr val="BCD0EB"/>
+                </a:solidFill>
+                <a:latin typeface="Arial"/>
+                <a:ea typeface="Arial"/>
+                <a:cs typeface="Arial"/>
+              </a:defRPr>
+            </a:lvl6pPr>
+            <a:lvl7pPr algn="ctr">
+              <a:defRPr sz="1575">
+                <a:solidFill>
+                  <a:srgbClr val="BCD0EB"/>
+                </a:solidFill>
+                <a:latin typeface="Arial"/>
+                <a:ea typeface="Arial"/>
+                <a:cs typeface="Arial"/>
+              </a:defRPr>
+            </a:lvl7pPr>
+            <a:lvl8pPr algn="ctr">
+              <a:defRPr sz="1575">
+                <a:solidFill>
+                  <a:srgbClr val="BCD0EB"/>
+                </a:solidFill>
+                <a:latin typeface="Arial"/>
+                <a:ea typeface="Arial"/>
+                <a:cs typeface="Arial"/>
+              </a:defRPr>
+            </a:lvl8pPr>
+            <a:lvl9pPr algn="ctr">
+              <a:defRPr sz="1575">
+                <a:solidFill>
+                  <a:srgbClr val="BCD0EB"/>
+                </a:solidFill>
+                <a:latin typeface="Arial"/>
+                <a:ea typeface="Arial"/>
+                <a:cs typeface="Arial"/>
+              </a:defRPr>
+            </a:lvl9pPr>
+          </a:lstStyle>
+          <a:p xmlns:a="http://schemas.openxmlformats.org/drawingml/2006/main">
+            <a:pPr algn="ctr">
+              <a:defRPr sz="1575">
+                <a:solidFill>
+                  <a:srgbClr val="BCD0EB"/>
+                </a:solidFill>
+                <a:latin typeface="Arial"/>
+                <a:ea typeface="Arial"/>
+                <a:cs typeface="Arial"/>
+              </a:defRPr>
+            </a:pPr>
+            <a:r>
+              <a:rPr sz="1575">
+                <a:solidFill>
+                  <a:srgbClr val="BCD0EB"/>
+                </a:solidFill>
+                <a:latin typeface="Arial"/>
+                <a:ea typeface="Arial"/>
+                <a:cs typeface="Arial"/>
+              </a:rPr>
+              <a:t>15</a:t>
+            </a:r>
+          </a:p>
+        </p:txBody>
+      </p:sp>
+      <p:pic>
+        <p:nvPicPr>
+          <p:cNvPr id="37" name="">
+            <a:extLst xmlns:a="http://schemas.openxmlformats.org/drawingml/2006/main">
+              <a:ext uri="{FF2B5EF4-FFF2-40B4-BE49-F238E27FC236}">
+                <a16:creationId xmlns:a16="http://schemas.microsoft.com/office/drawing/2014/main" id="{0CFEEFEF-B864-4E54-A13A-371ADCCF908E}"/>
+              </a:ext>
+            </a:extLst>
+          </p:cNvPr>
+          <p:cNvPicPr>
+            <a:picLocks xmlns:a="http://schemas.openxmlformats.org/drawingml/2006/main" noChangeAspect="1"/>
+          </p:cNvPicPr>
+          <p:nvPr/>
+        </p:nvPicPr>
+        <p:blipFill>
+          <a:blip xmlns:r="http://schemas.openxmlformats.org/officeDocument/2006/relationships" xmlns:a="http://schemas.openxmlformats.org/drawingml/2006/main" r:embed="R471bf0e032614c68"/>
+          <a:stretch xmlns:a="http://schemas.openxmlformats.org/drawingml/2006/main"/>
+        </p:blipFill>
+        <p:spPr>
+          <a:xfrm xmlns:a="http://schemas.openxmlformats.org/drawingml/2006/main">
+            <a:off x="8889546" y="4533900"/>
+            <a:ext cx="547007" cy="638175"/>
+          </a:xfrm>
+          <a:prstGeom xmlns:a="http://schemas.openxmlformats.org/drawingml/2006/main" prst="rect">
+            <a:avLst/>
+          </a:prstGeom>
+        </p:spPr>
+      </p:pic>
+      <p:sp>
+        <p:nvSpPr>
+          <p:cNvPr id="38" name="nomor-karakter-15">
+            <a:extLst xmlns:a="http://schemas.openxmlformats.org/drawingml/2006/main">
+              <a:ext uri="{FF2B5EF4-FFF2-40B4-BE49-F238E27FC236}">
+                <a16:creationId xmlns:a16="http://schemas.microsoft.com/office/drawing/2014/main" id="{E360B62E-5FB3-4DC8-9242-FE27343200B1}"/>
+              </a:ext>
+            </a:extLst>
+          </p:cNvPr>
+          <p:cNvSpPr>
+            <a:spLocks xmlns:a="http://schemas.openxmlformats.org/drawingml/2006/main" noGrp="1"/>
+          </p:cNvSpPr>
+          <p:nvPr/>
+        </p:nvSpPr>
+        <p:spPr>
+          <a:xfrm xmlns:a="http://schemas.openxmlformats.org/drawingml/2006/main">
+            <a:off x="8829675" y="5219700"/>
+            <a:ext cx="666750" cy="257175"/>
+          </a:xfrm>
+          <a:prstGeom xmlns:a="http://schemas.openxmlformats.org/drawingml/2006/main" prst="rect">
+            <a:avLst/>
+          </a:prstGeom>
+          <a:noFill xmlns:a="http://schemas.openxmlformats.org/drawingml/2006/main"/>
+          <a:ln xmlns:a="http://schemas.openxmlformats.org/drawingml/2006/main" w="0">
+            <a:noFill/>
+            <a:prstDash val="solid"/>
+          </a:ln>
+        </p:spPr>
+        <p:txBody>
+          <a:bodyPr xmlns:a="http://schemas.openxmlformats.org/drawingml/2006/main" wrap="square" lIns="0" tIns="0" rIns="0" bIns="0" anchor="t">
+            <a:noAutofit/>
+          </a:bodyPr>
+          <a:lstStyle xmlns:a="http://schemas.openxmlformats.org/drawingml/2006/main">
+            <a:defPPr algn="ctr">
+              <a:defRPr sz="1575">
+                <a:solidFill>
+                  <a:srgbClr val="BCD0EB"/>
+                </a:solidFill>
+                <a:latin typeface="Arial"/>
+                <a:ea typeface="Arial"/>
+                <a:cs typeface="Arial"/>
+              </a:defRPr>
+            </a:defPPr>
+            <a:lvl1pPr algn="ctr">
+              <a:defRPr sz="1575">
+                <a:solidFill>
+                  <a:srgbClr val="BCD0EB"/>
+                </a:solidFill>
+                <a:latin typeface="Arial"/>
+                <a:ea typeface="Arial"/>
+                <a:cs typeface="Arial"/>
+              </a:defRPr>
+            </a:lvl1pPr>
+            <a:lvl2pPr algn="ctr">
+              <a:defRPr sz="1575">
+                <a:solidFill>
+                  <a:srgbClr val="BCD0EB"/>
+                </a:solidFill>
+                <a:latin typeface="Arial"/>
+                <a:ea typeface="Arial"/>
+                <a:cs typeface="Arial"/>
+              </a:defRPr>
+            </a:lvl2pPr>
+            <a:lvl3pPr algn="ctr">
+              <a:defRPr sz="1575">
+                <a:solidFill>
+                  <a:srgbClr val="BCD0EB"/>
+                </a:solidFill>
+                <a:latin typeface="Arial"/>
+                <a:ea typeface="Arial"/>
+                <a:cs typeface="Arial"/>
+              </a:defRPr>
+            </a:lvl3pPr>
+            <a:lvl4pPr algn="ctr">
+              <a:defRPr sz="1575">
+                <a:solidFill>
+                  <a:srgbClr val="BCD0EB"/>
+                </a:solidFill>
+                <a:latin typeface="Arial"/>
+                <a:ea typeface="Arial"/>
+                <a:cs typeface="Arial"/>
+              </a:defRPr>
+            </a:lvl4pPr>
+            <a:lvl5pPr algn="ctr">
+              <a:defRPr sz="1575">
+                <a:solidFill>
+                  <a:srgbClr val="BCD0EB"/>
+                </a:solidFill>
+                <a:latin typeface="Arial"/>
+                <a:ea typeface="Arial"/>
+                <a:cs typeface="Arial"/>
+              </a:defRPr>
+            </a:lvl5pPr>
+            <a:lvl6pPr algn="ctr">
+              <a:defRPr sz="1575">
+                <a:solidFill>
+                  <a:srgbClr val="BCD0EB"/>
+                </a:solidFill>
+                <a:latin typeface="Arial"/>
+                <a:ea typeface="Arial"/>
+                <a:cs typeface="Arial"/>
+              </a:defRPr>
+            </a:lvl6pPr>
+            <a:lvl7pPr algn="ctr">
+              <a:defRPr sz="1575">
+                <a:solidFill>
+                  <a:srgbClr val="BCD0EB"/>
+                </a:solidFill>
+                <a:latin typeface="Arial"/>
+                <a:ea typeface="Arial"/>
+                <a:cs typeface="Arial"/>
+              </a:defRPr>
+            </a:lvl7pPr>
+            <a:lvl8pPr algn="ctr">
+              <a:defRPr sz="1575">
+                <a:solidFill>
+                  <a:srgbClr val="BCD0EB"/>
+                </a:solidFill>
+                <a:latin typeface="Arial"/>
+                <a:ea typeface="Arial"/>
+                <a:cs typeface="Arial"/>
+              </a:defRPr>
+            </a:lvl8pPr>
+            <a:lvl9pPr algn="ctr">
+              <a:defRPr sz="1575">
+                <a:solidFill>
+                  <a:srgbClr val="BCD0EB"/>
+                </a:solidFill>
+                <a:latin typeface="Arial"/>
+                <a:ea typeface="Arial"/>
+                <a:cs typeface="Arial"/>
+              </a:defRPr>
+            </a:lvl9pPr>
+          </a:lstStyle>
+          <a:p xmlns:a="http://schemas.openxmlformats.org/drawingml/2006/main">
+            <a:pPr algn="ctr">
+              <a:defRPr sz="1575">
+                <a:solidFill>
+                  <a:srgbClr val="BCD0EB"/>
+                </a:solidFill>
+                <a:latin typeface="Arial"/>
+                <a:ea typeface="Arial"/>
+                <a:cs typeface="Arial"/>
+              </a:defRPr>
+            </a:pPr>
+            <a:r>
+              <a:rPr sz="1575">
+                <a:solidFill>
+                  <a:srgbClr val="BCD0EB"/>
+                </a:solidFill>
+                <a:latin typeface="Arial"/>
+                <a:ea typeface="Arial"/>
+                <a:cs typeface="Arial"/>
+              </a:rPr>
+              <a:t>16</a:t>
+            </a:r>
+          </a:p>
+        </p:txBody>
+      </p:sp>
+      <p:pic>
+        <p:nvPicPr>
+          <p:cNvPr id="39" name="">
+            <a:extLst xmlns:a="http://schemas.openxmlformats.org/drawingml/2006/main">
+              <a:ext uri="{FF2B5EF4-FFF2-40B4-BE49-F238E27FC236}">
+                <a16:creationId xmlns:a16="http://schemas.microsoft.com/office/drawing/2014/main" id="{3FDDFE96-2B96-450C-9495-25E3E5BA7AFA}"/>
+              </a:ext>
+            </a:extLst>
+          </p:cNvPr>
+          <p:cNvPicPr>
+            <a:picLocks xmlns:a="http://schemas.openxmlformats.org/drawingml/2006/main" noChangeAspect="1"/>
+          </p:cNvPicPr>
+          <p:nvPr/>
+        </p:nvPicPr>
+        <p:blipFill>
+          <a:blip xmlns:r="http://schemas.openxmlformats.org/officeDocument/2006/relationships" xmlns:a="http://schemas.openxmlformats.org/drawingml/2006/main" r:embed="R26bdcab34a26423d"/>
+          <a:stretch xmlns:a="http://schemas.openxmlformats.org/drawingml/2006/main"/>
+        </p:blipFill>
+        <p:spPr>
+          <a:xfrm xmlns:a="http://schemas.openxmlformats.org/drawingml/2006/main">
+            <a:off x="9778949" y="4533900"/>
+            <a:ext cx="597002" cy="638175"/>
+          </a:xfrm>
+          <a:prstGeom xmlns:a="http://schemas.openxmlformats.org/drawingml/2006/main" prst="rect">
+            <a:avLst/>
+          </a:prstGeom>
+        </p:spPr>
+      </p:pic>
+      <p:sp>
+        <p:nvSpPr>
+          <p:cNvPr id="40" name="nomor-karakter-16">
+            <a:extLst xmlns:a="http://schemas.openxmlformats.org/drawingml/2006/main">
+              <a:ext uri="{FF2B5EF4-FFF2-40B4-BE49-F238E27FC236}">
+                <a16:creationId xmlns:a16="http://schemas.microsoft.com/office/drawing/2014/main" id="{D96F72C1-434E-4C5C-A31F-BCBAE0751FC9}"/>
+              </a:ext>
+            </a:extLst>
+          </p:cNvPr>
+          <p:cNvSpPr>
+            <a:spLocks xmlns:a="http://schemas.openxmlformats.org/drawingml/2006/main" noGrp="1"/>
+          </p:cNvSpPr>
+          <p:nvPr/>
+        </p:nvSpPr>
+        <p:spPr>
+          <a:xfrm xmlns:a="http://schemas.openxmlformats.org/drawingml/2006/main">
+            <a:off x="9744075" y="5219700"/>
+            <a:ext cx="666750" cy="257175"/>
+          </a:xfrm>
+          <a:prstGeom xmlns:a="http://schemas.openxmlformats.org/drawingml/2006/main" prst="rect">
+            <a:avLst/>
+          </a:prstGeom>
+          <a:noFill xmlns:a="http://schemas.openxmlformats.org/drawingml/2006/main"/>
+          <a:ln xmlns:a="http://schemas.openxmlformats.org/drawingml/2006/main" w="0">
+            <a:noFill/>
+            <a:prstDash val="solid"/>
+          </a:ln>
+        </p:spPr>
+        <p:txBody>
+          <a:bodyPr xmlns:a="http://schemas.openxmlformats.org/drawingml/2006/main" wrap="square" lIns="0" tIns="0" rIns="0" bIns="0" anchor="t">
+            <a:noAutofit/>
+          </a:bodyPr>
+          <a:lstStyle xmlns:a="http://schemas.openxmlformats.org/drawingml/2006/main">
+            <a:defPPr algn="ctr">
+              <a:defRPr sz="1575">
+                <a:solidFill>
+                  <a:srgbClr val="BCD0EB"/>
+                </a:solidFill>
+                <a:latin typeface="Arial"/>
+                <a:ea typeface="Arial"/>
+                <a:cs typeface="Arial"/>
+              </a:defRPr>
+            </a:defPPr>
+            <a:lvl1pPr algn="ctr">
+              <a:defRPr sz="1575">
+                <a:solidFill>
+                  <a:srgbClr val="BCD0EB"/>
+                </a:solidFill>
+                <a:latin typeface="Arial"/>
+                <a:ea typeface="Arial"/>
+                <a:cs typeface="Arial"/>
+              </a:defRPr>
+            </a:lvl1pPr>
+            <a:lvl2pPr algn="ctr">
+              <a:defRPr sz="1575">
+                <a:solidFill>
+                  <a:srgbClr val="BCD0EB"/>
+                </a:solidFill>
+                <a:latin typeface="Arial"/>
+                <a:ea typeface="Arial"/>
+                <a:cs typeface="Arial"/>
+              </a:defRPr>
+            </a:lvl2pPr>
+            <a:lvl3pPr algn="ctr">
+              <a:defRPr sz="1575">
+                <a:solidFill>
+                  <a:srgbClr val="BCD0EB"/>
+                </a:solidFill>
+                <a:latin typeface="Arial"/>
+                <a:ea typeface="Arial"/>
+                <a:cs typeface="Arial"/>
+              </a:defRPr>
+            </a:lvl3pPr>
+            <a:lvl4pPr algn="ctr">
+              <a:defRPr sz="1575">
+                <a:solidFill>
+                  <a:srgbClr val="BCD0EB"/>
+                </a:solidFill>
+                <a:latin typeface="Arial"/>
+                <a:ea typeface="Arial"/>
+                <a:cs typeface="Arial"/>
+              </a:defRPr>
+            </a:lvl4pPr>
+            <a:lvl5pPr algn="ctr">
+              <a:defRPr sz="1575">
+                <a:solidFill>
+                  <a:srgbClr val="BCD0EB"/>
+                </a:solidFill>
+                <a:latin typeface="Arial"/>
+                <a:ea typeface="Arial"/>
+                <a:cs typeface="Arial"/>
+              </a:defRPr>
+            </a:lvl5pPr>
+            <a:lvl6pPr algn="ctr">
+              <a:defRPr sz="1575">
+                <a:solidFill>
+                  <a:srgbClr val="BCD0EB"/>
+                </a:solidFill>
+                <a:latin typeface="Arial"/>
+                <a:ea typeface="Arial"/>
+                <a:cs typeface="Arial"/>
+              </a:defRPr>
+            </a:lvl6pPr>
+            <a:lvl7pPr algn="ctr">
+              <a:defRPr sz="1575">
+                <a:solidFill>
+                  <a:srgbClr val="BCD0EB"/>
+                </a:solidFill>
+                <a:latin typeface="Arial"/>
+                <a:ea typeface="Arial"/>
+                <a:cs typeface="Arial"/>
+              </a:defRPr>
+            </a:lvl7pPr>
+            <a:lvl8pPr algn="ctr">
+              <a:defRPr sz="1575">
+                <a:solidFill>
+                  <a:srgbClr val="BCD0EB"/>
+                </a:solidFill>
+                <a:latin typeface="Arial"/>
+                <a:ea typeface="Arial"/>
+                <a:cs typeface="Arial"/>
+              </a:defRPr>
+            </a:lvl8pPr>
+            <a:lvl9pPr algn="ctr">
+              <a:defRPr sz="1575">
+                <a:solidFill>
+                  <a:srgbClr val="BCD0EB"/>
+                </a:solidFill>
+                <a:latin typeface="Arial"/>
+                <a:ea typeface="Arial"/>
+                <a:cs typeface="Arial"/>
+              </a:defRPr>
+            </a:lvl9pPr>
+          </a:lstStyle>
+          <a:p xmlns:a="http://schemas.openxmlformats.org/drawingml/2006/main">
+            <a:pPr algn="ctr">
+              <a:defRPr sz="1575">
+                <a:solidFill>
+                  <a:srgbClr val="BCD0EB"/>
+                </a:solidFill>
+                <a:latin typeface="Arial"/>
+                <a:ea typeface="Arial"/>
+                <a:cs typeface="Arial"/>
+              </a:defRPr>
+            </a:pPr>
+            <a:r>
+              <a:rPr sz="1575">
+                <a:solidFill>
+                  <a:srgbClr val="BCD0EB"/>
+                </a:solidFill>
+                <a:latin typeface="Arial"/>
+                <a:ea typeface="Arial"/>
+                <a:cs typeface="Arial"/>
+              </a:rPr>
+              <a:t>17</a:t>
+            </a:r>
+          </a:p>
+        </p:txBody>
+      </p:sp>
+      <p:pic>
+        <p:nvPicPr>
+          <p:cNvPr id="41" name="">
+            <a:extLst xmlns:a="http://schemas.openxmlformats.org/drawingml/2006/main">
+              <a:ext uri="{FF2B5EF4-FFF2-40B4-BE49-F238E27FC236}">
+                <a16:creationId xmlns:a16="http://schemas.microsoft.com/office/drawing/2014/main" id="{476C0D5B-3924-4B1F-974B-80AA560529D7}"/>
+              </a:ext>
+            </a:extLst>
+          </p:cNvPr>
+          <p:cNvPicPr>
+            <a:picLocks xmlns:a="http://schemas.openxmlformats.org/drawingml/2006/main" noChangeAspect="1"/>
+          </p:cNvPicPr>
+          <p:nvPr/>
+        </p:nvPicPr>
+        <p:blipFill>
+          <a:blip xmlns:r="http://schemas.openxmlformats.org/officeDocument/2006/relationships" xmlns:a="http://schemas.openxmlformats.org/drawingml/2006/main" r:embed="R5c7ff12ef04e48b7"/>
+          <a:stretch xmlns:a="http://schemas.openxmlformats.org/drawingml/2006/main"/>
+        </p:blipFill>
+        <p:spPr>
+          <a:xfrm xmlns:a="http://schemas.openxmlformats.org/drawingml/2006/main">
+            <a:off x="10721109" y="4533900"/>
+            <a:ext cx="541482" cy="638175"/>
+          </a:xfrm>
+          <a:prstGeom xmlns:a="http://schemas.openxmlformats.org/drawingml/2006/main" prst="rect">
+            <a:avLst/>
+          </a:prstGeom>
+        </p:spPr>
+      </p:pic>
+      <p:sp>
+        <p:nvSpPr>
+          <p:cNvPr id="42" name="nomor-karakter-17">
+            <a:extLst xmlns:a="http://schemas.openxmlformats.org/drawingml/2006/main">
+              <a:ext uri="{FF2B5EF4-FFF2-40B4-BE49-F238E27FC236}">
+                <a16:creationId xmlns:a16="http://schemas.microsoft.com/office/drawing/2014/main" id="{682F015E-BA60-473E-A26A-11805DF4ABAB}"/>
+              </a:ext>
+            </a:extLst>
+          </p:cNvPr>
+          <p:cNvSpPr>
+            <a:spLocks xmlns:a="http://schemas.openxmlformats.org/drawingml/2006/main" noGrp="1"/>
+          </p:cNvSpPr>
+          <p:nvPr/>
+        </p:nvSpPr>
+        <p:spPr>
+          <a:xfrm xmlns:a="http://schemas.openxmlformats.org/drawingml/2006/main">
+            <a:off x="10658475" y="5219700"/>
+            <a:ext cx="666750" cy="257175"/>
+          </a:xfrm>
+          <a:prstGeom xmlns:a="http://schemas.openxmlformats.org/drawingml/2006/main" prst="rect">
+            <a:avLst/>
+          </a:prstGeom>
+          <a:noFill xmlns:a="http://schemas.openxmlformats.org/drawingml/2006/main"/>
+          <a:ln xmlns:a="http://schemas.openxmlformats.org/drawingml/2006/main" w="0">
+            <a:noFill/>
+            <a:prstDash val="solid"/>
+          </a:ln>
+        </p:spPr>
+        <p:txBody>
+          <a:bodyPr xmlns:a="http://schemas.openxmlformats.org/drawingml/2006/main" wrap="square" lIns="0" tIns="0" rIns="0" bIns="0" anchor="t">
+            <a:noAutofit/>
+          </a:bodyPr>
+          <a:lstStyle xmlns:a="http://schemas.openxmlformats.org/drawingml/2006/main">
+            <a:defPPr algn="ctr">
+              <a:defRPr sz="1575">
+                <a:solidFill>
+                  <a:srgbClr val="BCD0EB"/>
+                </a:solidFill>
+                <a:latin typeface="Arial"/>
+                <a:ea typeface="Arial"/>
+                <a:cs typeface="Arial"/>
+              </a:defRPr>
+            </a:defPPr>
+            <a:lvl1pPr algn="ctr">
+              <a:defRPr sz="1575">
+                <a:solidFill>
+                  <a:srgbClr val="BCD0EB"/>
+                </a:solidFill>
+                <a:latin typeface="Arial"/>
+                <a:ea typeface="Arial"/>
+                <a:cs typeface="Arial"/>
+              </a:defRPr>
+            </a:lvl1pPr>
+            <a:lvl2pPr algn="ctr">
+              <a:defRPr sz="1575">
+                <a:solidFill>
+                  <a:srgbClr val="BCD0EB"/>
+                </a:solidFill>
+                <a:latin typeface="Arial"/>
+                <a:ea typeface="Arial"/>
+                <a:cs typeface="Arial"/>
+              </a:defRPr>
+            </a:lvl2pPr>
+            <a:lvl3pPr algn="ctr">
+              <a:defRPr sz="1575">
+                <a:solidFill>
+                  <a:srgbClr val="BCD0EB"/>
+                </a:solidFill>
+                <a:latin typeface="Arial"/>
+                <a:ea typeface="Arial"/>
+                <a:cs typeface="Arial"/>
+              </a:defRPr>
+            </a:lvl3pPr>
+            <a:lvl4pPr algn="ctr">
+              <a:defRPr sz="1575">
+                <a:solidFill>
+                  <a:srgbClr val="BCD0EB"/>
+                </a:solidFill>
+                <a:latin typeface="Arial"/>
+                <a:ea typeface="Arial"/>
+                <a:cs typeface="Arial"/>
+              </a:defRPr>
+            </a:lvl4pPr>
+            <a:lvl5pPr algn="ctr">
+              <a:defRPr sz="1575">
+                <a:solidFill>
+                  <a:srgbClr val="BCD0EB"/>
+                </a:solidFill>
+                <a:latin typeface="Arial"/>
+                <a:ea typeface="Arial"/>
+                <a:cs typeface="Arial"/>
+              </a:defRPr>
+            </a:lvl5pPr>
+            <a:lvl6pPr algn="ctr">
+              <a:defRPr sz="1575">
+                <a:solidFill>
+                  <a:srgbClr val="BCD0EB"/>
+                </a:solidFill>
+                <a:latin typeface="Arial"/>
+                <a:ea typeface="Arial"/>
+                <a:cs typeface="Arial"/>
+              </a:defRPr>
+            </a:lvl6pPr>
+            <a:lvl7pPr algn="ctr">
+              <a:defRPr sz="1575">
+                <a:solidFill>
+                  <a:srgbClr val="BCD0EB"/>
+                </a:solidFill>
+                <a:latin typeface="Arial"/>
+                <a:ea typeface="Arial"/>
+                <a:cs typeface="Arial"/>
+              </a:defRPr>
+            </a:lvl7pPr>
+            <a:lvl8pPr algn="ctr">
+              <a:defRPr sz="1575">
+                <a:solidFill>
+                  <a:srgbClr val="BCD0EB"/>
+                </a:solidFill>
+                <a:latin typeface="Arial"/>
+                <a:ea typeface="Arial"/>
+                <a:cs typeface="Arial"/>
+              </a:defRPr>
+            </a:lvl8pPr>
+            <a:lvl9pPr algn="ctr">
+              <a:defRPr sz="1575">
+                <a:solidFill>
+                  <a:srgbClr val="BCD0EB"/>
+                </a:solidFill>
+                <a:latin typeface="Arial"/>
+                <a:ea typeface="Arial"/>
+                <a:cs typeface="Arial"/>
+              </a:defRPr>
+            </a:lvl9pPr>
+          </a:lstStyle>
+          <a:p xmlns:a="http://schemas.openxmlformats.org/drawingml/2006/main">
+            <a:pPr algn="ctr">
+              <a:defRPr sz="1575">
+                <a:solidFill>
+                  <a:srgbClr val="BCD0EB"/>
+                </a:solidFill>
+                <a:latin typeface="Arial"/>
+                <a:ea typeface="Arial"/>
+                <a:cs typeface="Arial"/>
+              </a:defRPr>
+            </a:pPr>
+            <a:r>
+              <a:rPr sz="1575">
+                <a:solidFill>
+                  <a:srgbClr val="BCD0EB"/>
+                </a:solidFill>
+                <a:latin typeface="Arial"/>
+                <a:ea typeface="Arial"/>
+                <a:cs typeface="Arial"/>
+              </a:rPr>
+              <a:t>18</a:t>
+            </a:r>
+          </a:p>
+        </p:txBody>
+      </p:sp>
+      <p:sp>
+        <p:nvSpPr>
+          <p:cNvPr id="43" name="hasil-karakter">
+            <a:extLst xmlns:a="http://schemas.openxmlformats.org/drawingml/2006/main">
+              <a:ext uri="{FF2B5EF4-FFF2-40B4-BE49-F238E27FC236}">
+                <a16:creationId xmlns:a16="http://schemas.microsoft.com/office/drawing/2014/main" id="{E1A022E8-CBE3-4099-AE09-746655EAB7B3}"/>
+              </a:ext>
+            </a:extLst>
+          </p:cNvPr>
+          <p:cNvSpPr>
+            <a:spLocks xmlns:a="http://schemas.openxmlformats.org/drawingml/2006/main" noGrp="1"/>
+          </p:cNvSpPr>
+          <p:nvPr/>
+        </p:nvSpPr>
+        <p:spPr>
+          <a:xfrm xmlns:a="http://schemas.openxmlformats.org/drawingml/2006/main">
+            <a:off x="6086475" y="5962650"/>
+            <a:ext cx="5495925" cy="447675"/>
+          </a:xfrm>
+          <a:prstGeom xmlns:a="http://schemas.openxmlformats.org/drawingml/2006/main" prst="rect">
+            <a:avLst/>
+          </a:prstGeom>
+          <a:noFill xmlns:a="http://schemas.openxmlformats.org/drawingml/2006/main"/>
+          <a:ln xmlns:a="http://schemas.openxmlformats.org/drawingml/2006/main" w="0">
+            <a:noFill/>
+            <a:prstDash val="solid"/>
+          </a:ln>
+        </p:spPr>
+        <p:txBody>
+          <a:bodyPr xmlns:a="http://schemas.openxmlformats.org/drawingml/2006/main" wrap="square" lIns="0" tIns="0" rIns="0" bIns="0" anchor="t">
+            <a:noAutofit/>
+          </a:bodyPr>
+          <a:lstStyle xmlns:a="http://schemas.openxmlformats.org/drawingml/2006/main">
+            <a:defPPr algn="l">
+              <a:defRPr sz="1875">
+                <a:solidFill>
+                  <a:srgbClr val="BCD0EB"/>
+                </a:solidFill>
+                <a:latin typeface="Arial"/>
+                <a:ea typeface="Arial"/>
+                <a:cs typeface="Arial"/>
+              </a:defRPr>
+            </a:defPPr>
+            <a:lvl1pPr algn="l">
+              <a:defRPr sz="1875">
+                <a:solidFill>
+                  <a:srgbClr val="BCD0EB"/>
+                </a:solidFill>
+                <a:latin typeface="Arial"/>
+                <a:ea typeface="Arial"/>
+                <a:cs typeface="Arial"/>
+              </a:defRPr>
+            </a:lvl1pPr>
+            <a:lvl2pPr algn="l">
+              <a:defRPr sz="1875">
+                <a:solidFill>
+                  <a:srgbClr val="BCD0EB"/>
+                </a:solidFill>
+                <a:latin typeface="Arial"/>
+                <a:ea typeface="Arial"/>
+                <a:cs typeface="Arial"/>
+              </a:defRPr>
+            </a:lvl2pPr>
+            <a:lvl3pPr algn="l">
+              <a:defRPr sz="1875">
+                <a:solidFill>
+                  <a:srgbClr val="BCD0EB"/>
+                </a:solidFill>
+                <a:latin typeface="Arial"/>
+                <a:ea typeface="Arial"/>
+                <a:cs typeface="Arial"/>
+              </a:defRPr>
+            </a:lvl3pPr>
+            <a:lvl4pPr algn="l">
+              <a:defRPr sz="1875">
+                <a:solidFill>
+                  <a:srgbClr val="BCD0EB"/>
+                </a:solidFill>
+                <a:latin typeface="Arial"/>
+                <a:ea typeface="Arial"/>
+                <a:cs typeface="Arial"/>
+              </a:defRPr>
+            </a:lvl4pPr>
+            <a:lvl5pPr algn="l">
+              <a:defRPr sz="1875">
+                <a:solidFill>
+                  <a:srgbClr val="BCD0EB"/>
+                </a:solidFill>
+                <a:latin typeface="Arial"/>
+                <a:ea typeface="Arial"/>
+                <a:cs typeface="Arial"/>
+              </a:defRPr>
+            </a:lvl5pPr>
+            <a:lvl6pPr algn="l">
+              <a:defRPr sz="1875">
+                <a:solidFill>
+                  <a:srgbClr val="BCD0EB"/>
+                </a:solidFill>
+                <a:latin typeface="Arial"/>
+                <a:ea typeface="Arial"/>
+                <a:cs typeface="Arial"/>
+              </a:defRPr>
+            </a:lvl6pPr>
+            <a:lvl7pPr algn="l">
+              <a:defRPr sz="1875">
+                <a:solidFill>
+                  <a:srgbClr val="BCD0EB"/>
+                </a:solidFill>
+                <a:latin typeface="Arial"/>
+                <a:ea typeface="Arial"/>
+                <a:cs typeface="Arial"/>
+              </a:defRPr>
+            </a:lvl7pPr>
+            <a:lvl8pPr algn="l">
+              <a:defRPr sz="1875">
+                <a:solidFill>
+                  <a:srgbClr val="BCD0EB"/>
+                </a:solidFill>
+                <a:latin typeface="Arial"/>
+                <a:ea typeface="Arial"/>
+                <a:cs typeface="Arial"/>
+              </a:defRPr>
+            </a:lvl8pPr>
+            <a:lvl9pPr algn="l">
+              <a:defRPr sz="1875">
+                <a:solidFill>
+                  <a:srgbClr val="BCD0EB"/>
+                </a:solidFill>
+                <a:latin typeface="Arial"/>
+                <a:ea typeface="Arial"/>
+                <a:cs typeface="Arial"/>
+              </a:defRPr>
+            </a:lvl9pPr>
+          </a:lstStyle>
+          <a:p xmlns:a="http://schemas.openxmlformats.org/drawingml/2006/main">
+            <a:pPr algn="l">
+              <a:defRPr sz="1875">
+                <a:solidFill>
+                  <a:srgbClr val="BCD0EB"/>
+                </a:solidFill>
+                <a:latin typeface="Arial"/>
+                <a:ea typeface="Arial"/>
+                <a:cs typeface="Arial"/>
+              </a:defRPr>
+            </a:pPr>
+            <a:r>
+              <a:rPr sz="1875">
+                <a:solidFill>
+                  <a:srgbClr val="BCD0EB"/>
+                </a:solidFill>
+                <a:latin typeface="Arial"/>
+                <a:ea typeface="Arial"/>
+                <a:cs typeface="Arial"/>
+              </a:rPr>
+              <a:t>18 berkas PNG. Orientasi asli dipertahankan.</a:t>
+            </a:r>
+          </a:p>
+        </p:txBody>
+      </p:sp>
     </p:spTree>
     <p:extLst>
       <p:ext uri="{BB962C8B-B14F-4D97-AF65-F5344CB8AC3E}">
@@ -12807,7 +18998,7 @@
           <p:nvPr/>
         </p:nvPicPr>
         <p:blipFill>
-          <a:blip xmlns:r="http://schemas.openxmlformats.org/officeDocument/2006/relationships" xmlns:a="http://schemas.openxmlformats.org/drawingml/2006/main" r:embed="R9918eec152604365"/>
+          <a:blip xmlns:r="http://schemas.openxmlformats.org/officeDocument/2006/relationships" xmlns:a="http://schemas.openxmlformats.org/drawingml/2006/main" r:embed="Re732d777bfff439b"/>
           <a:srcRect xmlns:a="http://schemas.openxmlformats.org/drawingml/2006/main" l="0" t="27" r="0" b="27"/>
           <a:stretch xmlns:a="http://schemas.openxmlformats.org/drawingml/2006/main">
             <a:fillRect l="0" t="0" r="0" b="0"/>
@@ -13136,7 +19327,7 @@
                 <a:ea typeface="Arial"/>
                 <a:cs typeface="Arial"/>
               </a:rPr>
-              <a:t>08 / 11</a:t>
+              <a:t>07 / 09</a:t>
             </a:r>
           </a:p>
         </p:txBody>
@@ -14474,7 +20665,7 @@
           <p:nvPr/>
         </p:nvPicPr>
         <p:blipFill>
-          <a:blip xmlns:r="http://schemas.openxmlformats.org/officeDocument/2006/relationships" xmlns:a="http://schemas.openxmlformats.org/drawingml/2006/main" r:embed="R251f9e9dccda45d4"/>
+          <a:blip xmlns:r="http://schemas.openxmlformats.org/officeDocument/2006/relationships" xmlns:a="http://schemas.openxmlformats.org/drawingml/2006/main" r:embed="R336d06d480e443e5"/>
           <a:stretch xmlns:a="http://schemas.openxmlformats.org/drawingml/2006/main"/>
         </p:blipFill>
         <p:spPr>
@@ -14502,7 +20693,7 @@
           <p:nvPr/>
         </p:nvPicPr>
         <p:blipFill>
-          <a:blip xmlns:r="http://schemas.openxmlformats.org/officeDocument/2006/relationships" xmlns:a="http://schemas.openxmlformats.org/drawingml/2006/main" r:embed="R8ef3ca19c55c44bf"/>
+          <a:blip xmlns:r="http://schemas.openxmlformats.org/officeDocument/2006/relationships" xmlns:a="http://schemas.openxmlformats.org/drawingml/2006/main" r:embed="Ra3e2a711106345c4"/>
           <a:stretch xmlns:a="http://schemas.openxmlformats.org/drawingml/2006/main"/>
         </p:blipFill>
         <p:spPr>
@@ -14741,7 +20932,7 @@
           <p:nvPr/>
         </p:nvPicPr>
         <p:blipFill>
-          <a:blip xmlns:r="http://schemas.openxmlformats.org/officeDocument/2006/relationships" xmlns:a="http://schemas.openxmlformats.org/drawingml/2006/main" r:embed="R3037727ab3464648"/>
+          <a:blip xmlns:r="http://schemas.openxmlformats.org/officeDocument/2006/relationships" xmlns:a="http://schemas.openxmlformats.org/drawingml/2006/main" r:embed="Reb4fefca49624379"/>
           <a:srcRect xmlns:a="http://schemas.openxmlformats.org/drawingml/2006/main" l="0" t="27" r="0" b="27"/>
           <a:stretch xmlns:a="http://schemas.openxmlformats.org/drawingml/2006/main">
             <a:fillRect l="0" t="0" r="0" b="0"/>
@@ -15070,7 +21261,7 @@
                 <a:ea typeface="Arial"/>
                 <a:cs typeface="Arial"/>
               </a:rPr>
-              <a:t>09 / 11</a:t>
+              <a:t>08 / 09</a:t>
             </a:r>
           </a:p>
         </p:txBody>
